--- a/static/ppts/G6_Math_Full_Revision.pptx
+++ b/static/ppts/G6_Math_Full_Revision.pptx
@@ -9,15 +9,9 @@
     <p:sldId id="257" r:id="rId3"/>
     <p:sldId id="258" r:id="rId4"/>
     <p:sldId id="259" r:id="rId5"/>
-    <p:sldId id="260" r:id="rId6"/>
-    <p:sldId id="261" r:id="rId7"/>
-    <p:sldId id="262" r:id="rId8"/>
-    <p:sldId id="263" r:id="rId9"/>
-    <p:sldId id="264" r:id="rId10"/>
-    <p:sldId id="265" r:id="rId11"/>
   </p:sldIdLst>
   <p:notesMasterIdLst>
-    <p:notesMasterId r:id="rId12"/>
+    <p:notesMasterId r:id="rId6"/>
   </p:notesMasterIdLst>
   <p:sldSz cx="9144000" cy="5143500"/>
   <p:notesSz cx="5143500" cy="9144000"/>
@@ -553,94 +547,6 @@
 </p:notes>
 </file>
 
-<file path=ppt/notesSlides/notesSlide10.xml><?xml version="1.0" encoding="utf-8"?>
-<p:notes xmlns:a="http://schemas.openxmlformats.org/drawingml/2006/main" xmlns:r="http://schemas.openxmlformats.org/officeDocument/2006/relationships" xmlns:p="http://schemas.openxmlformats.org/presentationml/2006/main">
-  <p:cSld>
-    <p:spTree>
-      <p:nvGrpSpPr>
-        <p:cNvPr id="1" name=""/>
-        <p:cNvGrpSpPr/>
-        <p:nvPr/>
-      </p:nvGrpSpPr>
-      <p:grpSpPr>
-        <a:xfrm>
-          <a:off x="0" y="0"/>
-          <a:ext cx="0" cy="0"/>
-          <a:chOff x="0" y="0"/>
-          <a:chExt cx="0" cy="0"/>
-        </a:xfrm>
-      </p:grpSpPr>
-      <p:sp>
-        <p:nvSpPr>
-          <p:cNvPr id="2" name="Slide Image Placeholder 1"/>
-          <p:cNvSpPr>
-            <a:spLocks noGrp="1" noRot="1" noChangeAspect="1"/>
-          </p:cNvSpPr>
-          <p:nvPr>
-            <p:ph type="sldImg"/>
-          </p:nvPr>
-        </p:nvSpPr>
-        <p:spPr/>
-      </p:sp>
-      <p:sp>
-        <p:nvSpPr>
-          <p:cNvPr id="3" name="Notes Placeholder 2"/>
-          <p:cNvSpPr>
-            <a:spLocks noGrp="1"/>
-          </p:cNvSpPr>
-          <p:nvPr>
-            <p:ph type="body" idx="1"/>
-          </p:nvPr>
-        </p:nvSpPr>
-        <p:spPr/>
-        <p:txBody>
-          <a:bodyPr/>
-          <a:lstStyle/>
-          <a:p>
-            <a:r>
-              <a:rPr lang="en-US" dirty="0"/>
-              <a:t/>
-            </a:r>
-            <a:endParaRPr lang="en-US" dirty="0"/>
-          </a:p>
-        </p:txBody>
-      </p:sp>
-      <p:sp>
-        <p:nvSpPr>
-          <p:cNvPr id="4" name="Slide Number Placeholder 3"/>
-          <p:cNvSpPr>
-            <a:spLocks noGrp="1"/>
-          </p:cNvSpPr>
-          <p:nvPr>
-            <p:ph type="sldNum" sz="quarter" idx="10"/>
-          </p:nvPr>
-        </p:nvSpPr>
-        <p:spPr/>
-        <p:txBody>
-          <a:bodyPr/>
-          <a:lstStyle/>
-          <a:p>
-            <a:fld id="{F7021451-1387-4CA6-816F-3879F97B5CBC}" type="slidenum">
-              <a:rPr lang="en-US"/>
-              <a:t>10</a:t>
-            </a:fld>
-            <a:endParaRPr lang="en-US"/>
-          </a:p>
-        </p:txBody>
-      </p:sp>
-    </p:spTree>
-    <p:extLst>
-      <p:ext uri="{BB962C8B-B14F-4D97-AF65-F5344CB8AC3E}">
-        <p14:creationId xmlns:p14="http://schemas.microsoft.com/office/powerpoint/2010/main" val="1024086991"/>
-      </p:ext>
-    </p:extLst>
-  </p:cSld>
-  <p:clrMapOvr>
-    <a:masterClrMapping/>
-  </p:clrMapOvr>
-</p:notes>
-</file>
-
 <file path=ppt/notesSlides/notesSlide2.xml><?xml version="1.0" encoding="utf-8"?>
 <p:notes xmlns:a="http://schemas.openxmlformats.org/drawingml/2006/main" xmlns:r="http://schemas.openxmlformats.org/officeDocument/2006/relationships" xmlns:p="http://schemas.openxmlformats.org/presentationml/2006/main">
   <p:cSld>
@@ -887,446 +793,6 @@
             <a:fld id="{F7021451-1387-4CA6-816F-3879F97B5CBC}" type="slidenum">
               <a:rPr lang="en-US"/>
               <a:t>4</a:t>
-            </a:fld>
-            <a:endParaRPr lang="en-US"/>
-          </a:p>
-        </p:txBody>
-      </p:sp>
-    </p:spTree>
-    <p:extLst>
-      <p:ext uri="{BB962C8B-B14F-4D97-AF65-F5344CB8AC3E}">
-        <p14:creationId xmlns:p14="http://schemas.microsoft.com/office/powerpoint/2010/main" val="1024086991"/>
-      </p:ext>
-    </p:extLst>
-  </p:cSld>
-  <p:clrMapOvr>
-    <a:masterClrMapping/>
-  </p:clrMapOvr>
-</p:notes>
-</file>
-
-<file path=ppt/notesSlides/notesSlide5.xml><?xml version="1.0" encoding="utf-8"?>
-<p:notes xmlns:a="http://schemas.openxmlformats.org/drawingml/2006/main" xmlns:r="http://schemas.openxmlformats.org/officeDocument/2006/relationships" xmlns:p="http://schemas.openxmlformats.org/presentationml/2006/main">
-  <p:cSld>
-    <p:spTree>
-      <p:nvGrpSpPr>
-        <p:cNvPr id="1" name=""/>
-        <p:cNvGrpSpPr/>
-        <p:nvPr/>
-      </p:nvGrpSpPr>
-      <p:grpSpPr>
-        <a:xfrm>
-          <a:off x="0" y="0"/>
-          <a:ext cx="0" cy="0"/>
-          <a:chOff x="0" y="0"/>
-          <a:chExt cx="0" cy="0"/>
-        </a:xfrm>
-      </p:grpSpPr>
-      <p:sp>
-        <p:nvSpPr>
-          <p:cNvPr id="2" name="Slide Image Placeholder 1"/>
-          <p:cNvSpPr>
-            <a:spLocks noGrp="1" noRot="1" noChangeAspect="1"/>
-          </p:cNvSpPr>
-          <p:nvPr>
-            <p:ph type="sldImg"/>
-          </p:nvPr>
-        </p:nvSpPr>
-        <p:spPr/>
-      </p:sp>
-      <p:sp>
-        <p:nvSpPr>
-          <p:cNvPr id="3" name="Notes Placeholder 2"/>
-          <p:cNvSpPr>
-            <a:spLocks noGrp="1"/>
-          </p:cNvSpPr>
-          <p:nvPr>
-            <p:ph type="body" idx="1"/>
-          </p:nvPr>
-        </p:nvSpPr>
-        <p:spPr/>
-        <p:txBody>
-          <a:bodyPr/>
-          <a:lstStyle/>
-          <a:p>
-            <a:r>
-              <a:rPr lang="en-US" dirty="0"/>
-              <a:t/>
-            </a:r>
-            <a:endParaRPr lang="en-US" dirty="0"/>
-          </a:p>
-        </p:txBody>
-      </p:sp>
-      <p:sp>
-        <p:nvSpPr>
-          <p:cNvPr id="4" name="Slide Number Placeholder 3"/>
-          <p:cNvSpPr>
-            <a:spLocks noGrp="1"/>
-          </p:cNvSpPr>
-          <p:nvPr>
-            <p:ph type="sldNum" sz="quarter" idx="10"/>
-          </p:nvPr>
-        </p:nvSpPr>
-        <p:spPr/>
-        <p:txBody>
-          <a:bodyPr/>
-          <a:lstStyle/>
-          <a:p>
-            <a:fld id="{F7021451-1387-4CA6-816F-3879F97B5CBC}" type="slidenum">
-              <a:rPr lang="en-US"/>
-              <a:t>5</a:t>
-            </a:fld>
-            <a:endParaRPr lang="en-US"/>
-          </a:p>
-        </p:txBody>
-      </p:sp>
-    </p:spTree>
-    <p:extLst>
-      <p:ext uri="{BB962C8B-B14F-4D97-AF65-F5344CB8AC3E}">
-        <p14:creationId xmlns:p14="http://schemas.microsoft.com/office/powerpoint/2010/main" val="1024086991"/>
-      </p:ext>
-    </p:extLst>
-  </p:cSld>
-  <p:clrMapOvr>
-    <a:masterClrMapping/>
-  </p:clrMapOvr>
-</p:notes>
-</file>
-
-<file path=ppt/notesSlides/notesSlide6.xml><?xml version="1.0" encoding="utf-8"?>
-<p:notes xmlns:a="http://schemas.openxmlformats.org/drawingml/2006/main" xmlns:r="http://schemas.openxmlformats.org/officeDocument/2006/relationships" xmlns:p="http://schemas.openxmlformats.org/presentationml/2006/main">
-  <p:cSld>
-    <p:spTree>
-      <p:nvGrpSpPr>
-        <p:cNvPr id="1" name=""/>
-        <p:cNvGrpSpPr/>
-        <p:nvPr/>
-      </p:nvGrpSpPr>
-      <p:grpSpPr>
-        <a:xfrm>
-          <a:off x="0" y="0"/>
-          <a:ext cx="0" cy="0"/>
-          <a:chOff x="0" y="0"/>
-          <a:chExt cx="0" cy="0"/>
-        </a:xfrm>
-      </p:grpSpPr>
-      <p:sp>
-        <p:nvSpPr>
-          <p:cNvPr id="2" name="Slide Image Placeholder 1"/>
-          <p:cNvSpPr>
-            <a:spLocks noGrp="1" noRot="1" noChangeAspect="1"/>
-          </p:cNvSpPr>
-          <p:nvPr>
-            <p:ph type="sldImg"/>
-          </p:nvPr>
-        </p:nvSpPr>
-        <p:spPr/>
-      </p:sp>
-      <p:sp>
-        <p:nvSpPr>
-          <p:cNvPr id="3" name="Notes Placeholder 2"/>
-          <p:cNvSpPr>
-            <a:spLocks noGrp="1"/>
-          </p:cNvSpPr>
-          <p:nvPr>
-            <p:ph type="body" idx="1"/>
-          </p:nvPr>
-        </p:nvSpPr>
-        <p:spPr/>
-        <p:txBody>
-          <a:bodyPr/>
-          <a:lstStyle/>
-          <a:p>
-            <a:r>
-              <a:rPr lang="en-US" dirty="0"/>
-              <a:t/>
-            </a:r>
-            <a:endParaRPr lang="en-US" dirty="0"/>
-          </a:p>
-        </p:txBody>
-      </p:sp>
-      <p:sp>
-        <p:nvSpPr>
-          <p:cNvPr id="4" name="Slide Number Placeholder 3"/>
-          <p:cNvSpPr>
-            <a:spLocks noGrp="1"/>
-          </p:cNvSpPr>
-          <p:nvPr>
-            <p:ph type="sldNum" sz="quarter" idx="10"/>
-          </p:nvPr>
-        </p:nvSpPr>
-        <p:spPr/>
-        <p:txBody>
-          <a:bodyPr/>
-          <a:lstStyle/>
-          <a:p>
-            <a:fld id="{F7021451-1387-4CA6-816F-3879F97B5CBC}" type="slidenum">
-              <a:rPr lang="en-US"/>
-              <a:t>6</a:t>
-            </a:fld>
-            <a:endParaRPr lang="en-US"/>
-          </a:p>
-        </p:txBody>
-      </p:sp>
-    </p:spTree>
-    <p:extLst>
-      <p:ext uri="{BB962C8B-B14F-4D97-AF65-F5344CB8AC3E}">
-        <p14:creationId xmlns:p14="http://schemas.microsoft.com/office/powerpoint/2010/main" val="1024086991"/>
-      </p:ext>
-    </p:extLst>
-  </p:cSld>
-  <p:clrMapOvr>
-    <a:masterClrMapping/>
-  </p:clrMapOvr>
-</p:notes>
-</file>
-
-<file path=ppt/notesSlides/notesSlide7.xml><?xml version="1.0" encoding="utf-8"?>
-<p:notes xmlns:a="http://schemas.openxmlformats.org/drawingml/2006/main" xmlns:r="http://schemas.openxmlformats.org/officeDocument/2006/relationships" xmlns:p="http://schemas.openxmlformats.org/presentationml/2006/main">
-  <p:cSld>
-    <p:spTree>
-      <p:nvGrpSpPr>
-        <p:cNvPr id="1" name=""/>
-        <p:cNvGrpSpPr/>
-        <p:nvPr/>
-      </p:nvGrpSpPr>
-      <p:grpSpPr>
-        <a:xfrm>
-          <a:off x="0" y="0"/>
-          <a:ext cx="0" cy="0"/>
-          <a:chOff x="0" y="0"/>
-          <a:chExt cx="0" cy="0"/>
-        </a:xfrm>
-      </p:grpSpPr>
-      <p:sp>
-        <p:nvSpPr>
-          <p:cNvPr id="2" name="Slide Image Placeholder 1"/>
-          <p:cNvSpPr>
-            <a:spLocks noGrp="1" noRot="1" noChangeAspect="1"/>
-          </p:cNvSpPr>
-          <p:nvPr>
-            <p:ph type="sldImg"/>
-          </p:nvPr>
-        </p:nvSpPr>
-        <p:spPr/>
-      </p:sp>
-      <p:sp>
-        <p:nvSpPr>
-          <p:cNvPr id="3" name="Notes Placeholder 2"/>
-          <p:cNvSpPr>
-            <a:spLocks noGrp="1"/>
-          </p:cNvSpPr>
-          <p:nvPr>
-            <p:ph type="body" idx="1"/>
-          </p:nvPr>
-        </p:nvSpPr>
-        <p:spPr/>
-        <p:txBody>
-          <a:bodyPr/>
-          <a:lstStyle/>
-          <a:p>
-            <a:r>
-              <a:rPr lang="en-US" dirty="0"/>
-              <a:t/>
-            </a:r>
-            <a:endParaRPr lang="en-US" dirty="0"/>
-          </a:p>
-        </p:txBody>
-      </p:sp>
-      <p:sp>
-        <p:nvSpPr>
-          <p:cNvPr id="4" name="Slide Number Placeholder 3"/>
-          <p:cNvSpPr>
-            <a:spLocks noGrp="1"/>
-          </p:cNvSpPr>
-          <p:nvPr>
-            <p:ph type="sldNum" sz="quarter" idx="10"/>
-          </p:nvPr>
-        </p:nvSpPr>
-        <p:spPr/>
-        <p:txBody>
-          <a:bodyPr/>
-          <a:lstStyle/>
-          <a:p>
-            <a:fld id="{F7021451-1387-4CA6-816F-3879F97B5CBC}" type="slidenum">
-              <a:rPr lang="en-US"/>
-              <a:t>7</a:t>
-            </a:fld>
-            <a:endParaRPr lang="en-US"/>
-          </a:p>
-        </p:txBody>
-      </p:sp>
-    </p:spTree>
-    <p:extLst>
-      <p:ext uri="{BB962C8B-B14F-4D97-AF65-F5344CB8AC3E}">
-        <p14:creationId xmlns:p14="http://schemas.microsoft.com/office/powerpoint/2010/main" val="1024086991"/>
-      </p:ext>
-    </p:extLst>
-  </p:cSld>
-  <p:clrMapOvr>
-    <a:masterClrMapping/>
-  </p:clrMapOvr>
-</p:notes>
-</file>
-
-<file path=ppt/notesSlides/notesSlide8.xml><?xml version="1.0" encoding="utf-8"?>
-<p:notes xmlns:a="http://schemas.openxmlformats.org/drawingml/2006/main" xmlns:r="http://schemas.openxmlformats.org/officeDocument/2006/relationships" xmlns:p="http://schemas.openxmlformats.org/presentationml/2006/main">
-  <p:cSld>
-    <p:spTree>
-      <p:nvGrpSpPr>
-        <p:cNvPr id="1" name=""/>
-        <p:cNvGrpSpPr/>
-        <p:nvPr/>
-      </p:nvGrpSpPr>
-      <p:grpSpPr>
-        <a:xfrm>
-          <a:off x="0" y="0"/>
-          <a:ext cx="0" cy="0"/>
-          <a:chOff x="0" y="0"/>
-          <a:chExt cx="0" cy="0"/>
-        </a:xfrm>
-      </p:grpSpPr>
-      <p:sp>
-        <p:nvSpPr>
-          <p:cNvPr id="2" name="Slide Image Placeholder 1"/>
-          <p:cNvSpPr>
-            <a:spLocks noGrp="1" noRot="1" noChangeAspect="1"/>
-          </p:cNvSpPr>
-          <p:nvPr>
-            <p:ph type="sldImg"/>
-          </p:nvPr>
-        </p:nvSpPr>
-        <p:spPr/>
-      </p:sp>
-      <p:sp>
-        <p:nvSpPr>
-          <p:cNvPr id="3" name="Notes Placeholder 2"/>
-          <p:cNvSpPr>
-            <a:spLocks noGrp="1"/>
-          </p:cNvSpPr>
-          <p:nvPr>
-            <p:ph type="body" idx="1"/>
-          </p:nvPr>
-        </p:nvSpPr>
-        <p:spPr/>
-        <p:txBody>
-          <a:bodyPr/>
-          <a:lstStyle/>
-          <a:p>
-            <a:r>
-              <a:rPr lang="en-US" dirty="0"/>
-              <a:t/>
-            </a:r>
-            <a:endParaRPr lang="en-US" dirty="0"/>
-          </a:p>
-        </p:txBody>
-      </p:sp>
-      <p:sp>
-        <p:nvSpPr>
-          <p:cNvPr id="4" name="Slide Number Placeholder 3"/>
-          <p:cNvSpPr>
-            <a:spLocks noGrp="1"/>
-          </p:cNvSpPr>
-          <p:nvPr>
-            <p:ph type="sldNum" sz="quarter" idx="10"/>
-          </p:nvPr>
-        </p:nvSpPr>
-        <p:spPr/>
-        <p:txBody>
-          <a:bodyPr/>
-          <a:lstStyle/>
-          <a:p>
-            <a:fld id="{F7021451-1387-4CA6-816F-3879F97B5CBC}" type="slidenum">
-              <a:rPr lang="en-US"/>
-              <a:t>8</a:t>
-            </a:fld>
-            <a:endParaRPr lang="en-US"/>
-          </a:p>
-        </p:txBody>
-      </p:sp>
-    </p:spTree>
-    <p:extLst>
-      <p:ext uri="{BB962C8B-B14F-4D97-AF65-F5344CB8AC3E}">
-        <p14:creationId xmlns:p14="http://schemas.microsoft.com/office/powerpoint/2010/main" val="1024086991"/>
-      </p:ext>
-    </p:extLst>
-  </p:cSld>
-  <p:clrMapOvr>
-    <a:masterClrMapping/>
-  </p:clrMapOvr>
-</p:notes>
-</file>
-
-<file path=ppt/notesSlides/notesSlide9.xml><?xml version="1.0" encoding="utf-8"?>
-<p:notes xmlns:a="http://schemas.openxmlformats.org/drawingml/2006/main" xmlns:r="http://schemas.openxmlformats.org/officeDocument/2006/relationships" xmlns:p="http://schemas.openxmlformats.org/presentationml/2006/main">
-  <p:cSld>
-    <p:spTree>
-      <p:nvGrpSpPr>
-        <p:cNvPr id="1" name=""/>
-        <p:cNvGrpSpPr/>
-        <p:nvPr/>
-      </p:nvGrpSpPr>
-      <p:grpSpPr>
-        <a:xfrm>
-          <a:off x="0" y="0"/>
-          <a:ext cx="0" cy="0"/>
-          <a:chOff x="0" y="0"/>
-          <a:chExt cx="0" cy="0"/>
-        </a:xfrm>
-      </p:grpSpPr>
-      <p:sp>
-        <p:nvSpPr>
-          <p:cNvPr id="2" name="Slide Image Placeholder 1"/>
-          <p:cNvSpPr>
-            <a:spLocks noGrp="1" noRot="1" noChangeAspect="1"/>
-          </p:cNvSpPr>
-          <p:nvPr>
-            <p:ph type="sldImg"/>
-          </p:nvPr>
-        </p:nvSpPr>
-        <p:spPr/>
-      </p:sp>
-      <p:sp>
-        <p:nvSpPr>
-          <p:cNvPr id="3" name="Notes Placeholder 2"/>
-          <p:cNvSpPr>
-            <a:spLocks noGrp="1"/>
-          </p:cNvSpPr>
-          <p:nvPr>
-            <p:ph type="body" idx="1"/>
-          </p:nvPr>
-        </p:nvSpPr>
-        <p:spPr/>
-        <p:txBody>
-          <a:bodyPr/>
-          <a:lstStyle/>
-          <a:p>
-            <a:r>
-              <a:rPr lang="en-US" dirty="0"/>
-              <a:t/>
-            </a:r>
-            <a:endParaRPr lang="en-US" dirty="0"/>
-          </a:p>
-        </p:txBody>
-      </p:sp>
-      <p:sp>
-        <p:nvSpPr>
-          <p:cNvPr id="4" name="Slide Number Placeholder 3"/>
-          <p:cNvSpPr>
-            <a:spLocks noGrp="1"/>
-          </p:cNvSpPr>
-          <p:nvPr>
-            <p:ph type="sldNum" sz="quarter" idx="10"/>
-          </p:nvPr>
-        </p:nvSpPr>
-        <p:spPr/>
-        <p:txBody>
-          <a:bodyPr/>
-          <a:lstStyle/>
-          <a:p>
-            <a:fld id="{F7021451-1387-4CA6-816F-3879F97B5CBC}" type="slidenum">
-              <a:rPr lang="en-US"/>
-              <a:t>9</a:t>
             </a:fld>
             <a:endParaRPr lang="en-US"/>
           </a:p>
@@ -1655,6 +1121,13 @@
 <file path=ppt/slides/slide1.xml><?xml version="1.0" encoding="utf-8"?>
 <p:sld xmlns:a="http://schemas.openxmlformats.org/drawingml/2006/main" xmlns:r="http://schemas.openxmlformats.org/officeDocument/2006/relationships" xmlns:p="http://schemas.openxmlformats.org/presentationml/2006/main">
   <p:cSld name="Slide 1">
+    <p:bg>
+      <p:bgPr>
+        <a:solidFill>
+          <a:srgbClr val="1B2A4A"/>
+        </a:solidFill>
+      </p:bgPr>
+    </p:bg>
     <p:spTree>
       <p:nvGrpSpPr>
         <p:cNvPr id="1" name=""/>
@@ -1678,47 +1151,27 @@
         <p:spPr>
           <a:xfrm>
             <a:off x="0" y="0"/>
-            <a:ext cx="9144000" cy="5143500"/>
+            <a:ext cx="109728" cy="5143500"/>
           </a:xfrm>
           <a:prstGeom prst="rect">
             <a:avLst/>
           </a:prstGeom>
           <a:solidFill>
-            <a:srgbClr val="1B2A4A"/>
+            <a:srgbClr val="2A9D8F"/>
           </a:solidFill>
           <a:ln/>
         </p:spPr>
       </p:sp>
       <p:sp>
         <p:nvSpPr>
-          <p:cNvPr id="3" name="Shape 1"/>
+          <p:cNvPr id="3" name="Text 1"/>
           <p:cNvSpPr/>
           <p:nvPr/>
         </p:nvSpPr>
         <p:spPr>
           <a:xfrm>
-            <a:off x="0" y="4777740"/>
-            <a:ext cx="9144000" cy="365760"/>
-          </a:xfrm>
-          <a:prstGeom prst="rect">
-            <a:avLst/>
-          </a:prstGeom>
-          <a:solidFill>
-            <a:srgbClr val="2A9D8F"/>
-          </a:solidFill>
-          <a:ln/>
-        </p:spPr>
-      </p:sp>
-      <p:sp>
-        <p:nvSpPr>
-          <p:cNvPr id="4" name="Text 2"/>
-          <p:cNvSpPr/>
-          <p:nvPr/>
-        </p:nvSpPr>
-        <p:spPr>
-          <a:xfrm>
-            <a:off x="731520" y="1097280"/>
-            <a:ext cx="7680960" cy="457200"/>
+            <a:off x="731520" y="1280160"/>
+            <a:ext cx="7772400" cy="1371600"/>
           </a:xfrm>
           <a:prstGeom prst="rect">
             <a:avLst/>
@@ -1734,46 +1187,7 @@
               <a:buNone/>
             </a:pPr>
             <a:r>
-              <a:rPr lang="en-US" sz="1400" b="1" spc="400" kern="0" dirty="0">
-                <a:solidFill>
-                  <a:srgbClr val="2A9D8F"/>
-                </a:solidFill>
-                <a:latin typeface="Calibri" pitchFamily="34" charset="0"/>
-                <a:ea typeface="Calibri" pitchFamily="34" charset="-122"/>
-                <a:cs typeface="Calibri" pitchFamily="34" charset="-120"/>
-              </a:rPr>
-              <a:t>GRADE 6 MATHEMATICS</a:t>
-            </a:r>
-            <a:endParaRPr lang="en-US" sz="1400" dirty="0"/>
-          </a:p>
-        </p:txBody>
-      </p:sp>
-      <p:sp>
-        <p:nvSpPr>
-          <p:cNvPr id="5" name="Text 3"/>
-          <p:cNvSpPr/>
-          <p:nvPr/>
-        </p:nvSpPr>
-        <p:spPr>
-          <a:xfrm>
-            <a:off x="731520" y="1645920"/>
-            <a:ext cx="7680960" cy="1463040"/>
-          </a:xfrm>
-          <a:prstGeom prst="rect">
-            <a:avLst/>
-          </a:prstGeom>
-          <a:noFill/>
-          <a:ln/>
-        </p:spPr>
-        <p:txBody>
-          <a:bodyPr wrap="square" rtlCol="0" anchor="t"/>
-          <a:lstStyle/>
-          <a:p>
-            <a:pPr indent="0" marL="0">
-              <a:buNone/>
-            </a:pPr>
-            <a:r>
-              <a:rPr lang="en-US" sz="4000" b="1" dirty="0">
+              <a:rPr lang="en-US" sz="3600" b="1" dirty="0">
                 <a:solidFill>
                   <a:srgbClr val="FFFFFF"/>
                 </a:solidFill>
@@ -1781,22 +1195,22 @@
                 <a:ea typeface="Georgia" pitchFamily="34" charset="-122"/>
                 <a:cs typeface="Georgia" pitchFamily="34" charset="-120"/>
               </a:rPr>
-              <a:t>Perimeter, Area, Volume &amp; Capacity</a:t>
-            </a:r>
-            <a:endParaRPr lang="en-US" sz="4000" dirty="0"/>
-          </a:p>
-        </p:txBody>
-      </p:sp>
-      <p:sp>
-        <p:nvSpPr>
-          <p:cNvPr id="6" name="Text 4"/>
+              <a:t>Geometry — Full Revision</a:t>
+            </a:r>
+            <a:endParaRPr lang="en-US" sz="3600" dirty="0"/>
+          </a:p>
+        </p:txBody>
+      </p:sp>
+      <p:sp>
+        <p:nvSpPr>
+          <p:cNvPr id="4" name="Text 2"/>
           <p:cNvSpPr/>
           <p:nvPr/>
         </p:nvSpPr>
         <p:spPr>
           <a:xfrm>
-            <a:off x="731520" y="3200400"/>
-            <a:ext cx="7680960" cy="548640"/>
+            <a:off x="731520" y="2743200"/>
+            <a:ext cx="7772400" cy="548640"/>
           </a:xfrm>
           <a:prstGeom prst="rect">
             <a:avLst/>
@@ -1820,7 +1234,7 @@
                 <a:ea typeface="Calibri" pitchFamily="34" charset="-122"/>
                 <a:cs typeface="Calibri" pitchFamily="34" charset="-120"/>
               </a:rPr>
-              <a:t>Full revision — everything you need to know</a:t>
+              <a:t>G6 Maths · Term 3 Review</a:t>
             </a:r>
             <a:endParaRPr lang="en-US" sz="1600" dirty="0"/>
           </a:p>
@@ -1828,14 +1242,14 @@
       </p:sp>
       <p:sp>
         <p:nvSpPr>
-          <p:cNvPr id="7" name="Text 5"/>
+          <p:cNvPr id="5" name="Text 3"/>
           <p:cNvSpPr/>
           <p:nvPr/>
         </p:nvSpPr>
         <p:spPr>
           <a:xfrm>
-            <a:off x="731520" y="4206240"/>
-            <a:ext cx="3657600" cy="365760"/>
+            <a:off x="731520" y="4389120"/>
+            <a:ext cx="7772400" cy="457200"/>
           </a:xfrm>
           <a:prstGeom prst="rect">
             <a:avLst/>
@@ -1851,7 +1265,7 @@
               <a:buNone/>
             </a:pPr>
             <a:r>
-              <a:rPr lang="en-US" sz="1100" dirty="0">
+              <a:rPr lang="en-US" sz="1000" dirty="0">
                 <a:solidFill>
                   <a:srgbClr val="6B6660"/>
                 </a:solidFill>
@@ -1859,9 +1273,9 @@
                 <a:ea typeface="Calibri" pitchFamily="34" charset="-122"/>
                 <a:cs typeface="Calibri" pitchFamily="34" charset="-120"/>
               </a:rPr>
-              <a:t>Mr Zocchi · NIS</a:t>
-            </a:r>
-            <a:endParaRPr lang="en-US" sz="1100" dirty="0"/>
+              <a:t>Mr Zocchi · mrzocchi.com</a:t>
+            </a:r>
+            <a:endParaRPr lang="en-US" sz="1000" dirty="0"/>
           </a:p>
         </p:txBody>
       </p:sp>
@@ -1873,9 +1287,16 @@
 </p:sld>
 </file>
 
-<file path=ppt/slides/slide10.xml><?xml version="1.0" encoding="utf-8"?>
+<file path=ppt/slides/slide2.xml><?xml version="1.0" encoding="utf-8"?>
 <p:sld xmlns:a="http://schemas.openxmlformats.org/drawingml/2006/main" xmlns:r="http://schemas.openxmlformats.org/officeDocument/2006/relationships" xmlns:p="http://schemas.openxmlformats.org/presentationml/2006/main">
-  <p:cSld name="Slide 10">
+  <p:cSld name="Slide 2">
+    <p:bg>
+      <p:bgPr>
+        <a:solidFill>
+          <a:srgbClr val="FFFFFF"/>
+        </a:solidFill>
+      </p:bgPr>
+    </p:bg>
     <p:spTree>
       <p:nvGrpSpPr>
         <p:cNvPr id="1" name=""/>
@@ -1899,47 +1320,27 @@
         <p:spPr>
           <a:xfrm>
             <a:off x="0" y="0"/>
-            <a:ext cx="9144000" cy="5143500"/>
+            <a:ext cx="9144000" cy="54864"/>
           </a:xfrm>
           <a:prstGeom prst="rect">
             <a:avLst/>
           </a:prstGeom>
           <a:solidFill>
-            <a:srgbClr val="1B2A4A"/>
+            <a:srgbClr val="2A9D8F"/>
           </a:solidFill>
           <a:ln/>
         </p:spPr>
       </p:sp>
       <p:sp>
         <p:nvSpPr>
-          <p:cNvPr id="3" name="Shape 1"/>
+          <p:cNvPr id="3" name="Text 1"/>
           <p:cNvSpPr/>
           <p:nvPr/>
         </p:nvSpPr>
         <p:spPr>
           <a:xfrm>
-            <a:off x="0" y="4777740"/>
-            <a:ext cx="9144000" cy="365760"/>
-          </a:xfrm>
-          <a:prstGeom prst="rect">
-            <a:avLst/>
-          </a:prstGeom>
-          <a:solidFill>
-            <a:srgbClr val="2A9D8F"/>
-          </a:solidFill>
-          <a:ln/>
-        </p:spPr>
-      </p:sp>
-      <p:sp>
-        <p:nvSpPr>
-          <p:cNvPr id="4" name="Text 2"/>
-          <p:cNvSpPr/>
-          <p:nvPr/>
-        </p:nvSpPr>
-        <p:spPr>
-          <a:xfrm>
-            <a:off x="731520" y="1371600"/>
-            <a:ext cx="7680960" cy="914400"/>
+            <a:off x="548640" y="274320"/>
+            <a:ext cx="8046720" cy="640080"/>
           </a:xfrm>
           <a:prstGeom prst="rect">
             <a:avLst/>
@@ -1948,37 +1349,37 @@
           <a:ln/>
         </p:spPr>
         <p:txBody>
-          <a:bodyPr wrap="square" rtlCol="0" anchor="ctr"/>
+          <a:bodyPr wrap="square" lIns="0" tIns="0" rIns="0" bIns="0" rtlCol="0" anchor="ctr"/>
           <a:lstStyle/>
           <a:p>
-            <a:pPr algn="ctr" indent="0" marL="0">
+            <a:pPr indent="0" marL="0">
               <a:buNone/>
             </a:pPr>
             <a:r>
-              <a:rPr lang="en-US" sz="3600" b="1" dirty="0">
+              <a:rPr lang="en-US" sz="2600" b="1" dirty="0">
                 <a:solidFill>
-                  <a:srgbClr val="FFFFFF"/>
+                  <a:srgbClr val="1B2A4A"/>
                 </a:solidFill>
                 <a:latin typeface="Georgia" pitchFamily="34" charset="0"/>
                 <a:ea typeface="Georgia" pitchFamily="34" charset="-122"/>
                 <a:cs typeface="Georgia" pitchFamily="34" charset="-120"/>
               </a:rPr>
-              <a:t>Review &amp; Practise</a:t>
-            </a:r>
-            <a:endParaRPr lang="en-US" sz="3600" dirty="0"/>
-          </a:p>
-        </p:txBody>
-      </p:sp>
-      <p:sp>
-        <p:nvSpPr>
-          <p:cNvPr id="5" name="Text 3"/>
+              <a:t>Perimeter &amp; Area</a:t>
+            </a:r>
+            <a:endParaRPr lang="en-US" sz="2600" dirty="0"/>
+          </a:p>
+        </p:txBody>
+      </p:sp>
+      <p:sp>
+        <p:nvSpPr>
+          <p:cNvPr id="4" name="Text 2"/>
           <p:cNvSpPr/>
           <p:nvPr/>
         </p:nvSpPr>
         <p:spPr>
           <a:xfrm>
-            <a:off x="731520" y="2468880"/>
-            <a:ext cx="7680960" cy="548640"/>
+            <a:off x="548640" y="1097280"/>
+            <a:ext cx="8046720" cy="3474720"/>
           </a:xfrm>
           <a:prstGeom prst="rect">
             <a:avLst/>
@@ -1987,37 +1388,104 @@
           <a:ln/>
         </p:spPr>
         <p:txBody>
-          <a:bodyPr wrap="square" rtlCol="0" anchor="ctr"/>
+          <a:bodyPr wrap="square" rtlCol="0" anchor="t"/>
           <a:lstStyle/>
           <a:p>
-            <a:pPr algn="ctr" indent="0" marL="0">
-              <a:buNone/>
+            <a:pPr marL="342900" indent="-342900">
+              <a:spcAft>
+                <a:spcPts val="800"/>
+              </a:spcAft>
+              <a:buSzPct val="100000"/>
+              <a:buChar char="•"/>
             </a:pPr>
             <a:r>
-              <a:rPr lang="en-US" sz="1800" dirty="0">
+              <a:rPr lang="en-US" sz="1500" dirty="0">
                 <a:solidFill>
-                  <a:srgbClr val="2A9D8F"/>
+                  <a:srgbClr val="3D3A36"/>
                 </a:solidFill>
                 <a:latin typeface="Calibri" pitchFamily="34" charset="0"/>
                 <a:ea typeface="Calibri" pitchFamily="34" charset="-122"/>
                 <a:cs typeface="Calibri" pitchFamily="34" charset="-120"/>
               </a:rPr>
-              <a:t>learnlattice.org/students/exam-revision</a:t>
-            </a:r>
-            <a:endParaRPr lang="en-US" sz="1800" dirty="0"/>
-          </a:p>
-        </p:txBody>
-      </p:sp>
-      <p:sp>
-        <p:nvSpPr>
-          <p:cNvPr id="6" name="Text 4"/>
+              <a:t>Perimeter = distance around (add all sides)</a:t>
+            </a:r>
+            <a:endParaRPr lang="en-US" sz="1500" dirty="0"/>
+          </a:p>
+          <a:p>
+            <a:pPr marL="342900" indent="-342900">
+              <a:spcAft>
+                <a:spcPts val="800"/>
+              </a:spcAft>
+              <a:buSzPct val="100000"/>
+              <a:buChar char="•"/>
+            </a:pPr>
+            <a:r>
+              <a:rPr lang="en-US" sz="1500" dirty="0">
+                <a:solidFill>
+                  <a:srgbClr val="3D3A36"/>
+                </a:solidFill>
+                <a:latin typeface="Calibri" pitchFamily="34" charset="0"/>
+                <a:ea typeface="Calibri" pitchFamily="34" charset="-122"/>
+                <a:cs typeface="Calibri" pitchFamily="34" charset="-120"/>
+              </a:rPr>
+              <a:t>Rectangle: P = 2(l+w) | Square: P = 4s</a:t>
+            </a:r>
+            <a:endParaRPr lang="en-US" sz="1500" dirty="0"/>
+          </a:p>
+          <a:p>
+            <a:pPr marL="342900" indent="-342900">
+              <a:spcAft>
+                <a:spcPts val="800"/>
+              </a:spcAft>
+              <a:buSzPct val="100000"/>
+              <a:buChar char="•"/>
+            </a:pPr>
+            <a:r>
+              <a:rPr lang="en-US" sz="1500" dirty="0">
+                <a:solidFill>
+                  <a:srgbClr val="3D3A36"/>
+                </a:solidFill>
+                <a:latin typeface="Calibri" pitchFamily="34" charset="0"/>
+                <a:ea typeface="Calibri" pitchFamily="34" charset="-122"/>
+                <a:cs typeface="Calibri" pitchFamily="34" charset="-120"/>
+              </a:rPr>
+              <a:t>Area = space inside a 2D shape</a:t>
+            </a:r>
+            <a:endParaRPr lang="en-US" sz="1500" dirty="0"/>
+          </a:p>
+          <a:p>
+            <a:pPr marL="342900" indent="-342900">
+              <a:spcAft>
+                <a:spcPts val="800"/>
+              </a:spcAft>
+              <a:buSzPct val="100000"/>
+              <a:buChar char="•"/>
+            </a:pPr>
+            <a:r>
+              <a:rPr lang="en-US" sz="1500" dirty="0">
+                <a:solidFill>
+                  <a:srgbClr val="3D3A36"/>
+                </a:solidFill>
+                <a:latin typeface="Calibri" pitchFamily="34" charset="0"/>
+                <a:ea typeface="Calibri" pitchFamily="34" charset="-122"/>
+                <a:cs typeface="Calibri" pitchFamily="34" charset="-120"/>
+              </a:rPr>
+              <a:t>Rectangle: A = l×w | Triangle: A = ½×b×h | Parallelogram: A = b×h</a:t>
+            </a:r>
+            <a:endParaRPr lang="en-US" sz="1500" dirty="0"/>
+          </a:p>
+        </p:txBody>
+      </p:sp>
+      <p:sp>
+        <p:nvSpPr>
+          <p:cNvPr id="5" name="Text 3"/>
           <p:cNvSpPr/>
           <p:nvPr/>
         </p:nvSpPr>
         <p:spPr>
           <a:xfrm>
-            <a:off x="731520" y="3200400"/>
-            <a:ext cx="7680960" cy="457200"/>
+            <a:off x="548640" y="4800600"/>
+            <a:ext cx="3657600" cy="274320"/>
           </a:xfrm>
           <a:prstGeom prst="rect">
             <a:avLst/>
@@ -2029,21 +1497,18 @@
           <a:bodyPr wrap="square" rtlCol="0" anchor="ctr"/>
           <a:lstStyle/>
           <a:p>
-            <a:pPr algn="ctr" indent="0" marL="0">
+            <a:pPr indent="0" marL="0">
               <a:buNone/>
             </a:pPr>
             <a:r>
-              <a:rPr lang="en-US" sz="1400" dirty="0">
+              <a:rPr lang="en-US" sz="800" dirty="0">
                 <a:solidFill>
                   <a:srgbClr val="9B9690"/>
                 </a:solidFill>
-                <a:latin typeface="Calibri" pitchFamily="34" charset="0"/>
-                <a:ea typeface="Calibri" pitchFamily="34" charset="-122"/>
-                <a:cs typeface="Calibri" pitchFamily="34" charset="-120"/>
               </a:rPr>
               <a:t>mrzocchi.com</a:t>
             </a:r>
-            <a:endParaRPr lang="en-US" sz="1400" dirty="0"/>
+            <a:endParaRPr lang="en-US" sz="800" dirty="0"/>
           </a:p>
         </p:txBody>
       </p:sp>
@@ -2055,9 +1520,16 @@
 </p:sld>
 </file>
 
-<file path=ppt/slides/slide2.xml><?xml version="1.0" encoding="utf-8"?>
+<file path=ppt/slides/slide3.xml><?xml version="1.0" encoding="utf-8"?>
 <p:sld xmlns:a="http://schemas.openxmlformats.org/drawingml/2006/main" xmlns:r="http://schemas.openxmlformats.org/officeDocument/2006/relationships" xmlns:p="http://schemas.openxmlformats.org/presentationml/2006/main">
-  <p:cSld name="Slide 2">
+  <p:cSld name="Slide 3">
+    <p:bg>
+      <p:bgPr>
+        <a:solidFill>
+          <a:srgbClr val="FFFFFF"/>
+        </a:solidFill>
+      </p:bgPr>
+    </p:bg>
     <p:spTree>
       <p:nvGrpSpPr>
         <p:cNvPr id="1" name=""/>
@@ -2081,13 +1553,13 @@
         <p:spPr>
           <a:xfrm>
             <a:off x="0" y="0"/>
-            <a:ext cx="9144000" cy="5143500"/>
+            <a:ext cx="9144000" cy="54864"/>
           </a:xfrm>
           <a:prstGeom prst="rect">
             <a:avLst/>
           </a:prstGeom>
           <a:solidFill>
-            <a:srgbClr val="111D35"/>
+            <a:srgbClr val="2A9D8F"/>
           </a:solidFill>
           <a:ln/>
         </p:spPr>
@@ -2100,8 +1572,8 @@
         </p:nvSpPr>
         <p:spPr>
           <a:xfrm>
-            <a:off x="731520" y="914400"/>
-            <a:ext cx="2743200" cy="1371600"/>
+            <a:off x="548640" y="274320"/>
+            <a:ext cx="8046720" cy="640080"/>
           </a:xfrm>
           <a:prstGeom prst="rect">
             <a:avLst/>
@@ -2110,26 +1582,24 @@
           <a:ln/>
         </p:spPr>
         <p:txBody>
-          <a:bodyPr wrap="square" rtlCol="0" anchor="ctr"/>
+          <a:bodyPr wrap="square" lIns="0" tIns="0" rIns="0" bIns="0" rtlCol="0" anchor="ctr"/>
           <a:lstStyle/>
           <a:p>
             <a:pPr indent="0" marL="0">
               <a:buNone/>
             </a:pPr>
             <a:r>
-              <a:rPr lang="en-US" sz="7200" b="1" dirty="0">
+              <a:rPr lang="en-US" sz="2600" b="1" dirty="0">
                 <a:solidFill>
-                  <a:srgbClr val="2A9D8F">
-                    <a:alpha val="70000"/>
-                  </a:srgbClr>
+                  <a:srgbClr val="1B2A4A"/>
                 </a:solidFill>
                 <a:latin typeface="Georgia" pitchFamily="34" charset="0"/>
                 <a:ea typeface="Georgia" pitchFamily="34" charset="-122"/>
                 <a:cs typeface="Georgia" pitchFamily="34" charset="-120"/>
               </a:rPr>
-              <a:t>01</a:t>
-            </a:r>
-            <a:endParaRPr lang="en-US" sz="7200" dirty="0"/>
+              <a:t>Surface Area, Volume &amp; Capacity</a:t>
+            </a:r>
+            <a:endParaRPr lang="en-US" sz="2600" dirty="0"/>
           </a:p>
         </p:txBody>
       </p:sp>
@@ -2141,8 +1611,8 @@
         </p:nvSpPr>
         <p:spPr>
           <a:xfrm>
-            <a:off x="731520" y="2286000"/>
-            <a:ext cx="7680960" cy="1097280"/>
+            <a:off x="548640" y="1097280"/>
+            <a:ext cx="8046720" cy="3474720"/>
           </a:xfrm>
           <a:prstGeom prst="rect">
             <a:avLst/>
@@ -2151,6 +1621,133 @@
           <a:ln/>
         </p:spPr>
         <p:txBody>
+          <a:bodyPr wrap="square" rtlCol="0" anchor="t"/>
+          <a:lstStyle/>
+          <a:p>
+            <a:pPr marL="342900" indent="-342900">
+              <a:spcAft>
+                <a:spcPts val="800"/>
+              </a:spcAft>
+              <a:buSzPct val="100000"/>
+              <a:buChar char="•"/>
+            </a:pPr>
+            <a:r>
+              <a:rPr lang="en-US" sz="1500" dirty="0">
+                <a:solidFill>
+                  <a:srgbClr val="3D3A36"/>
+                </a:solidFill>
+                <a:latin typeface="Calibri" pitchFamily="34" charset="0"/>
+                <a:ea typeface="Calibri" pitchFamily="34" charset="-122"/>
+                <a:cs typeface="Calibri" pitchFamily="34" charset="-120"/>
+              </a:rPr>
+              <a:t>Surface area = total area of all faces</a:t>
+            </a:r>
+            <a:endParaRPr lang="en-US" sz="1500" dirty="0"/>
+          </a:p>
+          <a:p>
+            <a:pPr marL="342900" indent="-342900">
+              <a:spcAft>
+                <a:spcPts val="800"/>
+              </a:spcAft>
+              <a:buSzPct val="100000"/>
+              <a:buChar char="•"/>
+            </a:pPr>
+            <a:r>
+              <a:rPr lang="en-US" sz="1500" dirty="0">
+                <a:solidFill>
+                  <a:srgbClr val="3D3A36"/>
+                </a:solidFill>
+                <a:latin typeface="Calibri" pitchFamily="34" charset="0"/>
+                <a:ea typeface="Calibri" pitchFamily="34" charset="-122"/>
+                <a:cs typeface="Calibri" pitchFamily="34" charset="-120"/>
+              </a:rPr>
+              <a:t>Cuboid SA = 2(lw+lh+wh) | Cube SA = 6s²</a:t>
+            </a:r>
+            <a:endParaRPr lang="en-US" sz="1500" dirty="0"/>
+          </a:p>
+          <a:p>
+            <a:pPr marL="342900" indent="-342900">
+              <a:spcAft>
+                <a:spcPts val="800"/>
+              </a:spcAft>
+              <a:buSzPct val="100000"/>
+              <a:buChar char="•"/>
+            </a:pPr>
+            <a:r>
+              <a:rPr lang="en-US" sz="1500" dirty="0">
+                <a:solidFill>
+                  <a:srgbClr val="3D3A36"/>
+                </a:solidFill>
+                <a:latin typeface="Calibri" pitchFamily="34" charset="0"/>
+                <a:ea typeface="Calibri" pitchFamily="34" charset="-122"/>
+                <a:cs typeface="Calibri" pitchFamily="34" charset="-120"/>
+              </a:rPr>
+              <a:t>Volume = 3D space inside a shape</a:t>
+            </a:r>
+            <a:endParaRPr lang="en-US" sz="1500" dirty="0"/>
+          </a:p>
+          <a:p>
+            <a:pPr marL="342900" indent="-342900">
+              <a:spcAft>
+                <a:spcPts val="800"/>
+              </a:spcAft>
+              <a:buSzPct val="100000"/>
+              <a:buChar char="•"/>
+            </a:pPr>
+            <a:r>
+              <a:rPr lang="en-US" sz="1500" dirty="0">
+                <a:solidFill>
+                  <a:srgbClr val="3D3A36"/>
+                </a:solidFill>
+                <a:latin typeface="Calibri" pitchFamily="34" charset="0"/>
+                <a:ea typeface="Calibri" pitchFamily="34" charset="-122"/>
+                <a:cs typeface="Calibri" pitchFamily="34" charset="-120"/>
+              </a:rPr>
+              <a:t>Cuboid V = l×w×h | Cube V = s³</a:t>
+            </a:r>
+            <a:endParaRPr lang="en-US" sz="1500" dirty="0"/>
+          </a:p>
+          <a:p>
+            <a:pPr marL="342900" indent="-342900">
+              <a:spcAft>
+                <a:spcPts val="800"/>
+              </a:spcAft>
+              <a:buSzPct val="100000"/>
+              <a:buChar char="•"/>
+            </a:pPr>
+            <a:r>
+              <a:rPr lang="en-US" sz="1500" dirty="0">
+                <a:solidFill>
+                  <a:srgbClr val="3D3A36"/>
+                </a:solidFill>
+                <a:latin typeface="Calibri" pitchFamily="34" charset="0"/>
+                <a:ea typeface="Calibri" pitchFamily="34" charset="-122"/>
+                <a:cs typeface="Calibri" pitchFamily="34" charset="-120"/>
+              </a:rPr>
+              <a:t>Capacity: 1 cm³ = 1 mL, 1 L = 1,000 mL</a:t>
+            </a:r>
+            <a:endParaRPr lang="en-US" sz="1500" dirty="0"/>
+          </a:p>
+        </p:txBody>
+      </p:sp>
+      <p:sp>
+        <p:nvSpPr>
+          <p:cNvPr id="5" name="Text 3"/>
+          <p:cNvSpPr/>
+          <p:nvPr/>
+        </p:nvSpPr>
+        <p:spPr>
+          <a:xfrm>
+            <a:off x="548640" y="4800600"/>
+            <a:ext cx="3657600" cy="274320"/>
+          </a:xfrm>
+          <a:prstGeom prst="rect">
+            <a:avLst/>
+          </a:prstGeom>
+          <a:noFill/>
+          <a:ln/>
+        </p:spPr>
+        <p:txBody>
           <a:bodyPr wrap="square" rtlCol="0" anchor="ctr"/>
           <a:lstStyle/>
           <a:p>
@@ -2158,17 +1755,14 @@
               <a:buNone/>
             </a:pPr>
             <a:r>
-              <a:rPr lang="en-US" sz="3600" b="1" dirty="0">
+              <a:rPr lang="en-US" sz="800" dirty="0">
                 <a:solidFill>
-                  <a:srgbClr val="FFFFFF"/>
+                  <a:srgbClr val="9B9690"/>
                 </a:solidFill>
-                <a:latin typeface="Georgia" pitchFamily="34" charset="0"/>
-                <a:ea typeface="Georgia" pitchFamily="34" charset="-122"/>
-                <a:cs typeface="Georgia" pitchFamily="34" charset="-120"/>
               </a:rPr>
-              <a:t>Perimeter</a:t>
-            </a:r>
-            <a:endParaRPr lang="en-US" sz="3600" dirty="0"/>
+              <a:t>mrzocchi.com</a:t>
+            </a:r>
+            <a:endParaRPr lang="en-US" sz="800" dirty="0"/>
           </a:p>
         </p:txBody>
       </p:sp>
@@ -2180,9 +1774,16 @@
 </p:sld>
 </file>
 
-<file path=ppt/slides/slide3.xml><?xml version="1.0" encoding="utf-8"?>
+<file path=ppt/slides/slide4.xml><?xml version="1.0" encoding="utf-8"?>
 <p:sld xmlns:a="http://schemas.openxmlformats.org/drawingml/2006/main" xmlns:r="http://schemas.openxmlformats.org/officeDocument/2006/relationships" xmlns:p="http://schemas.openxmlformats.org/presentationml/2006/main">
-  <p:cSld name="Slide 3">
+  <p:cSld name="Slide 4">
+    <p:bg>
+      <p:bgPr>
+        <a:solidFill>
+          <a:srgbClr val="1B2A4A"/>
+        </a:solidFill>
+      </p:bgPr>
+    </p:bg>
     <p:spTree>
       <p:nvGrpSpPr>
         <p:cNvPr id="1" name=""/>
@@ -2206,26 +1807,6 @@
         <p:spPr>
           <a:xfrm>
             <a:off x="0" y="0"/>
-            <a:ext cx="9144000" cy="5143500"/>
-          </a:xfrm>
-          <a:prstGeom prst="rect">
-            <a:avLst/>
-          </a:prstGeom>
-          <a:solidFill>
-            <a:srgbClr val="FAF8F5"/>
-          </a:solidFill>
-          <a:ln/>
-        </p:spPr>
-      </p:sp>
-      <p:sp>
-        <p:nvSpPr>
-          <p:cNvPr id="3" name="Shape 1"/>
-          <p:cNvSpPr/>
-          <p:nvPr/>
-        </p:nvSpPr>
-        <p:spPr>
-          <a:xfrm>
-            <a:off x="0" y="0"/>
             <a:ext cx="9144000" cy="54864"/>
           </a:xfrm>
           <a:prstGeom prst="rect">
@@ -2239,14 +1820,14 @@
       </p:sp>
       <p:sp>
         <p:nvSpPr>
-          <p:cNvPr id="4" name="Text 2"/>
+          <p:cNvPr id="3" name="Text 1"/>
           <p:cNvSpPr/>
           <p:nvPr/>
         </p:nvSpPr>
         <p:spPr>
           <a:xfrm>
-            <a:off x="640080" y="320040"/>
-            <a:ext cx="7863840" cy="640080"/>
+            <a:off x="548640" y="457200"/>
+            <a:ext cx="8046720" cy="640080"/>
           </a:xfrm>
           <a:prstGeom prst="rect">
             <a:avLst/>
@@ -2255,37 +1836,37 @@
           <a:ln/>
         </p:spPr>
         <p:txBody>
-          <a:bodyPr wrap="square" lIns="0" tIns="0" rIns="0" bIns="0" rtlCol="0" anchor="ctr"/>
+          <a:bodyPr wrap="square" rtlCol="0" anchor="ctr"/>
           <a:lstStyle/>
           <a:p>
             <a:pPr indent="0" marL="0">
               <a:buNone/>
             </a:pPr>
             <a:r>
-              <a:rPr lang="en-US" sz="2600" b="1" dirty="0">
+              <a:rPr lang="en-US" sz="2800" b="1" dirty="0">
                 <a:solidFill>
-                  <a:srgbClr val="1B2A4A"/>
+                  <a:srgbClr val="FFFFFF"/>
                 </a:solidFill>
                 <a:latin typeface="Georgia" pitchFamily="34" charset="0"/>
                 <a:ea typeface="Georgia" pitchFamily="34" charset="-122"/>
                 <a:cs typeface="Georgia" pitchFamily="34" charset="-120"/>
               </a:rPr>
-              <a:t>Perimeter Quick Reference</a:t>
-            </a:r>
-            <a:endParaRPr lang="en-US" sz="2600" dirty="0"/>
-          </a:p>
-        </p:txBody>
-      </p:sp>
-      <p:sp>
-        <p:nvSpPr>
-          <p:cNvPr id="5" name="Text 3"/>
+              <a:t>Key Takeaways</a:t>
+            </a:r>
+            <a:endParaRPr lang="en-US" sz="2800" dirty="0"/>
+          </a:p>
+        </p:txBody>
+      </p:sp>
+      <p:sp>
+        <p:nvSpPr>
+          <p:cNvPr id="4" name="Text 2"/>
           <p:cNvSpPr/>
           <p:nvPr/>
         </p:nvSpPr>
         <p:spPr>
           <a:xfrm>
-            <a:off x="640080" y="1188720"/>
-            <a:ext cx="7863840" cy="3200400"/>
+            <a:off x="731520" y="1371600"/>
+            <a:ext cx="7680960" cy="3200400"/>
           </a:xfrm>
           <a:prstGeom prst="rect">
             <a:avLst/>
@@ -2298,145 +1879,100 @@
           <a:lstStyle/>
           <a:p>
             <a:pPr marL="342900" indent="-342900">
-              <a:lnSpc>
-                <a:spcPct val="140000"/>
-              </a:lnSpc>
+              <a:spcAft>
+                <a:spcPts val="1000"/>
+              </a:spcAft>
               <a:buSzPct val="100000"/>
               <a:buChar char="•"/>
             </a:pPr>
             <a:r>
-              <a:rPr lang="en-US" sz="1500" dirty="0">
+              <a:rPr lang="en-US" sz="1600" dirty="0">
                 <a:solidFill>
-                  <a:srgbClr val="3D3A36"/>
+                  <a:srgbClr val="CADCFC"/>
                 </a:solidFill>
                 <a:latin typeface="Calibri" pitchFamily="34" charset="0"/>
                 <a:ea typeface="Calibri" pitchFamily="34" charset="-122"/>
                 <a:cs typeface="Calibri" pitchFamily="34" charset="-120"/>
               </a:rPr>
-              <a:t>Rectangle: P = 2(l + w)</a:t>
-            </a:r>
-            <a:endParaRPr lang="en-US" sz="1500" dirty="0"/>
+              <a:t>Perimeter (cm), Area (cm²), Volume (cm³), Capacity (mL/L)</a:t>
+            </a:r>
+            <a:endParaRPr lang="en-US" sz="1600" dirty="0"/>
           </a:p>
           <a:p>
             <a:pPr marL="342900" indent="-342900">
-              <a:lnSpc>
-                <a:spcPct val="140000"/>
-              </a:lnSpc>
+              <a:spcAft>
+                <a:spcPts val="1000"/>
+              </a:spcAft>
               <a:buSzPct val="100000"/>
               <a:buChar char="•"/>
             </a:pPr>
             <a:r>
-              <a:rPr lang="en-US" sz="1500" dirty="0">
+              <a:rPr lang="en-US" sz="1600" dirty="0">
                 <a:solidFill>
-                  <a:srgbClr val="3D3A36"/>
+                  <a:srgbClr val="CADCFC"/>
                 </a:solidFill>
                 <a:latin typeface="Calibri" pitchFamily="34" charset="0"/>
                 <a:ea typeface="Calibri" pitchFamily="34" charset="-122"/>
                 <a:cs typeface="Calibri" pitchFamily="34" charset="-120"/>
               </a:rPr>
-              <a:t>Square: P = 4s</a:t>
-            </a:r>
-            <a:endParaRPr lang="en-US" sz="1500" dirty="0"/>
+              <a:t>Know the formulas for rectangle, triangle, cuboid, cube</a:t>
+            </a:r>
+            <a:endParaRPr lang="en-US" sz="1600" dirty="0"/>
           </a:p>
           <a:p>
             <a:pPr marL="342900" indent="-342900">
-              <a:lnSpc>
-                <a:spcPct val="140000"/>
-              </a:lnSpc>
+              <a:spcAft>
+                <a:spcPts val="1000"/>
+              </a:spcAft>
               <a:buSzPct val="100000"/>
               <a:buChar char="•"/>
             </a:pPr>
             <a:r>
-              <a:rPr lang="en-US" sz="1500" dirty="0">
+              <a:rPr lang="en-US" sz="1600" dirty="0">
                 <a:solidFill>
-                  <a:srgbClr val="3D3A36"/>
+                  <a:srgbClr val="CADCFC"/>
                 </a:solidFill>
                 <a:latin typeface="Calibri" pitchFamily="34" charset="0"/>
                 <a:ea typeface="Calibri" pitchFamily="34" charset="-122"/>
                 <a:cs typeface="Calibri" pitchFamily="34" charset="-120"/>
               </a:rPr>
-              <a:t>Circle: C = 2πr or C = πd</a:t>
-            </a:r>
-            <a:endParaRPr lang="en-US" sz="1500" dirty="0"/>
+              <a:t>Compound shapes: split, calculate parts, add together</a:t>
+            </a:r>
+            <a:endParaRPr lang="en-US" sz="1600" dirty="0"/>
           </a:p>
           <a:p>
             <a:pPr marL="342900" indent="-342900">
-              <a:lnSpc>
-                <a:spcPct val="140000"/>
-              </a:lnSpc>
+              <a:spcAft>
+                <a:spcPts val="1000"/>
+              </a:spcAft>
               <a:buSzPct val="100000"/>
               <a:buChar char="•"/>
             </a:pPr>
             <a:r>
-              <a:rPr lang="en-US" sz="1500" dirty="0">
+              <a:rPr lang="en-US" sz="1600" dirty="0">
                 <a:solidFill>
-                  <a:srgbClr val="3D3A36"/>
+                  <a:srgbClr val="CADCFC"/>
                 </a:solidFill>
                 <a:latin typeface="Calibri" pitchFamily="34" charset="0"/>
                 <a:ea typeface="Calibri" pitchFamily="34" charset="-122"/>
                 <a:cs typeface="Calibri" pitchFamily="34" charset="-120"/>
               </a:rPr>
-              <a:t>Units: cm, m, km (length)</a:t>
-            </a:r>
-            <a:endParaRPr lang="en-US" sz="1500" dirty="0"/>
-          </a:p>
-        </p:txBody>
-      </p:sp>
-    </p:spTree>
-  </p:cSld>
-  <p:clrMapOvr>
-    <a:masterClrMapping/>
-  </p:clrMapOvr>
-</p:sld>
-</file>
-
-<file path=ppt/slides/slide4.xml><?xml version="1.0" encoding="utf-8"?>
-<p:sld xmlns:a="http://schemas.openxmlformats.org/drawingml/2006/main" xmlns:r="http://schemas.openxmlformats.org/officeDocument/2006/relationships" xmlns:p="http://schemas.openxmlformats.org/presentationml/2006/main">
-  <p:cSld name="Slide 4">
-    <p:spTree>
-      <p:nvGrpSpPr>
-        <p:cNvPr id="1" name=""/>
-        <p:cNvGrpSpPr/>
-        <p:nvPr/>
-      </p:nvGrpSpPr>
-      <p:grpSpPr>
-        <a:xfrm>
-          <a:off x="0" y="0"/>
-          <a:ext cx="0" cy="0"/>
-          <a:chOff x="0" y="0"/>
-          <a:chExt cx="0" cy="0"/>
-        </a:xfrm>
-      </p:grpSpPr>
-      <p:sp>
-        <p:nvSpPr>
-          <p:cNvPr id="2" name="Shape 0"/>
+              <a:t>1 cm³ = 1 mL is the key volume↔capacity conversion</a:t>
+            </a:r>
+            <a:endParaRPr lang="en-US" sz="1600" dirty="0"/>
+          </a:p>
+        </p:txBody>
+      </p:sp>
+      <p:sp>
+        <p:nvSpPr>
+          <p:cNvPr id="5" name="Text 3"/>
           <p:cNvSpPr/>
           <p:nvPr/>
         </p:nvSpPr>
         <p:spPr>
           <a:xfrm>
-            <a:off x="0" y="0"/>
-            <a:ext cx="9144000" cy="5143500"/>
-          </a:xfrm>
-          <a:prstGeom prst="rect">
-            <a:avLst/>
-          </a:prstGeom>
-          <a:solidFill>
-            <a:srgbClr val="111D35"/>
-          </a:solidFill>
-          <a:ln/>
-        </p:spPr>
-      </p:sp>
-      <p:sp>
-        <p:nvSpPr>
-          <p:cNvPr id="3" name="Text 1"/>
-          <p:cNvSpPr/>
-          <p:nvPr/>
-        </p:nvSpPr>
-        <p:spPr>
-          <a:xfrm>
-            <a:off x="731520" y="914400"/>
-            <a:ext cx="2743200" cy="1371600"/>
+            <a:off x="548640" y="4572000"/>
+            <a:ext cx="3657600" cy="274320"/>
           </a:xfrm>
           <a:prstGeom prst="rect">
             <a:avLst/>
@@ -2452,980 +1988,14 @@
               <a:buNone/>
             </a:pPr>
             <a:r>
-              <a:rPr lang="en-US" sz="7200" b="1" dirty="0">
+              <a:rPr lang="en-US" sz="1000" dirty="0">
                 <a:solidFill>
-                  <a:srgbClr val="2A9D8F">
-                    <a:alpha val="70000"/>
-                  </a:srgbClr>
+                  <a:srgbClr val="6B6660"/>
                 </a:solidFill>
-                <a:latin typeface="Georgia" pitchFamily="34" charset="0"/>
-                <a:ea typeface="Georgia" pitchFamily="34" charset="-122"/>
-                <a:cs typeface="Georgia" pitchFamily="34" charset="-120"/>
               </a:rPr>
-              <a:t>02</a:t>
-            </a:r>
-            <a:endParaRPr lang="en-US" sz="7200" dirty="0"/>
-          </a:p>
-        </p:txBody>
-      </p:sp>
-      <p:sp>
-        <p:nvSpPr>
-          <p:cNvPr id="4" name="Text 2"/>
-          <p:cNvSpPr/>
-          <p:nvPr/>
-        </p:nvSpPr>
-        <p:spPr>
-          <a:xfrm>
-            <a:off x="731520" y="2286000"/>
-            <a:ext cx="7680960" cy="1097280"/>
-          </a:xfrm>
-          <a:prstGeom prst="rect">
-            <a:avLst/>
-          </a:prstGeom>
-          <a:noFill/>
-          <a:ln/>
-        </p:spPr>
-        <p:txBody>
-          <a:bodyPr wrap="square" rtlCol="0" anchor="ctr"/>
-          <a:lstStyle/>
-          <a:p>
-            <a:pPr indent="0" marL="0">
-              <a:buNone/>
-            </a:pPr>
-            <a:r>
-              <a:rPr lang="en-US" sz="3600" b="1" dirty="0">
-                <a:solidFill>
-                  <a:srgbClr val="FFFFFF"/>
-                </a:solidFill>
-                <a:latin typeface="Georgia" pitchFamily="34" charset="0"/>
-                <a:ea typeface="Georgia" pitchFamily="34" charset="-122"/>
-                <a:cs typeface="Georgia" pitchFamily="34" charset="-120"/>
-              </a:rPr>
-              <a:t>Area</a:t>
-            </a:r>
-            <a:endParaRPr lang="en-US" sz="3600" dirty="0"/>
-          </a:p>
-        </p:txBody>
-      </p:sp>
-    </p:spTree>
-  </p:cSld>
-  <p:clrMapOvr>
-    <a:masterClrMapping/>
-  </p:clrMapOvr>
-</p:sld>
-</file>
-
-<file path=ppt/slides/slide5.xml><?xml version="1.0" encoding="utf-8"?>
-<p:sld xmlns:a="http://schemas.openxmlformats.org/drawingml/2006/main" xmlns:r="http://schemas.openxmlformats.org/officeDocument/2006/relationships" xmlns:p="http://schemas.openxmlformats.org/presentationml/2006/main">
-  <p:cSld name="Slide 5">
-    <p:spTree>
-      <p:nvGrpSpPr>
-        <p:cNvPr id="1" name=""/>
-        <p:cNvGrpSpPr/>
-        <p:nvPr/>
-      </p:nvGrpSpPr>
-      <p:grpSpPr>
-        <a:xfrm>
-          <a:off x="0" y="0"/>
-          <a:ext cx="0" cy="0"/>
-          <a:chOff x="0" y="0"/>
-          <a:chExt cx="0" cy="0"/>
-        </a:xfrm>
-      </p:grpSpPr>
-      <p:sp>
-        <p:nvSpPr>
-          <p:cNvPr id="2" name="Shape 0"/>
-          <p:cNvSpPr/>
-          <p:nvPr/>
-        </p:nvSpPr>
-        <p:spPr>
-          <a:xfrm>
-            <a:off x="0" y="0"/>
-            <a:ext cx="9144000" cy="5143500"/>
-          </a:xfrm>
-          <a:prstGeom prst="rect">
-            <a:avLst/>
-          </a:prstGeom>
-          <a:solidFill>
-            <a:srgbClr val="FAF8F5"/>
-          </a:solidFill>
-          <a:ln/>
-        </p:spPr>
-      </p:sp>
-      <p:sp>
-        <p:nvSpPr>
-          <p:cNvPr id="3" name="Shape 1"/>
-          <p:cNvSpPr/>
-          <p:nvPr/>
-        </p:nvSpPr>
-        <p:spPr>
-          <a:xfrm>
-            <a:off x="0" y="0"/>
-            <a:ext cx="9144000" cy="54864"/>
-          </a:xfrm>
-          <a:prstGeom prst="rect">
-            <a:avLst/>
-          </a:prstGeom>
-          <a:solidFill>
-            <a:srgbClr val="2A9D8F"/>
-          </a:solidFill>
-          <a:ln/>
-        </p:spPr>
-      </p:sp>
-      <p:sp>
-        <p:nvSpPr>
-          <p:cNvPr id="4" name="Text 2"/>
-          <p:cNvSpPr/>
-          <p:nvPr/>
-        </p:nvSpPr>
-        <p:spPr>
-          <a:xfrm>
-            <a:off x="640080" y="320040"/>
-            <a:ext cx="7863840" cy="640080"/>
-          </a:xfrm>
-          <a:prstGeom prst="rect">
-            <a:avLst/>
-          </a:prstGeom>
-          <a:noFill/>
-          <a:ln/>
-        </p:spPr>
-        <p:txBody>
-          <a:bodyPr wrap="square" lIns="0" tIns="0" rIns="0" bIns="0" rtlCol="0" anchor="ctr"/>
-          <a:lstStyle/>
-          <a:p>
-            <a:pPr indent="0" marL="0">
-              <a:buNone/>
-            </a:pPr>
-            <a:r>
-              <a:rPr lang="en-US" sz="2600" b="1" dirty="0">
-                <a:solidFill>
-                  <a:srgbClr val="1B2A4A"/>
-                </a:solidFill>
-                <a:latin typeface="Georgia" pitchFamily="34" charset="0"/>
-                <a:ea typeface="Georgia" pitchFamily="34" charset="-122"/>
-                <a:cs typeface="Georgia" pitchFamily="34" charset="-120"/>
-              </a:rPr>
-              <a:t>Area Quick Reference</a:t>
-            </a:r>
-            <a:endParaRPr lang="en-US" sz="2600" dirty="0"/>
-          </a:p>
-        </p:txBody>
-      </p:sp>
-      <p:sp>
-        <p:nvSpPr>
-          <p:cNvPr id="5" name="Text 3"/>
-          <p:cNvSpPr/>
-          <p:nvPr/>
-        </p:nvSpPr>
-        <p:spPr>
-          <a:xfrm>
-            <a:off x="640080" y="1188720"/>
-            <a:ext cx="7863840" cy="3200400"/>
-          </a:xfrm>
-          <a:prstGeom prst="rect">
-            <a:avLst/>
-          </a:prstGeom>
-          <a:noFill/>
-          <a:ln/>
-        </p:spPr>
-        <p:txBody>
-          <a:bodyPr wrap="square" rtlCol="0" anchor="t"/>
-          <a:lstStyle/>
-          <a:p>
-            <a:pPr marL="342900" indent="-342900">
-              <a:lnSpc>
-                <a:spcPct val="140000"/>
-              </a:lnSpc>
-              <a:buSzPct val="100000"/>
-              <a:buChar char="•"/>
-            </a:pPr>
-            <a:r>
-              <a:rPr lang="en-US" sz="1500" dirty="0">
-                <a:solidFill>
-                  <a:srgbClr val="3D3A36"/>
-                </a:solidFill>
-                <a:latin typeface="Calibri" pitchFamily="34" charset="0"/>
-                <a:ea typeface="Calibri" pitchFamily="34" charset="-122"/>
-                <a:cs typeface="Calibri" pitchFamily="34" charset="-120"/>
-              </a:rPr>
-              <a:t>Rectangle: A = l × w</a:t>
-            </a:r>
-            <a:endParaRPr lang="en-US" sz="1500" dirty="0"/>
-          </a:p>
-          <a:p>
-            <a:pPr marL="342900" indent="-342900">
-              <a:lnSpc>
-                <a:spcPct val="140000"/>
-              </a:lnSpc>
-              <a:buSzPct val="100000"/>
-              <a:buChar char="•"/>
-            </a:pPr>
-            <a:r>
-              <a:rPr lang="en-US" sz="1500" dirty="0">
-                <a:solidFill>
-                  <a:srgbClr val="3D3A36"/>
-                </a:solidFill>
-                <a:latin typeface="Calibri" pitchFamily="34" charset="0"/>
-                <a:ea typeface="Calibri" pitchFamily="34" charset="-122"/>
-                <a:cs typeface="Calibri" pitchFamily="34" charset="-120"/>
-              </a:rPr>
-              <a:t>Triangle: A = ½ × b × h (perpendicular height!)</a:t>
-            </a:r>
-            <a:endParaRPr lang="en-US" sz="1500" dirty="0"/>
-          </a:p>
-          <a:p>
-            <a:pPr marL="342900" indent="-342900">
-              <a:lnSpc>
-                <a:spcPct val="140000"/>
-              </a:lnSpc>
-              <a:buSzPct val="100000"/>
-              <a:buChar char="•"/>
-            </a:pPr>
-            <a:r>
-              <a:rPr lang="en-US" sz="1500" dirty="0">
-                <a:solidFill>
-                  <a:srgbClr val="3D3A36"/>
-                </a:solidFill>
-                <a:latin typeface="Calibri" pitchFamily="34" charset="0"/>
-                <a:ea typeface="Calibri" pitchFamily="34" charset="-122"/>
-                <a:cs typeface="Calibri" pitchFamily="34" charset="-120"/>
-              </a:rPr>
-              <a:t>Parallelogram: A = b × h</a:t>
-            </a:r>
-            <a:endParaRPr lang="en-US" sz="1500" dirty="0"/>
-          </a:p>
-          <a:p>
-            <a:pPr marL="342900" indent="-342900">
-              <a:lnSpc>
-                <a:spcPct val="140000"/>
-              </a:lnSpc>
-              <a:buSzPct val="100000"/>
-              <a:buChar char="•"/>
-            </a:pPr>
-            <a:r>
-              <a:rPr lang="en-US" sz="1500" dirty="0">
-                <a:solidFill>
-                  <a:srgbClr val="3D3A36"/>
-                </a:solidFill>
-                <a:latin typeface="Calibri" pitchFamily="34" charset="0"/>
-                <a:ea typeface="Calibri" pitchFamily="34" charset="-122"/>
-                <a:cs typeface="Calibri" pitchFamily="34" charset="-120"/>
-              </a:rPr>
-              <a:t>Circle: A = πr²</a:t>
-            </a:r>
-            <a:endParaRPr lang="en-US" sz="1500" dirty="0"/>
-          </a:p>
-          <a:p>
-            <a:pPr marL="342900" indent="-342900">
-              <a:lnSpc>
-                <a:spcPct val="140000"/>
-              </a:lnSpc>
-              <a:buSzPct val="100000"/>
-              <a:buChar char="•"/>
-            </a:pPr>
-            <a:r>
-              <a:rPr lang="en-US" sz="1500" dirty="0">
-                <a:solidFill>
-                  <a:srgbClr val="3D3A36"/>
-                </a:solidFill>
-                <a:latin typeface="Calibri" pitchFamily="34" charset="0"/>
-                <a:ea typeface="Calibri" pitchFamily="34" charset="-122"/>
-                <a:cs typeface="Calibri" pitchFamily="34" charset="-120"/>
-              </a:rPr>
-              <a:t>Units: cm², m² (squared)</a:t>
-            </a:r>
-            <a:endParaRPr lang="en-US" sz="1500" dirty="0"/>
-          </a:p>
-        </p:txBody>
-      </p:sp>
-    </p:spTree>
-  </p:cSld>
-  <p:clrMapOvr>
-    <a:masterClrMapping/>
-  </p:clrMapOvr>
-</p:sld>
-</file>
-
-<file path=ppt/slides/slide6.xml><?xml version="1.0" encoding="utf-8"?>
-<p:sld xmlns:a="http://schemas.openxmlformats.org/drawingml/2006/main" xmlns:r="http://schemas.openxmlformats.org/officeDocument/2006/relationships" xmlns:p="http://schemas.openxmlformats.org/presentationml/2006/main">
-  <p:cSld name="Slide 6">
-    <p:spTree>
-      <p:nvGrpSpPr>
-        <p:cNvPr id="1" name=""/>
-        <p:cNvGrpSpPr/>
-        <p:nvPr/>
-      </p:nvGrpSpPr>
-      <p:grpSpPr>
-        <a:xfrm>
-          <a:off x="0" y="0"/>
-          <a:ext cx="0" cy="0"/>
-          <a:chOff x="0" y="0"/>
-          <a:chExt cx="0" cy="0"/>
-        </a:xfrm>
-      </p:grpSpPr>
-      <p:sp>
-        <p:nvSpPr>
-          <p:cNvPr id="2" name="Shape 0"/>
-          <p:cNvSpPr/>
-          <p:nvPr/>
-        </p:nvSpPr>
-        <p:spPr>
-          <a:xfrm>
-            <a:off x="0" y="0"/>
-            <a:ext cx="9144000" cy="5143500"/>
-          </a:xfrm>
-          <a:prstGeom prst="rect">
-            <a:avLst/>
-          </a:prstGeom>
-          <a:solidFill>
-            <a:srgbClr val="111D35"/>
-          </a:solidFill>
-          <a:ln/>
-        </p:spPr>
-      </p:sp>
-      <p:sp>
-        <p:nvSpPr>
-          <p:cNvPr id="3" name="Text 1"/>
-          <p:cNvSpPr/>
-          <p:nvPr/>
-        </p:nvSpPr>
-        <p:spPr>
-          <a:xfrm>
-            <a:off x="731520" y="914400"/>
-            <a:ext cx="2743200" cy="1371600"/>
-          </a:xfrm>
-          <a:prstGeom prst="rect">
-            <a:avLst/>
-          </a:prstGeom>
-          <a:noFill/>
-          <a:ln/>
-        </p:spPr>
-        <p:txBody>
-          <a:bodyPr wrap="square" rtlCol="0" anchor="ctr"/>
-          <a:lstStyle/>
-          <a:p>
-            <a:pPr indent="0" marL="0">
-              <a:buNone/>
-            </a:pPr>
-            <a:r>
-              <a:rPr lang="en-US" sz="7200" b="1" dirty="0">
-                <a:solidFill>
-                  <a:srgbClr val="2A9D8F">
-                    <a:alpha val="70000"/>
-                  </a:srgbClr>
-                </a:solidFill>
-                <a:latin typeface="Georgia" pitchFamily="34" charset="0"/>
-                <a:ea typeface="Georgia" pitchFamily="34" charset="-122"/>
-                <a:cs typeface="Georgia" pitchFamily="34" charset="-120"/>
-              </a:rPr>
-              <a:t>03</a:t>
-            </a:r>
-            <a:endParaRPr lang="en-US" sz="7200" dirty="0"/>
-          </a:p>
-        </p:txBody>
-      </p:sp>
-      <p:sp>
-        <p:nvSpPr>
-          <p:cNvPr id="4" name="Text 2"/>
-          <p:cNvSpPr/>
-          <p:nvPr/>
-        </p:nvSpPr>
-        <p:spPr>
-          <a:xfrm>
-            <a:off x="731520" y="2286000"/>
-            <a:ext cx="7680960" cy="1097280"/>
-          </a:xfrm>
-          <a:prstGeom prst="rect">
-            <a:avLst/>
-          </a:prstGeom>
-          <a:noFill/>
-          <a:ln/>
-        </p:spPr>
-        <p:txBody>
-          <a:bodyPr wrap="square" rtlCol="0" anchor="ctr"/>
-          <a:lstStyle/>
-          <a:p>
-            <a:pPr indent="0" marL="0">
-              <a:buNone/>
-            </a:pPr>
-            <a:r>
-              <a:rPr lang="en-US" sz="3600" b="1" dirty="0">
-                <a:solidFill>
-                  <a:srgbClr val="FFFFFF"/>
-                </a:solidFill>
-                <a:latin typeface="Georgia" pitchFamily="34" charset="0"/>
-                <a:ea typeface="Georgia" pitchFamily="34" charset="-122"/>
-                <a:cs typeface="Georgia" pitchFamily="34" charset="-120"/>
-              </a:rPr>
-              <a:t>Surface Area &amp; Volume</a:t>
-            </a:r>
-            <a:endParaRPr lang="en-US" sz="3600" dirty="0"/>
-          </a:p>
-        </p:txBody>
-      </p:sp>
-    </p:spTree>
-  </p:cSld>
-  <p:clrMapOvr>
-    <a:masterClrMapping/>
-  </p:clrMapOvr>
-</p:sld>
-</file>
-
-<file path=ppt/slides/slide7.xml><?xml version="1.0" encoding="utf-8"?>
-<p:sld xmlns:a="http://schemas.openxmlformats.org/drawingml/2006/main" xmlns:r="http://schemas.openxmlformats.org/officeDocument/2006/relationships" xmlns:p="http://schemas.openxmlformats.org/presentationml/2006/main">
-  <p:cSld name="Slide 7">
-    <p:spTree>
-      <p:nvGrpSpPr>
-        <p:cNvPr id="1" name=""/>
-        <p:cNvGrpSpPr/>
-        <p:nvPr/>
-      </p:nvGrpSpPr>
-      <p:grpSpPr>
-        <a:xfrm>
-          <a:off x="0" y="0"/>
-          <a:ext cx="0" cy="0"/>
-          <a:chOff x="0" y="0"/>
-          <a:chExt cx="0" cy="0"/>
-        </a:xfrm>
-      </p:grpSpPr>
-      <p:sp>
-        <p:nvSpPr>
-          <p:cNvPr id="2" name="Shape 0"/>
-          <p:cNvSpPr/>
-          <p:nvPr/>
-        </p:nvSpPr>
-        <p:spPr>
-          <a:xfrm>
-            <a:off x="0" y="0"/>
-            <a:ext cx="9144000" cy="5143500"/>
-          </a:xfrm>
-          <a:prstGeom prst="rect">
-            <a:avLst/>
-          </a:prstGeom>
-          <a:solidFill>
-            <a:srgbClr val="FAF8F5"/>
-          </a:solidFill>
-          <a:ln/>
-        </p:spPr>
-      </p:sp>
-      <p:sp>
-        <p:nvSpPr>
-          <p:cNvPr id="3" name="Shape 1"/>
-          <p:cNvSpPr/>
-          <p:nvPr/>
-        </p:nvSpPr>
-        <p:spPr>
-          <a:xfrm>
-            <a:off x="0" y="0"/>
-            <a:ext cx="9144000" cy="54864"/>
-          </a:xfrm>
-          <a:prstGeom prst="rect">
-            <a:avLst/>
-          </a:prstGeom>
-          <a:solidFill>
-            <a:srgbClr val="2A9D8F"/>
-          </a:solidFill>
-          <a:ln/>
-        </p:spPr>
-      </p:sp>
-      <p:sp>
-        <p:nvSpPr>
-          <p:cNvPr id="4" name="Text 2"/>
-          <p:cNvSpPr/>
-          <p:nvPr/>
-        </p:nvSpPr>
-        <p:spPr>
-          <a:xfrm>
-            <a:off x="640080" y="320040"/>
-            <a:ext cx="7863840" cy="640080"/>
-          </a:xfrm>
-          <a:prstGeom prst="rect">
-            <a:avLst/>
-          </a:prstGeom>
-          <a:noFill/>
-          <a:ln/>
-        </p:spPr>
-        <p:txBody>
-          <a:bodyPr wrap="square" lIns="0" tIns="0" rIns="0" bIns="0" rtlCol="0" anchor="ctr"/>
-          <a:lstStyle/>
-          <a:p>
-            <a:pPr indent="0" marL="0">
-              <a:buNone/>
-            </a:pPr>
-            <a:r>
-              <a:rPr lang="en-US" sz="2600" b="1" dirty="0">
-                <a:solidFill>
-                  <a:srgbClr val="1B2A4A"/>
-                </a:solidFill>
-                <a:latin typeface="Georgia" pitchFamily="34" charset="0"/>
-                <a:ea typeface="Georgia" pitchFamily="34" charset="-122"/>
-                <a:cs typeface="Georgia" pitchFamily="34" charset="-120"/>
-              </a:rPr>
-              <a:t>3D Shape Quick Reference</a:t>
-            </a:r>
-            <a:endParaRPr lang="en-US" sz="2600" dirty="0"/>
-          </a:p>
-        </p:txBody>
-      </p:sp>
-      <p:sp>
-        <p:nvSpPr>
-          <p:cNvPr id="5" name="Text 3"/>
-          <p:cNvSpPr/>
-          <p:nvPr/>
-        </p:nvSpPr>
-        <p:spPr>
-          <a:xfrm>
-            <a:off x="640080" y="1188720"/>
-            <a:ext cx="7863840" cy="3200400"/>
-          </a:xfrm>
-          <a:prstGeom prst="rect">
-            <a:avLst/>
-          </a:prstGeom>
-          <a:noFill/>
-          <a:ln/>
-        </p:spPr>
-        <p:txBody>
-          <a:bodyPr wrap="square" rtlCol="0" anchor="t"/>
-          <a:lstStyle/>
-          <a:p>
-            <a:pPr marL="342900" indent="-342900">
-              <a:lnSpc>
-                <a:spcPct val="140000"/>
-              </a:lnSpc>
-              <a:buSzPct val="100000"/>
-              <a:buChar char="•"/>
-            </a:pPr>
-            <a:r>
-              <a:rPr lang="en-US" sz="1500" dirty="0">
-                <a:solidFill>
-                  <a:srgbClr val="3D3A36"/>
-                </a:solidFill>
-                <a:latin typeface="Calibri" pitchFamily="34" charset="0"/>
-                <a:ea typeface="Calibri" pitchFamily="34" charset="-122"/>
-                <a:cs typeface="Calibri" pitchFamily="34" charset="-120"/>
-              </a:rPr>
-              <a:t>Rectangular prism SA: 2(lw + lh + wh)</a:t>
-            </a:r>
-            <a:endParaRPr lang="en-US" sz="1500" dirty="0"/>
-          </a:p>
-          <a:p>
-            <a:pPr marL="342900" indent="-342900">
-              <a:lnSpc>
-                <a:spcPct val="140000"/>
-              </a:lnSpc>
-              <a:buSzPct val="100000"/>
-              <a:buChar char="•"/>
-            </a:pPr>
-            <a:r>
-              <a:rPr lang="en-US" sz="1500" dirty="0">
-                <a:solidFill>
-                  <a:srgbClr val="3D3A36"/>
-                </a:solidFill>
-                <a:latin typeface="Calibri" pitchFamily="34" charset="0"/>
-                <a:ea typeface="Calibri" pitchFamily="34" charset="-122"/>
-                <a:cs typeface="Calibri" pitchFamily="34" charset="-120"/>
-              </a:rPr>
-              <a:t>Cube SA: 6s²</a:t>
-            </a:r>
-            <a:endParaRPr lang="en-US" sz="1500" dirty="0"/>
-          </a:p>
-          <a:p>
-            <a:pPr marL="342900" indent="-342900">
-              <a:lnSpc>
-                <a:spcPct val="140000"/>
-              </a:lnSpc>
-              <a:buSzPct val="100000"/>
-              <a:buChar char="•"/>
-            </a:pPr>
-            <a:r>
-              <a:rPr lang="en-US" sz="1500" dirty="0">
-                <a:solidFill>
-                  <a:srgbClr val="3D3A36"/>
-                </a:solidFill>
-                <a:latin typeface="Calibri" pitchFamily="34" charset="0"/>
-                <a:ea typeface="Calibri" pitchFamily="34" charset="-122"/>
-                <a:cs typeface="Calibri" pitchFamily="34" charset="-120"/>
-              </a:rPr>
-              <a:t>Rectangular prism V: l × w × h</a:t>
-            </a:r>
-            <a:endParaRPr lang="en-US" sz="1500" dirty="0"/>
-          </a:p>
-          <a:p>
-            <a:pPr marL="342900" indent="-342900">
-              <a:lnSpc>
-                <a:spcPct val="140000"/>
-              </a:lnSpc>
-              <a:buSzPct val="100000"/>
-              <a:buChar char="•"/>
-            </a:pPr>
-            <a:r>
-              <a:rPr lang="en-US" sz="1500" dirty="0">
-                <a:solidFill>
-                  <a:srgbClr val="3D3A36"/>
-                </a:solidFill>
-                <a:latin typeface="Calibri" pitchFamily="34" charset="0"/>
-                <a:ea typeface="Calibri" pitchFamily="34" charset="-122"/>
-                <a:cs typeface="Calibri" pitchFamily="34" charset="-120"/>
-              </a:rPr>
-              <a:t>Triangular prism V: (½ × b × h) × l</a:t>
-            </a:r>
-            <a:endParaRPr lang="en-US" sz="1500" dirty="0"/>
-          </a:p>
-          <a:p>
-            <a:pPr marL="342900" indent="-342900">
-              <a:lnSpc>
-                <a:spcPct val="140000"/>
-              </a:lnSpc>
-              <a:buSzPct val="100000"/>
-              <a:buChar char="•"/>
-            </a:pPr>
-            <a:r>
-              <a:rPr lang="en-US" sz="1500" dirty="0">
-                <a:solidFill>
-                  <a:srgbClr val="3D3A36"/>
-                </a:solidFill>
-                <a:latin typeface="Calibri" pitchFamily="34" charset="0"/>
-                <a:ea typeface="Calibri" pitchFamily="34" charset="-122"/>
-                <a:cs typeface="Calibri" pitchFamily="34" charset="-120"/>
-              </a:rPr>
-              <a:t>Units: SA = cm² (squared), V = cm³ (cubed)</a:t>
-            </a:r>
-            <a:endParaRPr lang="en-US" sz="1500" dirty="0"/>
-          </a:p>
-        </p:txBody>
-      </p:sp>
-    </p:spTree>
-  </p:cSld>
-  <p:clrMapOvr>
-    <a:masterClrMapping/>
-  </p:clrMapOvr>
-</p:sld>
-</file>
-
-<file path=ppt/slides/slide8.xml><?xml version="1.0" encoding="utf-8"?>
-<p:sld xmlns:a="http://schemas.openxmlformats.org/drawingml/2006/main" xmlns:r="http://schemas.openxmlformats.org/officeDocument/2006/relationships" xmlns:p="http://schemas.openxmlformats.org/presentationml/2006/main">
-  <p:cSld name="Slide 8">
-    <p:spTree>
-      <p:nvGrpSpPr>
-        <p:cNvPr id="1" name=""/>
-        <p:cNvGrpSpPr/>
-        <p:nvPr/>
-      </p:nvGrpSpPr>
-      <p:grpSpPr>
-        <a:xfrm>
-          <a:off x="0" y="0"/>
-          <a:ext cx="0" cy="0"/>
-          <a:chOff x="0" y="0"/>
-          <a:chExt cx="0" cy="0"/>
-        </a:xfrm>
-      </p:grpSpPr>
-      <p:sp>
-        <p:nvSpPr>
-          <p:cNvPr id="2" name="Shape 0"/>
-          <p:cNvSpPr/>
-          <p:nvPr/>
-        </p:nvSpPr>
-        <p:spPr>
-          <a:xfrm>
-            <a:off x="0" y="0"/>
-            <a:ext cx="9144000" cy="5143500"/>
-          </a:xfrm>
-          <a:prstGeom prst="rect">
-            <a:avLst/>
-          </a:prstGeom>
-          <a:solidFill>
-            <a:srgbClr val="111D35"/>
-          </a:solidFill>
-          <a:ln/>
-        </p:spPr>
-      </p:sp>
-      <p:sp>
-        <p:nvSpPr>
-          <p:cNvPr id="3" name="Text 1"/>
-          <p:cNvSpPr/>
-          <p:nvPr/>
-        </p:nvSpPr>
-        <p:spPr>
-          <a:xfrm>
-            <a:off x="731520" y="914400"/>
-            <a:ext cx="2743200" cy="1371600"/>
-          </a:xfrm>
-          <a:prstGeom prst="rect">
-            <a:avLst/>
-          </a:prstGeom>
-          <a:noFill/>
-          <a:ln/>
-        </p:spPr>
-        <p:txBody>
-          <a:bodyPr wrap="square" rtlCol="0" anchor="ctr"/>
-          <a:lstStyle/>
-          <a:p>
-            <a:pPr indent="0" marL="0">
-              <a:buNone/>
-            </a:pPr>
-            <a:r>
-              <a:rPr lang="en-US" sz="7200" b="1" dirty="0">
-                <a:solidFill>
-                  <a:srgbClr val="2A9D8F">
-                    <a:alpha val="70000"/>
-                  </a:srgbClr>
-                </a:solidFill>
-                <a:latin typeface="Georgia" pitchFamily="34" charset="0"/>
-                <a:ea typeface="Georgia" pitchFamily="34" charset="-122"/>
-                <a:cs typeface="Georgia" pitchFamily="34" charset="-120"/>
-              </a:rPr>
-              <a:t>04</a:t>
-            </a:r>
-            <a:endParaRPr lang="en-US" sz="7200" dirty="0"/>
-          </a:p>
-        </p:txBody>
-      </p:sp>
-      <p:sp>
-        <p:nvSpPr>
-          <p:cNvPr id="4" name="Text 2"/>
-          <p:cNvSpPr/>
-          <p:nvPr/>
-        </p:nvSpPr>
-        <p:spPr>
-          <a:xfrm>
-            <a:off x="731520" y="2286000"/>
-            <a:ext cx="7680960" cy="1097280"/>
-          </a:xfrm>
-          <a:prstGeom prst="rect">
-            <a:avLst/>
-          </a:prstGeom>
-          <a:noFill/>
-          <a:ln/>
-        </p:spPr>
-        <p:txBody>
-          <a:bodyPr wrap="square" rtlCol="0" anchor="ctr"/>
-          <a:lstStyle/>
-          <a:p>
-            <a:pPr indent="0" marL="0">
-              <a:buNone/>
-            </a:pPr>
-            <a:r>
-              <a:rPr lang="en-US" sz="3600" b="1" dirty="0">
-                <a:solidFill>
-                  <a:srgbClr val="FFFFFF"/>
-                </a:solidFill>
-                <a:latin typeface="Georgia" pitchFamily="34" charset="0"/>
-                <a:ea typeface="Georgia" pitchFamily="34" charset="-122"/>
-                <a:cs typeface="Georgia" pitchFamily="34" charset="-120"/>
-              </a:rPr>
-              <a:t>Capacity</a:t>
-            </a:r>
-            <a:endParaRPr lang="en-US" sz="3600" dirty="0"/>
-          </a:p>
-        </p:txBody>
-      </p:sp>
-    </p:spTree>
-  </p:cSld>
-  <p:clrMapOvr>
-    <a:masterClrMapping/>
-  </p:clrMapOvr>
-</p:sld>
-</file>
-
-<file path=ppt/slides/slide9.xml><?xml version="1.0" encoding="utf-8"?>
-<p:sld xmlns:a="http://schemas.openxmlformats.org/drawingml/2006/main" xmlns:r="http://schemas.openxmlformats.org/officeDocument/2006/relationships" xmlns:p="http://schemas.openxmlformats.org/presentationml/2006/main">
-  <p:cSld name="Slide 9">
-    <p:spTree>
-      <p:nvGrpSpPr>
-        <p:cNvPr id="1" name=""/>
-        <p:cNvGrpSpPr/>
-        <p:nvPr/>
-      </p:nvGrpSpPr>
-      <p:grpSpPr>
-        <a:xfrm>
-          <a:off x="0" y="0"/>
-          <a:ext cx="0" cy="0"/>
-          <a:chOff x="0" y="0"/>
-          <a:chExt cx="0" cy="0"/>
-        </a:xfrm>
-      </p:grpSpPr>
-      <p:sp>
-        <p:nvSpPr>
-          <p:cNvPr id="2" name="Shape 0"/>
-          <p:cNvSpPr/>
-          <p:nvPr/>
-        </p:nvSpPr>
-        <p:spPr>
-          <a:xfrm>
-            <a:off x="0" y="0"/>
-            <a:ext cx="9144000" cy="5143500"/>
-          </a:xfrm>
-          <a:prstGeom prst="rect">
-            <a:avLst/>
-          </a:prstGeom>
-          <a:solidFill>
-            <a:srgbClr val="FAF8F5"/>
-          </a:solidFill>
-          <a:ln/>
-        </p:spPr>
-      </p:sp>
-      <p:sp>
-        <p:nvSpPr>
-          <p:cNvPr id="3" name="Shape 1"/>
-          <p:cNvSpPr/>
-          <p:nvPr/>
-        </p:nvSpPr>
-        <p:spPr>
-          <a:xfrm>
-            <a:off x="0" y="0"/>
-            <a:ext cx="9144000" cy="54864"/>
-          </a:xfrm>
-          <a:prstGeom prst="rect">
-            <a:avLst/>
-          </a:prstGeom>
-          <a:solidFill>
-            <a:srgbClr val="2A9D8F"/>
-          </a:solidFill>
-          <a:ln/>
-        </p:spPr>
-      </p:sp>
-      <p:sp>
-        <p:nvSpPr>
-          <p:cNvPr id="4" name="Text 2"/>
-          <p:cNvSpPr/>
-          <p:nvPr/>
-        </p:nvSpPr>
-        <p:spPr>
-          <a:xfrm>
-            <a:off x="640080" y="320040"/>
-            <a:ext cx="7863840" cy="640080"/>
-          </a:xfrm>
-          <a:prstGeom prst="rect">
-            <a:avLst/>
-          </a:prstGeom>
-          <a:noFill/>
-          <a:ln/>
-        </p:spPr>
-        <p:txBody>
-          <a:bodyPr wrap="square" lIns="0" tIns="0" rIns="0" bIns="0" rtlCol="0" anchor="ctr"/>
-          <a:lstStyle/>
-          <a:p>
-            <a:pPr indent="0" marL="0">
-              <a:buNone/>
-            </a:pPr>
-            <a:r>
-              <a:rPr lang="en-US" sz="2600" b="1" dirty="0">
-                <a:solidFill>
-                  <a:srgbClr val="1B2A4A"/>
-                </a:solidFill>
-                <a:latin typeface="Georgia" pitchFamily="34" charset="0"/>
-                <a:ea typeface="Georgia" pitchFamily="34" charset="-122"/>
-                <a:cs typeface="Georgia" pitchFamily="34" charset="-120"/>
-              </a:rPr>
-              <a:t>Capacity Conversions</a:t>
-            </a:r>
-            <a:endParaRPr lang="en-US" sz="2600" dirty="0"/>
-          </a:p>
-        </p:txBody>
-      </p:sp>
-      <p:sp>
-        <p:nvSpPr>
-          <p:cNvPr id="5" name="Text 3"/>
-          <p:cNvSpPr/>
-          <p:nvPr/>
-        </p:nvSpPr>
-        <p:spPr>
-          <a:xfrm>
-            <a:off x="640080" y="1188720"/>
-            <a:ext cx="7863840" cy="3200400"/>
-          </a:xfrm>
-          <a:prstGeom prst="rect">
-            <a:avLst/>
-          </a:prstGeom>
-          <a:noFill/>
-          <a:ln/>
-        </p:spPr>
-        <p:txBody>
-          <a:bodyPr wrap="square" rtlCol="0" anchor="t"/>
-          <a:lstStyle/>
-          <a:p>
-            <a:pPr marL="342900" indent="-342900">
-              <a:lnSpc>
-                <a:spcPct val="140000"/>
-              </a:lnSpc>
-              <a:buSzPct val="100000"/>
-              <a:buChar char="•"/>
-            </a:pPr>
-            <a:r>
-              <a:rPr lang="en-US" sz="1500" dirty="0">
-                <a:solidFill>
-                  <a:srgbClr val="3D3A36"/>
-                </a:solidFill>
-                <a:latin typeface="Calibri" pitchFamily="34" charset="0"/>
-                <a:ea typeface="Calibri" pitchFamily="34" charset="-122"/>
-                <a:cs typeface="Calibri" pitchFamily="34" charset="-120"/>
-              </a:rPr>
-              <a:t>1 cm³ = 1 mL (the golden rule)</a:t>
-            </a:r>
-            <a:endParaRPr lang="en-US" sz="1500" dirty="0"/>
-          </a:p>
-          <a:p>
-            <a:pPr marL="342900" indent="-342900">
-              <a:lnSpc>
-                <a:spcPct val="140000"/>
-              </a:lnSpc>
-              <a:buSzPct val="100000"/>
-              <a:buChar char="•"/>
-            </a:pPr>
-            <a:r>
-              <a:rPr lang="en-US" sz="1500" dirty="0">
-                <a:solidFill>
-                  <a:srgbClr val="3D3A36"/>
-                </a:solidFill>
-                <a:latin typeface="Calibri" pitchFamily="34" charset="0"/>
-                <a:ea typeface="Calibri" pitchFamily="34" charset="-122"/>
-                <a:cs typeface="Calibri" pitchFamily="34" charset="-120"/>
-              </a:rPr>
-              <a:t>1 m³ = 1,000 L</a:t>
-            </a:r>
-            <a:endParaRPr lang="en-US" sz="1500" dirty="0"/>
-          </a:p>
-          <a:p>
-            <a:pPr marL="342900" indent="-342900">
-              <a:lnSpc>
-                <a:spcPct val="140000"/>
-              </a:lnSpc>
-              <a:buSzPct val="100000"/>
-              <a:buChar char="•"/>
-            </a:pPr>
-            <a:r>
-              <a:rPr lang="en-US" sz="1500" dirty="0">
-                <a:solidFill>
-                  <a:srgbClr val="3D3A36"/>
-                </a:solidFill>
-                <a:latin typeface="Calibri" pitchFamily="34" charset="0"/>
-                <a:ea typeface="Calibri" pitchFamily="34" charset="-122"/>
-                <a:cs typeface="Calibri" pitchFamily="34" charset="-120"/>
-              </a:rPr>
-              <a:t>1 L = 1,000 mL</a:t>
-            </a:r>
-            <a:endParaRPr lang="en-US" sz="1500" dirty="0"/>
-          </a:p>
-          <a:p>
-            <a:pPr marL="342900" indent="-342900">
-              <a:lnSpc>
-                <a:spcPct val="140000"/>
-              </a:lnSpc>
-              <a:buSzPct val="100000"/>
-              <a:buChar char="•"/>
-            </a:pPr>
-            <a:r>
-              <a:rPr lang="en-US" sz="1500" dirty="0">
-                <a:solidFill>
-                  <a:srgbClr val="3D3A36"/>
-                </a:solidFill>
-                <a:latin typeface="Calibri" pitchFamily="34" charset="0"/>
-                <a:ea typeface="Calibri" pitchFamily="34" charset="-122"/>
-                <a:cs typeface="Calibri" pitchFamily="34" charset="-120"/>
-              </a:rPr>
-              <a:t>Find volume first, then convert to capacity.</a:t>
-            </a:r>
-            <a:endParaRPr lang="en-US" sz="1500" dirty="0"/>
+              <a:t>mrzocchi.com</a:t>
+            </a:r>
+            <a:endParaRPr lang="en-US" sz="1000" dirty="0"/>
           </a:p>
         </p:txBody>
       </p:sp>

--- a/static/ppts/G6_Math_Full_Revision.pptx
+++ b/static/ppts/G6_Math_Full_Revision.pptx
@@ -1170,7 +1170,7 @@
         </p:nvSpPr>
         <p:spPr>
           <a:xfrm>
-            <a:off x="731520" y="1280160"/>
+            <a:off x="731520" y="1097280"/>
             <a:ext cx="7772400" cy="1371600"/>
           </a:xfrm>
           <a:prstGeom prst="rect">
@@ -1187,7 +1187,7 @@
               <a:buNone/>
             </a:pPr>
             <a:r>
-              <a:rPr lang="en-US" sz="3600" b="1" dirty="0">
+              <a:rPr lang="en-US" sz="4000" b="1" dirty="0">
                 <a:solidFill>
                   <a:srgbClr val="FFFFFF"/>
                 </a:solidFill>
@@ -1197,7 +1197,7 @@
               </a:rPr>
               <a:t>Geometry — Full Revision</a:t>
             </a:r>
-            <a:endParaRPr lang="en-US" sz="3600" dirty="0"/>
+            <a:endParaRPr lang="en-US" sz="4000" dirty="0"/>
           </a:p>
         </p:txBody>
       </p:sp>
@@ -1209,7 +1209,7 @@
         </p:nvSpPr>
         <p:spPr>
           <a:xfrm>
-            <a:off x="731520" y="2743200"/>
+            <a:off x="731520" y="2560320"/>
             <a:ext cx="7772400" cy="548640"/>
           </a:xfrm>
           <a:prstGeom prst="rect">
@@ -1228,13 +1228,13 @@
             <a:r>
               <a:rPr lang="en-US" sz="1600" dirty="0">
                 <a:solidFill>
-                  <a:srgbClr val="9B9690"/>
+                  <a:srgbClr val="E9C46A"/>
                 </a:solidFill>
                 <a:latin typeface="Calibri" pitchFamily="34" charset="0"/>
                 <a:ea typeface="Calibri" pitchFamily="34" charset="-122"/>
                 <a:cs typeface="Calibri" pitchFamily="34" charset="-120"/>
               </a:rPr>
-              <a:t>G6 Maths · Term 3 Review</a:t>
+              <a:t>Grade 6 Mathematics · Mr Zocchi</a:t>
             </a:r>
             <a:endParaRPr lang="en-US" sz="1600" dirty="0"/>
           </a:p>
@@ -1242,14 +1242,36 @@
       </p:sp>
       <p:sp>
         <p:nvSpPr>
-          <p:cNvPr id="5" name="Text 3"/>
-          <p:cNvSpPr/>
-          <p:nvPr/>
-        </p:nvSpPr>
-        <p:spPr>
-          <a:xfrm>
-            <a:off x="731520" y="4389120"/>
-            <a:ext cx="7772400" cy="457200"/>
+          <p:cNvPr id="5" name="Shape 3"/>
+          <p:cNvSpPr/>
+          <p:nvPr/>
+        </p:nvSpPr>
+        <p:spPr>
+          <a:xfrm>
+            <a:off x="731520" y="3474720"/>
+            <a:ext cx="2011680" cy="411480"/>
+          </a:xfrm>
+          <a:prstGeom prst="roundRect">
+            <a:avLst>
+              <a:gd name="adj" fmla="val 17778"/>
+            </a:avLst>
+          </a:prstGeom>
+          <a:solidFill>
+            <a:srgbClr val="2A9D8F"/>
+          </a:solidFill>
+          <a:ln/>
+        </p:spPr>
+      </p:sp>
+      <p:sp>
+        <p:nvSpPr>
+          <p:cNvPr id="6" name="Text 4"/>
+          <p:cNvSpPr/>
+          <p:nvPr/>
+        </p:nvSpPr>
+        <p:spPr>
+          <a:xfrm>
+            <a:off x="731520" y="3474720"/>
+            <a:ext cx="2011680" cy="411480"/>
           </a:xfrm>
           <a:prstGeom prst="rect">
             <a:avLst/>
@@ -1261,21 +1283,21 @@
           <a:bodyPr wrap="square" rtlCol="0" anchor="ctr"/>
           <a:lstStyle/>
           <a:p>
-            <a:pPr indent="0" marL="0">
+            <a:pPr algn="ctr" indent="0" marL="0">
               <a:buNone/>
             </a:pPr>
             <a:r>
-              <a:rPr lang="en-US" sz="1000" dirty="0">
+              <a:rPr lang="en-US" sz="1200" b="1" dirty="0">
                 <a:solidFill>
-                  <a:srgbClr val="6B6660"/>
+                  <a:srgbClr val="FFFFFF"/>
                 </a:solidFill>
                 <a:latin typeface="Calibri" pitchFamily="34" charset="0"/>
                 <a:ea typeface="Calibri" pitchFamily="34" charset="-122"/>
                 <a:cs typeface="Calibri" pitchFamily="34" charset="-120"/>
               </a:rPr>
-              <a:t>Mr Zocchi · mrzocchi.com</a:t>
-            </a:r>
-            <a:endParaRPr lang="en-US" sz="1000" dirty="0"/>
+              <a:t>Term 3 · Geometry</a:t>
+            </a:r>
+            <a:endParaRPr lang="en-US" sz="1200" dirty="0"/>
           </a:p>
         </p:txBody>
       </p:sp>
@@ -1293,7 +1315,7 @@
     <p:bg>
       <p:bgPr>
         <a:solidFill>
-          <a:srgbClr val="FFFFFF"/>
+          <a:srgbClr val="FAF8F5"/>
         </a:solidFill>
       </p:bgPr>
     </p:bg>
@@ -1339,8 +1361,8 @@
         </p:nvSpPr>
         <p:spPr>
           <a:xfrm>
-            <a:off x="548640" y="274320"/>
-            <a:ext cx="8046720" cy="640080"/>
+            <a:off x="7772400" y="4709160"/>
+            <a:ext cx="1097280" cy="320040"/>
           </a:xfrm>
           <a:prstGeom prst="rect">
             <a:avLst/>
@@ -1349,7 +1371,46 @@
           <a:ln/>
         </p:spPr>
         <p:txBody>
-          <a:bodyPr wrap="square" lIns="0" tIns="0" rIns="0" bIns="0" rtlCol="0" anchor="ctr"/>
+          <a:bodyPr wrap="square" rtlCol="0" anchor="ctr"/>
+          <a:lstStyle/>
+          <a:p>
+            <a:pPr algn="r" indent="0" marL="0">
+              <a:buNone/>
+            </a:pPr>
+            <a:r>
+              <a:rPr lang="en-US" sz="900" dirty="0">
+                <a:solidFill>
+                  <a:srgbClr val="6B6660"/>
+                </a:solidFill>
+                <a:latin typeface="Calibri" pitchFamily="34" charset="0"/>
+                <a:ea typeface="Calibri" pitchFamily="34" charset="-122"/>
+                <a:cs typeface="Calibri" pitchFamily="34" charset="-120"/>
+              </a:rPr>
+              <a:t>2 / 4</a:t>
+            </a:r>
+            <a:endParaRPr lang="en-US" sz="900" dirty="0"/>
+          </a:p>
+        </p:txBody>
+      </p:sp>
+      <p:sp>
+        <p:nvSpPr>
+          <p:cNvPr id="4" name="Text 2"/>
+          <p:cNvSpPr/>
+          <p:nvPr/>
+        </p:nvSpPr>
+        <p:spPr>
+          <a:xfrm>
+            <a:off x="457200" y="274320"/>
+            <a:ext cx="8229600" cy="640080"/>
+          </a:xfrm>
+          <a:prstGeom prst="rect">
+            <a:avLst/>
+          </a:prstGeom>
+          <a:noFill/>
+          <a:ln/>
+        </p:spPr>
+        <p:txBody>
+          <a:bodyPr wrap="square" rtlCol="0" anchor="ctr"/>
           <a:lstStyle/>
           <a:p>
             <a:pPr indent="0" marL="0">
@@ -1364,7 +1425,7 @@
                 <a:ea typeface="Georgia" pitchFamily="34" charset="-122"/>
                 <a:cs typeface="Georgia" pitchFamily="34" charset="-120"/>
               </a:rPr>
-              <a:t>Perimeter &amp; Area</a:t>
+              <a:t>2D Measurement</a:t>
             </a:r>
             <a:endParaRPr lang="en-US" sz="2600" dirty="0"/>
           </a:p>
@@ -1372,14 +1433,66 @@
       </p:sp>
       <p:sp>
         <p:nvSpPr>
-          <p:cNvPr id="4" name="Text 2"/>
-          <p:cNvSpPr/>
-          <p:nvPr/>
-        </p:nvSpPr>
-        <p:spPr>
-          <a:xfrm>
-            <a:off x="548640" y="1097280"/>
-            <a:ext cx="8046720" cy="3474720"/>
+          <p:cNvPr id="5" name="Shape 3"/>
+          <p:cNvSpPr/>
+          <p:nvPr/>
+        </p:nvSpPr>
+        <p:spPr>
+          <a:xfrm>
+            <a:off x="457200" y="1188720"/>
+            <a:ext cx="2560320" cy="1828800"/>
+          </a:xfrm>
+          <a:prstGeom prst="rect">
+            <a:avLst/>
+          </a:prstGeom>
+          <a:solidFill>
+            <a:srgbClr val="FFFFFF"/>
+          </a:solidFill>
+          <a:ln w="12700">
+            <a:solidFill>
+              <a:srgbClr val="E5E2DC"/>
+            </a:solidFill>
+            <a:prstDash val="solid"/>
+          </a:ln>
+          <a:effectLst>
+            <a:outerShdw sx="100000" sy="100000" kx="0" ky="0" algn="bl" rotWithShape="0" blurRad="50800" dist="25400" dir="8100000">
+              <a:srgbClr val="000000">
+                <a:alpha val="10000"/>
+              </a:srgbClr>
+            </a:outerShdw>
+          </a:effectLst>
+        </p:spPr>
+      </p:sp>
+      <p:sp>
+        <p:nvSpPr>
+          <p:cNvPr id="6" name="Shape 4"/>
+          <p:cNvSpPr/>
+          <p:nvPr/>
+        </p:nvSpPr>
+        <p:spPr>
+          <a:xfrm>
+            <a:off x="457200" y="1188720"/>
+            <a:ext cx="2560320" cy="54864"/>
+          </a:xfrm>
+          <a:prstGeom prst="rect">
+            <a:avLst/>
+          </a:prstGeom>
+          <a:solidFill>
+            <a:srgbClr val="2A9D8F"/>
+          </a:solidFill>
+          <a:ln/>
+        </p:spPr>
+      </p:sp>
+      <p:sp>
+        <p:nvSpPr>
+          <p:cNvPr id="7" name="Text 5"/>
+          <p:cNvSpPr/>
+          <p:nvPr/>
+        </p:nvSpPr>
+        <p:spPr>
+          <a:xfrm>
+            <a:off x="594360" y="1325880"/>
+            <a:ext cx="2286000" cy="365760"/>
           </a:xfrm>
           <a:prstGeom prst="rect">
             <a:avLst/>
@@ -1388,18 +1501,53 @@
           <a:ln/>
         </p:spPr>
         <p:txBody>
+          <a:bodyPr wrap="square" rtlCol="0" anchor="ctr"/>
+          <a:lstStyle/>
+          <a:p>
+            <a:pPr indent="0" marL="0">
+              <a:buNone/>
+            </a:pPr>
+            <a:r>
+              <a:rPr lang="en-US" sz="1400" b="1" dirty="0">
+                <a:solidFill>
+                  <a:srgbClr val="1B2A4A"/>
+                </a:solidFill>
+                <a:latin typeface="Calibri" pitchFamily="34" charset="0"/>
+                <a:ea typeface="Calibri" pitchFamily="34" charset="-122"/>
+                <a:cs typeface="Calibri" pitchFamily="34" charset="-120"/>
+              </a:rPr>
+              <a:t>Perimeter</a:t>
+            </a:r>
+            <a:endParaRPr lang="en-US" sz="1400" dirty="0"/>
+          </a:p>
+        </p:txBody>
+      </p:sp>
+      <p:sp>
+        <p:nvSpPr>
+          <p:cNvPr id="8" name="Text 6"/>
+          <p:cNvSpPr/>
+          <p:nvPr/>
+        </p:nvSpPr>
+        <p:spPr>
+          <a:xfrm>
+            <a:off x="594360" y="1737360"/>
+            <a:ext cx="2286000" cy="1097280"/>
+          </a:xfrm>
+          <a:prstGeom prst="rect">
+            <a:avLst/>
+          </a:prstGeom>
+          <a:noFill/>
+          <a:ln/>
+        </p:spPr>
+        <p:txBody>
           <a:bodyPr wrap="square" rtlCol="0" anchor="t"/>
           <a:lstStyle/>
           <a:p>
-            <a:pPr marL="342900" indent="-342900">
-              <a:spcAft>
-                <a:spcPts val="800"/>
-              </a:spcAft>
-              <a:buSzPct val="100000"/>
-              <a:buChar char="•"/>
+            <a:pPr indent="0" marL="0">
+              <a:buNone/>
             </a:pPr>
             <a:r>
-              <a:rPr lang="en-US" sz="1500" dirty="0">
+              <a:rPr lang="en-US" sz="1100" dirty="0">
                 <a:solidFill>
                   <a:srgbClr val="3D3A36"/>
                 </a:solidFill>
@@ -1407,20 +1555,129 @@
                 <a:ea typeface="Calibri" pitchFamily="34" charset="-122"/>
                 <a:cs typeface="Calibri" pitchFamily="34" charset="-120"/>
               </a:rPr>
-              <a:t>Perimeter = distance around (add all sides)</a:t>
-            </a:r>
-            <a:endParaRPr lang="en-US" sz="1500" dirty="0"/>
-          </a:p>
-          <a:p>
-            <a:pPr marL="342900" indent="-342900">
-              <a:spcAft>
-                <a:spcPts val="800"/>
-              </a:spcAft>
-              <a:buSzPct val="100000"/>
-              <a:buChar char="•"/>
+              <a:t>Distance around a shape. Rectangle: P=2(l+w). Square: P=4s. Add all sides for irregular shapes.</a:t>
+            </a:r>
+            <a:endParaRPr lang="en-US" sz="1100" dirty="0"/>
+          </a:p>
+        </p:txBody>
+      </p:sp>
+      <p:sp>
+        <p:nvSpPr>
+          <p:cNvPr id="9" name="Shape 7"/>
+          <p:cNvSpPr/>
+          <p:nvPr/>
+        </p:nvSpPr>
+        <p:spPr>
+          <a:xfrm>
+            <a:off x="3291840" y="1188720"/>
+            <a:ext cx="2560320" cy="1828800"/>
+          </a:xfrm>
+          <a:prstGeom prst="rect">
+            <a:avLst/>
+          </a:prstGeom>
+          <a:solidFill>
+            <a:srgbClr val="FFFFFF"/>
+          </a:solidFill>
+          <a:ln w="12700">
+            <a:solidFill>
+              <a:srgbClr val="E5E2DC"/>
+            </a:solidFill>
+            <a:prstDash val="solid"/>
+          </a:ln>
+          <a:effectLst>
+            <a:outerShdw sx="100000" sy="100000" kx="0" ky="0" algn="bl" rotWithShape="0" blurRad="50800" dist="25400" dir="8100000">
+              <a:srgbClr val="000000">
+                <a:alpha val="10000"/>
+              </a:srgbClr>
+            </a:outerShdw>
+          </a:effectLst>
+        </p:spPr>
+      </p:sp>
+      <p:sp>
+        <p:nvSpPr>
+          <p:cNvPr id="10" name="Shape 8"/>
+          <p:cNvSpPr/>
+          <p:nvPr/>
+        </p:nvSpPr>
+        <p:spPr>
+          <a:xfrm>
+            <a:off x="3291840" y="1188720"/>
+            <a:ext cx="2560320" cy="54864"/>
+          </a:xfrm>
+          <a:prstGeom prst="rect">
+            <a:avLst/>
+          </a:prstGeom>
+          <a:solidFill>
+            <a:srgbClr val="2A9D8F"/>
+          </a:solidFill>
+          <a:ln/>
+        </p:spPr>
+      </p:sp>
+      <p:sp>
+        <p:nvSpPr>
+          <p:cNvPr id="11" name="Text 9"/>
+          <p:cNvSpPr/>
+          <p:nvPr/>
+        </p:nvSpPr>
+        <p:spPr>
+          <a:xfrm>
+            <a:off x="3429000" y="1325880"/>
+            <a:ext cx="2286000" cy="365760"/>
+          </a:xfrm>
+          <a:prstGeom prst="rect">
+            <a:avLst/>
+          </a:prstGeom>
+          <a:noFill/>
+          <a:ln/>
+        </p:spPr>
+        <p:txBody>
+          <a:bodyPr wrap="square" rtlCol="0" anchor="ctr"/>
+          <a:lstStyle/>
+          <a:p>
+            <a:pPr indent="0" marL="0">
+              <a:buNone/>
             </a:pPr>
             <a:r>
-              <a:rPr lang="en-US" sz="1500" dirty="0">
+              <a:rPr lang="en-US" sz="1400" b="1" dirty="0">
+                <a:solidFill>
+                  <a:srgbClr val="1B2A4A"/>
+                </a:solidFill>
+                <a:latin typeface="Calibri" pitchFamily="34" charset="0"/>
+                <a:ea typeface="Calibri" pitchFamily="34" charset="-122"/>
+                <a:cs typeface="Calibri" pitchFamily="34" charset="-120"/>
+              </a:rPr>
+              <a:t>Area</a:t>
+            </a:r>
+            <a:endParaRPr lang="en-US" sz="1400" dirty="0"/>
+          </a:p>
+        </p:txBody>
+      </p:sp>
+      <p:sp>
+        <p:nvSpPr>
+          <p:cNvPr id="12" name="Text 10"/>
+          <p:cNvSpPr/>
+          <p:nvPr/>
+        </p:nvSpPr>
+        <p:spPr>
+          <a:xfrm>
+            <a:off x="3429000" y="1737360"/>
+            <a:ext cx="2286000" cy="1097280"/>
+          </a:xfrm>
+          <a:prstGeom prst="rect">
+            <a:avLst/>
+          </a:prstGeom>
+          <a:noFill/>
+          <a:ln/>
+        </p:spPr>
+        <p:txBody>
+          <a:bodyPr wrap="square" rtlCol="0" anchor="t"/>
+          <a:lstStyle/>
+          <a:p>
+            <a:pPr indent="0" marL="0">
+              <a:buNone/>
+            </a:pPr>
+            <a:r>
+              <a:rPr lang="en-US" sz="1100" dirty="0">
                 <a:solidFill>
                   <a:srgbClr val="3D3A36"/>
                 </a:solidFill>
@@ -1428,20 +1685,129 @@
                 <a:ea typeface="Calibri" pitchFamily="34" charset="-122"/>
                 <a:cs typeface="Calibri" pitchFamily="34" charset="-120"/>
               </a:rPr>
-              <a:t>Rectangle: P = 2(l+w) | Square: P = 4s</a:t>
-            </a:r>
-            <a:endParaRPr lang="en-US" sz="1500" dirty="0"/>
-          </a:p>
-          <a:p>
-            <a:pPr marL="342900" indent="-342900">
-              <a:spcAft>
-                <a:spcPts val="800"/>
-              </a:spcAft>
-              <a:buSzPct val="100000"/>
-              <a:buChar char="•"/>
+              <a:t>Space inside a 2D shape. Rectangle: A=l×w. Triangle: A=½bh. Parallelogram: A=bh. Square units.</a:t>
+            </a:r>
+            <a:endParaRPr lang="en-US" sz="1100" dirty="0"/>
+          </a:p>
+        </p:txBody>
+      </p:sp>
+      <p:sp>
+        <p:nvSpPr>
+          <p:cNvPr id="13" name="Shape 11"/>
+          <p:cNvSpPr/>
+          <p:nvPr/>
+        </p:nvSpPr>
+        <p:spPr>
+          <a:xfrm>
+            <a:off x="6126480" y="1188720"/>
+            <a:ext cx="2560320" cy="1828800"/>
+          </a:xfrm>
+          <a:prstGeom prst="rect">
+            <a:avLst/>
+          </a:prstGeom>
+          <a:solidFill>
+            <a:srgbClr val="FFFFFF"/>
+          </a:solidFill>
+          <a:ln w="12700">
+            <a:solidFill>
+              <a:srgbClr val="E5E2DC"/>
+            </a:solidFill>
+            <a:prstDash val="solid"/>
+          </a:ln>
+          <a:effectLst>
+            <a:outerShdw sx="100000" sy="100000" kx="0" ky="0" algn="bl" rotWithShape="0" blurRad="50800" dist="25400" dir="8100000">
+              <a:srgbClr val="000000">
+                <a:alpha val="10000"/>
+              </a:srgbClr>
+            </a:outerShdw>
+          </a:effectLst>
+        </p:spPr>
+      </p:sp>
+      <p:sp>
+        <p:nvSpPr>
+          <p:cNvPr id="14" name="Shape 12"/>
+          <p:cNvSpPr/>
+          <p:nvPr/>
+        </p:nvSpPr>
+        <p:spPr>
+          <a:xfrm>
+            <a:off x="6126480" y="1188720"/>
+            <a:ext cx="2560320" cy="54864"/>
+          </a:xfrm>
+          <a:prstGeom prst="rect">
+            <a:avLst/>
+          </a:prstGeom>
+          <a:solidFill>
+            <a:srgbClr val="2A9D8F"/>
+          </a:solidFill>
+          <a:ln/>
+        </p:spPr>
+      </p:sp>
+      <p:sp>
+        <p:nvSpPr>
+          <p:cNvPr id="15" name="Text 13"/>
+          <p:cNvSpPr/>
+          <p:nvPr/>
+        </p:nvSpPr>
+        <p:spPr>
+          <a:xfrm>
+            <a:off x="6263640" y="1325880"/>
+            <a:ext cx="2286000" cy="365760"/>
+          </a:xfrm>
+          <a:prstGeom prst="rect">
+            <a:avLst/>
+          </a:prstGeom>
+          <a:noFill/>
+          <a:ln/>
+        </p:spPr>
+        <p:txBody>
+          <a:bodyPr wrap="square" rtlCol="0" anchor="ctr"/>
+          <a:lstStyle/>
+          <a:p>
+            <a:pPr indent="0" marL="0">
+              <a:buNone/>
             </a:pPr>
             <a:r>
-              <a:rPr lang="en-US" sz="1500" dirty="0">
+              <a:rPr lang="en-US" sz="1400" b="1" dirty="0">
+                <a:solidFill>
+                  <a:srgbClr val="1B2A4A"/>
+                </a:solidFill>
+                <a:latin typeface="Calibri" pitchFamily="34" charset="0"/>
+                <a:ea typeface="Calibri" pitchFamily="34" charset="-122"/>
+                <a:cs typeface="Calibri" pitchFamily="34" charset="-120"/>
+              </a:rPr>
+              <a:t>Compound Shapes</a:t>
+            </a:r>
+            <a:endParaRPr lang="en-US" sz="1400" dirty="0"/>
+          </a:p>
+        </p:txBody>
+      </p:sp>
+      <p:sp>
+        <p:nvSpPr>
+          <p:cNvPr id="16" name="Text 14"/>
+          <p:cNvSpPr/>
+          <p:nvPr/>
+        </p:nvSpPr>
+        <p:spPr>
+          <a:xfrm>
+            <a:off x="6263640" y="1737360"/>
+            <a:ext cx="2286000" cy="1097280"/>
+          </a:xfrm>
+          <a:prstGeom prst="rect">
+            <a:avLst/>
+          </a:prstGeom>
+          <a:noFill/>
+          <a:ln/>
+        </p:spPr>
+        <p:txBody>
+          <a:bodyPr wrap="square" rtlCol="0" anchor="t"/>
+          <a:lstStyle/>
+          <a:p>
+            <a:pPr indent="0" marL="0">
+              <a:buNone/>
+            </a:pPr>
+            <a:r>
+              <a:rPr lang="en-US" sz="1100" dirty="0">
                 <a:solidFill>
                   <a:srgbClr val="3D3A36"/>
                 </a:solidFill>
@@ -1449,66 +1815,9 @@
                 <a:ea typeface="Calibri" pitchFamily="34" charset="-122"/>
                 <a:cs typeface="Calibri" pitchFamily="34" charset="-120"/>
               </a:rPr>
-              <a:t>Area = space inside a 2D shape</a:t>
-            </a:r>
-            <a:endParaRPr lang="en-US" sz="1500" dirty="0"/>
-          </a:p>
-          <a:p>
-            <a:pPr marL="342900" indent="-342900">
-              <a:spcAft>
-                <a:spcPts val="800"/>
-              </a:spcAft>
-              <a:buSzPct val="100000"/>
-              <a:buChar char="•"/>
-            </a:pPr>
-            <a:r>
-              <a:rPr lang="en-US" sz="1500" dirty="0">
-                <a:solidFill>
-                  <a:srgbClr val="3D3A36"/>
-                </a:solidFill>
-                <a:latin typeface="Calibri" pitchFamily="34" charset="0"/>
-                <a:ea typeface="Calibri" pitchFamily="34" charset="-122"/>
-                <a:cs typeface="Calibri" pitchFamily="34" charset="-120"/>
-              </a:rPr>
-              <a:t>Rectangle: A = l×w | Triangle: A = ½×b×h | Parallelogram: A = b×h</a:t>
-            </a:r>
-            <a:endParaRPr lang="en-US" sz="1500" dirty="0"/>
-          </a:p>
-        </p:txBody>
-      </p:sp>
-      <p:sp>
-        <p:nvSpPr>
-          <p:cNvPr id="5" name="Text 3"/>
-          <p:cNvSpPr/>
-          <p:nvPr/>
-        </p:nvSpPr>
-        <p:spPr>
-          <a:xfrm>
-            <a:off x="548640" y="4800600"/>
-            <a:ext cx="3657600" cy="274320"/>
-          </a:xfrm>
-          <a:prstGeom prst="rect">
-            <a:avLst/>
-          </a:prstGeom>
-          <a:noFill/>
-          <a:ln/>
-        </p:spPr>
-        <p:txBody>
-          <a:bodyPr wrap="square" rtlCol="0" anchor="ctr"/>
-          <a:lstStyle/>
-          <a:p>
-            <a:pPr indent="0" marL="0">
-              <a:buNone/>
-            </a:pPr>
-            <a:r>
-              <a:rPr lang="en-US" sz="800" dirty="0">
-                <a:solidFill>
-                  <a:srgbClr val="9B9690"/>
-                </a:solidFill>
-              </a:rPr>
-              <a:t>mrzocchi.com</a:t>
-            </a:r>
-            <a:endParaRPr lang="en-US" sz="800" dirty="0"/>
+              <a:t>Split into rectangles/triangles. Calculate each. Add together (or subtract for cut-outs).</a:t>
+            </a:r>
+            <a:endParaRPr lang="en-US" sz="1100" dirty="0"/>
           </a:p>
         </p:txBody>
       </p:sp>
@@ -1526,7 +1835,7 @@
     <p:bg>
       <p:bgPr>
         <a:solidFill>
-          <a:srgbClr val="FFFFFF"/>
+          <a:srgbClr val="FAF8F5"/>
         </a:solidFill>
       </p:bgPr>
     </p:bg>
@@ -1572,8 +1881,8 @@
         </p:nvSpPr>
         <p:spPr>
           <a:xfrm>
-            <a:off x="548640" y="274320"/>
-            <a:ext cx="8046720" cy="640080"/>
+            <a:off x="7772400" y="4709160"/>
+            <a:ext cx="1097280" cy="320040"/>
           </a:xfrm>
           <a:prstGeom prst="rect">
             <a:avLst/>
@@ -1582,7 +1891,46 @@
           <a:ln/>
         </p:spPr>
         <p:txBody>
-          <a:bodyPr wrap="square" lIns="0" tIns="0" rIns="0" bIns="0" rtlCol="0" anchor="ctr"/>
+          <a:bodyPr wrap="square" rtlCol="0" anchor="ctr"/>
+          <a:lstStyle/>
+          <a:p>
+            <a:pPr algn="r" indent="0" marL="0">
+              <a:buNone/>
+            </a:pPr>
+            <a:r>
+              <a:rPr lang="en-US" sz="900" dirty="0">
+                <a:solidFill>
+                  <a:srgbClr val="6B6660"/>
+                </a:solidFill>
+                <a:latin typeface="Calibri" pitchFamily="34" charset="0"/>
+                <a:ea typeface="Calibri" pitchFamily="34" charset="-122"/>
+                <a:cs typeface="Calibri" pitchFamily="34" charset="-120"/>
+              </a:rPr>
+              <a:t>3 / 4</a:t>
+            </a:r>
+            <a:endParaRPr lang="en-US" sz="900" dirty="0"/>
+          </a:p>
+        </p:txBody>
+      </p:sp>
+      <p:sp>
+        <p:nvSpPr>
+          <p:cNvPr id="4" name="Text 2"/>
+          <p:cNvSpPr/>
+          <p:nvPr/>
+        </p:nvSpPr>
+        <p:spPr>
+          <a:xfrm>
+            <a:off x="457200" y="274320"/>
+            <a:ext cx="8229600" cy="640080"/>
+          </a:xfrm>
+          <a:prstGeom prst="rect">
+            <a:avLst/>
+          </a:prstGeom>
+          <a:noFill/>
+          <a:ln/>
+        </p:spPr>
+        <p:txBody>
+          <a:bodyPr wrap="square" rtlCol="0" anchor="ctr"/>
           <a:lstStyle/>
           <a:p>
             <a:pPr indent="0" marL="0">
@@ -1597,7 +1945,7 @@
                 <a:ea typeface="Georgia" pitchFamily="34" charset="-122"/>
                 <a:cs typeface="Georgia" pitchFamily="34" charset="-120"/>
               </a:rPr>
-              <a:t>Surface Area, Volume &amp; Capacity</a:t>
+              <a:t>3D Measurement</a:t>
             </a:r>
             <a:endParaRPr lang="en-US" sz="2600" dirty="0"/>
           </a:p>
@@ -1605,14 +1953,66 @@
       </p:sp>
       <p:sp>
         <p:nvSpPr>
-          <p:cNvPr id="4" name="Text 2"/>
-          <p:cNvSpPr/>
-          <p:nvPr/>
-        </p:nvSpPr>
-        <p:spPr>
-          <a:xfrm>
-            <a:off x="548640" y="1097280"/>
-            <a:ext cx="8046720" cy="3474720"/>
+          <p:cNvPr id="5" name="Shape 3"/>
+          <p:cNvSpPr/>
+          <p:nvPr/>
+        </p:nvSpPr>
+        <p:spPr>
+          <a:xfrm>
+            <a:off x="457200" y="1188720"/>
+            <a:ext cx="2560320" cy="1828800"/>
+          </a:xfrm>
+          <a:prstGeom prst="rect">
+            <a:avLst/>
+          </a:prstGeom>
+          <a:solidFill>
+            <a:srgbClr val="FFFFFF"/>
+          </a:solidFill>
+          <a:ln w="12700">
+            <a:solidFill>
+              <a:srgbClr val="E5E2DC"/>
+            </a:solidFill>
+            <a:prstDash val="solid"/>
+          </a:ln>
+          <a:effectLst>
+            <a:outerShdw sx="100000" sy="100000" kx="0" ky="0" algn="bl" rotWithShape="0" blurRad="50800" dist="25400" dir="8100000">
+              <a:srgbClr val="000000">
+                <a:alpha val="10000"/>
+              </a:srgbClr>
+            </a:outerShdw>
+          </a:effectLst>
+        </p:spPr>
+      </p:sp>
+      <p:sp>
+        <p:nvSpPr>
+          <p:cNvPr id="6" name="Shape 4"/>
+          <p:cNvSpPr/>
+          <p:nvPr/>
+        </p:nvSpPr>
+        <p:spPr>
+          <a:xfrm>
+            <a:off x="457200" y="1188720"/>
+            <a:ext cx="2560320" cy="54864"/>
+          </a:xfrm>
+          <a:prstGeom prst="rect">
+            <a:avLst/>
+          </a:prstGeom>
+          <a:solidFill>
+            <a:srgbClr val="2A9D8F"/>
+          </a:solidFill>
+          <a:ln/>
+        </p:spPr>
+      </p:sp>
+      <p:sp>
+        <p:nvSpPr>
+          <p:cNvPr id="7" name="Text 5"/>
+          <p:cNvSpPr/>
+          <p:nvPr/>
+        </p:nvSpPr>
+        <p:spPr>
+          <a:xfrm>
+            <a:off x="594360" y="1325880"/>
+            <a:ext cx="2286000" cy="365760"/>
           </a:xfrm>
           <a:prstGeom prst="rect">
             <a:avLst/>
@@ -1621,18 +2021,53 @@
           <a:ln/>
         </p:spPr>
         <p:txBody>
+          <a:bodyPr wrap="square" rtlCol="0" anchor="ctr"/>
+          <a:lstStyle/>
+          <a:p>
+            <a:pPr indent="0" marL="0">
+              <a:buNone/>
+            </a:pPr>
+            <a:r>
+              <a:rPr lang="en-US" sz="1400" b="1" dirty="0">
+                <a:solidFill>
+                  <a:srgbClr val="1B2A4A"/>
+                </a:solidFill>
+                <a:latin typeface="Calibri" pitchFamily="34" charset="0"/>
+                <a:ea typeface="Calibri" pitchFamily="34" charset="-122"/>
+                <a:cs typeface="Calibri" pitchFamily="34" charset="-120"/>
+              </a:rPr>
+              <a:t>Surface Area</a:t>
+            </a:r>
+            <a:endParaRPr lang="en-US" sz="1400" dirty="0"/>
+          </a:p>
+        </p:txBody>
+      </p:sp>
+      <p:sp>
+        <p:nvSpPr>
+          <p:cNvPr id="8" name="Text 6"/>
+          <p:cNvSpPr/>
+          <p:nvPr/>
+        </p:nvSpPr>
+        <p:spPr>
+          <a:xfrm>
+            <a:off x="594360" y="1737360"/>
+            <a:ext cx="2286000" cy="1097280"/>
+          </a:xfrm>
+          <a:prstGeom prst="rect">
+            <a:avLst/>
+          </a:prstGeom>
+          <a:noFill/>
+          <a:ln/>
+        </p:spPr>
+        <p:txBody>
           <a:bodyPr wrap="square" rtlCol="0" anchor="t"/>
           <a:lstStyle/>
           <a:p>
-            <a:pPr marL="342900" indent="-342900">
-              <a:spcAft>
-                <a:spcPts val="800"/>
-              </a:spcAft>
-              <a:buSzPct val="100000"/>
-              <a:buChar char="•"/>
+            <a:pPr indent="0" marL="0">
+              <a:buNone/>
             </a:pPr>
             <a:r>
-              <a:rPr lang="en-US" sz="1500" dirty="0">
+              <a:rPr lang="en-US" sz="1100" dirty="0">
                 <a:solidFill>
                   <a:srgbClr val="3D3A36"/>
                 </a:solidFill>
@@ -1640,20 +2075,129 @@
                 <a:ea typeface="Calibri" pitchFamily="34" charset="-122"/>
                 <a:cs typeface="Calibri" pitchFamily="34" charset="-120"/>
               </a:rPr>
-              <a:t>Surface area = total area of all faces</a:t>
-            </a:r>
-            <a:endParaRPr lang="en-US" sz="1500" dirty="0"/>
-          </a:p>
-          <a:p>
-            <a:pPr marL="342900" indent="-342900">
-              <a:spcAft>
-                <a:spcPts val="800"/>
-              </a:spcAft>
-              <a:buSzPct val="100000"/>
-              <a:buChar char="•"/>
+              <a:t>Total area of all faces. Cuboid: SA=2lw+2lh+2wh. Cube: SA=6s². Draw net to see all faces.</a:t>
+            </a:r>
+            <a:endParaRPr lang="en-US" sz="1100" dirty="0"/>
+          </a:p>
+        </p:txBody>
+      </p:sp>
+      <p:sp>
+        <p:nvSpPr>
+          <p:cNvPr id="9" name="Shape 7"/>
+          <p:cNvSpPr/>
+          <p:nvPr/>
+        </p:nvSpPr>
+        <p:spPr>
+          <a:xfrm>
+            <a:off x="3291840" y="1188720"/>
+            <a:ext cx="2560320" cy="1828800"/>
+          </a:xfrm>
+          <a:prstGeom prst="rect">
+            <a:avLst/>
+          </a:prstGeom>
+          <a:solidFill>
+            <a:srgbClr val="FFFFFF"/>
+          </a:solidFill>
+          <a:ln w="12700">
+            <a:solidFill>
+              <a:srgbClr val="E5E2DC"/>
+            </a:solidFill>
+            <a:prstDash val="solid"/>
+          </a:ln>
+          <a:effectLst>
+            <a:outerShdw sx="100000" sy="100000" kx="0" ky="0" algn="bl" rotWithShape="0" blurRad="50800" dist="25400" dir="8100000">
+              <a:srgbClr val="000000">
+                <a:alpha val="10000"/>
+              </a:srgbClr>
+            </a:outerShdw>
+          </a:effectLst>
+        </p:spPr>
+      </p:sp>
+      <p:sp>
+        <p:nvSpPr>
+          <p:cNvPr id="10" name="Shape 8"/>
+          <p:cNvSpPr/>
+          <p:nvPr/>
+        </p:nvSpPr>
+        <p:spPr>
+          <a:xfrm>
+            <a:off x="3291840" y="1188720"/>
+            <a:ext cx="2560320" cy="54864"/>
+          </a:xfrm>
+          <a:prstGeom prst="rect">
+            <a:avLst/>
+          </a:prstGeom>
+          <a:solidFill>
+            <a:srgbClr val="2A9D8F"/>
+          </a:solidFill>
+          <a:ln/>
+        </p:spPr>
+      </p:sp>
+      <p:sp>
+        <p:nvSpPr>
+          <p:cNvPr id="11" name="Text 9"/>
+          <p:cNvSpPr/>
+          <p:nvPr/>
+        </p:nvSpPr>
+        <p:spPr>
+          <a:xfrm>
+            <a:off x="3429000" y="1325880"/>
+            <a:ext cx="2286000" cy="365760"/>
+          </a:xfrm>
+          <a:prstGeom prst="rect">
+            <a:avLst/>
+          </a:prstGeom>
+          <a:noFill/>
+          <a:ln/>
+        </p:spPr>
+        <p:txBody>
+          <a:bodyPr wrap="square" rtlCol="0" anchor="ctr"/>
+          <a:lstStyle/>
+          <a:p>
+            <a:pPr indent="0" marL="0">
+              <a:buNone/>
             </a:pPr>
             <a:r>
-              <a:rPr lang="en-US" sz="1500" dirty="0">
+              <a:rPr lang="en-US" sz="1400" b="1" dirty="0">
+                <a:solidFill>
+                  <a:srgbClr val="1B2A4A"/>
+                </a:solidFill>
+                <a:latin typeface="Calibri" pitchFamily="34" charset="0"/>
+                <a:ea typeface="Calibri" pitchFamily="34" charset="-122"/>
+                <a:cs typeface="Calibri" pitchFamily="34" charset="-120"/>
+              </a:rPr>
+              <a:t>Volume</a:t>
+            </a:r>
+            <a:endParaRPr lang="en-US" sz="1400" dirty="0"/>
+          </a:p>
+        </p:txBody>
+      </p:sp>
+      <p:sp>
+        <p:nvSpPr>
+          <p:cNvPr id="12" name="Text 10"/>
+          <p:cNvSpPr/>
+          <p:nvPr/>
+        </p:nvSpPr>
+        <p:spPr>
+          <a:xfrm>
+            <a:off x="3429000" y="1737360"/>
+            <a:ext cx="2286000" cy="1097280"/>
+          </a:xfrm>
+          <a:prstGeom prst="rect">
+            <a:avLst/>
+          </a:prstGeom>
+          <a:noFill/>
+          <a:ln/>
+        </p:spPr>
+        <p:txBody>
+          <a:bodyPr wrap="square" rtlCol="0" anchor="t"/>
+          <a:lstStyle/>
+          <a:p>
+            <a:pPr indent="0" marL="0">
+              <a:buNone/>
+            </a:pPr>
+            <a:r>
+              <a:rPr lang="en-US" sz="1100" dirty="0">
                 <a:solidFill>
                   <a:srgbClr val="3D3A36"/>
                 </a:solidFill>
@@ -1661,20 +2205,129 @@
                 <a:ea typeface="Calibri" pitchFamily="34" charset="-122"/>
                 <a:cs typeface="Calibri" pitchFamily="34" charset="-120"/>
               </a:rPr>
-              <a:t>Cuboid SA = 2(lw+lh+wh) | Cube SA = 6s²</a:t>
-            </a:r>
-            <a:endParaRPr lang="en-US" sz="1500" dirty="0"/>
-          </a:p>
-          <a:p>
-            <a:pPr marL="342900" indent="-342900">
-              <a:spcAft>
-                <a:spcPts val="800"/>
-              </a:spcAft>
-              <a:buSzPct val="100000"/>
-              <a:buChar char="•"/>
+              <a:t>3D space inside. Cuboid: V=lwh. Prism: V=cross-section × length. Cubic units.</a:t>
+            </a:r>
+            <a:endParaRPr lang="en-US" sz="1100" dirty="0"/>
+          </a:p>
+        </p:txBody>
+      </p:sp>
+      <p:sp>
+        <p:nvSpPr>
+          <p:cNvPr id="13" name="Shape 11"/>
+          <p:cNvSpPr/>
+          <p:nvPr/>
+        </p:nvSpPr>
+        <p:spPr>
+          <a:xfrm>
+            <a:off x="6126480" y="1188720"/>
+            <a:ext cx="2560320" cy="1828800"/>
+          </a:xfrm>
+          <a:prstGeom prst="rect">
+            <a:avLst/>
+          </a:prstGeom>
+          <a:solidFill>
+            <a:srgbClr val="FFFFFF"/>
+          </a:solidFill>
+          <a:ln w="12700">
+            <a:solidFill>
+              <a:srgbClr val="E5E2DC"/>
+            </a:solidFill>
+            <a:prstDash val="solid"/>
+          </a:ln>
+          <a:effectLst>
+            <a:outerShdw sx="100000" sy="100000" kx="0" ky="0" algn="bl" rotWithShape="0" blurRad="50800" dist="25400" dir="8100000">
+              <a:srgbClr val="000000">
+                <a:alpha val="10000"/>
+              </a:srgbClr>
+            </a:outerShdw>
+          </a:effectLst>
+        </p:spPr>
+      </p:sp>
+      <p:sp>
+        <p:nvSpPr>
+          <p:cNvPr id="14" name="Shape 12"/>
+          <p:cNvSpPr/>
+          <p:nvPr/>
+        </p:nvSpPr>
+        <p:spPr>
+          <a:xfrm>
+            <a:off x="6126480" y="1188720"/>
+            <a:ext cx="2560320" cy="54864"/>
+          </a:xfrm>
+          <a:prstGeom prst="rect">
+            <a:avLst/>
+          </a:prstGeom>
+          <a:solidFill>
+            <a:srgbClr val="2A9D8F"/>
+          </a:solidFill>
+          <a:ln/>
+        </p:spPr>
+      </p:sp>
+      <p:sp>
+        <p:nvSpPr>
+          <p:cNvPr id="15" name="Text 13"/>
+          <p:cNvSpPr/>
+          <p:nvPr/>
+        </p:nvSpPr>
+        <p:spPr>
+          <a:xfrm>
+            <a:off x="6263640" y="1325880"/>
+            <a:ext cx="2286000" cy="365760"/>
+          </a:xfrm>
+          <a:prstGeom prst="rect">
+            <a:avLst/>
+          </a:prstGeom>
+          <a:noFill/>
+          <a:ln/>
+        </p:spPr>
+        <p:txBody>
+          <a:bodyPr wrap="square" rtlCol="0" anchor="ctr"/>
+          <a:lstStyle/>
+          <a:p>
+            <a:pPr indent="0" marL="0">
+              <a:buNone/>
             </a:pPr>
             <a:r>
-              <a:rPr lang="en-US" sz="1500" dirty="0">
+              <a:rPr lang="en-US" sz="1400" b="1" dirty="0">
+                <a:solidFill>
+                  <a:srgbClr val="1B2A4A"/>
+                </a:solidFill>
+                <a:latin typeface="Calibri" pitchFamily="34" charset="0"/>
+                <a:ea typeface="Calibri" pitchFamily="34" charset="-122"/>
+                <a:cs typeface="Calibri" pitchFamily="34" charset="-120"/>
+              </a:rPr>
+              <a:t>Capacity</a:t>
+            </a:r>
+            <a:endParaRPr lang="en-US" sz="1400" dirty="0"/>
+          </a:p>
+        </p:txBody>
+      </p:sp>
+      <p:sp>
+        <p:nvSpPr>
+          <p:cNvPr id="16" name="Text 14"/>
+          <p:cNvSpPr/>
+          <p:nvPr/>
+        </p:nvSpPr>
+        <p:spPr>
+          <a:xfrm>
+            <a:off x="6263640" y="1737360"/>
+            <a:ext cx="2286000" cy="1097280"/>
+          </a:xfrm>
+          <a:prstGeom prst="rect">
+            <a:avLst/>
+          </a:prstGeom>
+          <a:noFill/>
+          <a:ln/>
+        </p:spPr>
+        <p:txBody>
+          <a:bodyPr wrap="square" rtlCol="0" anchor="t"/>
+          <a:lstStyle/>
+          <a:p>
+            <a:pPr indent="0" marL="0">
+              <a:buNone/>
+            </a:pPr>
+            <a:r>
+              <a:rPr lang="en-US" sz="1100" dirty="0">
                 <a:solidFill>
                   <a:srgbClr val="3D3A36"/>
                 </a:solidFill>
@@ -1682,87 +2335,9 @@
                 <a:ea typeface="Calibri" pitchFamily="34" charset="-122"/>
                 <a:cs typeface="Calibri" pitchFamily="34" charset="-120"/>
               </a:rPr>
-              <a:t>Volume = 3D space inside a shape</a:t>
-            </a:r>
-            <a:endParaRPr lang="en-US" sz="1500" dirty="0"/>
-          </a:p>
-          <a:p>
-            <a:pPr marL="342900" indent="-342900">
-              <a:spcAft>
-                <a:spcPts val="800"/>
-              </a:spcAft>
-              <a:buSzPct val="100000"/>
-              <a:buChar char="•"/>
-            </a:pPr>
-            <a:r>
-              <a:rPr lang="en-US" sz="1500" dirty="0">
-                <a:solidFill>
-                  <a:srgbClr val="3D3A36"/>
-                </a:solidFill>
-                <a:latin typeface="Calibri" pitchFamily="34" charset="0"/>
-                <a:ea typeface="Calibri" pitchFamily="34" charset="-122"/>
-                <a:cs typeface="Calibri" pitchFamily="34" charset="-120"/>
-              </a:rPr>
-              <a:t>Cuboid V = l×w×h | Cube V = s³</a:t>
-            </a:r>
-            <a:endParaRPr lang="en-US" sz="1500" dirty="0"/>
-          </a:p>
-          <a:p>
-            <a:pPr marL="342900" indent="-342900">
-              <a:spcAft>
-                <a:spcPts val="800"/>
-              </a:spcAft>
-              <a:buSzPct val="100000"/>
-              <a:buChar char="•"/>
-            </a:pPr>
-            <a:r>
-              <a:rPr lang="en-US" sz="1500" dirty="0">
-                <a:solidFill>
-                  <a:srgbClr val="3D3A36"/>
-                </a:solidFill>
-                <a:latin typeface="Calibri" pitchFamily="34" charset="0"/>
-                <a:ea typeface="Calibri" pitchFamily="34" charset="-122"/>
-                <a:cs typeface="Calibri" pitchFamily="34" charset="-120"/>
-              </a:rPr>
-              <a:t>Capacity: 1 cm³ = 1 mL, 1 L = 1,000 mL</a:t>
-            </a:r>
-            <a:endParaRPr lang="en-US" sz="1500" dirty="0"/>
-          </a:p>
-        </p:txBody>
-      </p:sp>
-      <p:sp>
-        <p:nvSpPr>
-          <p:cNvPr id="5" name="Text 3"/>
-          <p:cNvSpPr/>
-          <p:nvPr/>
-        </p:nvSpPr>
-        <p:spPr>
-          <a:xfrm>
-            <a:off x="548640" y="4800600"/>
-            <a:ext cx="3657600" cy="274320"/>
-          </a:xfrm>
-          <a:prstGeom prst="rect">
-            <a:avLst/>
-          </a:prstGeom>
-          <a:noFill/>
-          <a:ln/>
-        </p:spPr>
-        <p:txBody>
-          <a:bodyPr wrap="square" rtlCol="0" anchor="ctr"/>
-          <a:lstStyle/>
-          <a:p>
-            <a:pPr indent="0" marL="0">
-              <a:buNone/>
-            </a:pPr>
-            <a:r>
-              <a:rPr lang="en-US" sz="800" dirty="0">
-                <a:solidFill>
-                  <a:srgbClr val="9B9690"/>
-                </a:solidFill>
-              </a:rPr>
-              <a:t>mrzocchi.com</a:t>
-            </a:r>
-            <a:endParaRPr lang="en-US" sz="800" dirty="0"/>
+              <a:t>Max a container holds. 1cm³=1mL. 1000cm³=1L. 1m³=1000L. Convert before calculating.</a:t>
+            </a:r>
+            <a:endParaRPr lang="en-US" sz="1100" dirty="0"/>
           </a:p>
         </p:txBody>
       </p:sp>
@@ -1807,13 +2382,13 @@
         <p:spPr>
           <a:xfrm>
             <a:off x="0" y="0"/>
-            <a:ext cx="9144000" cy="54864"/>
-          </a:xfrm>
-          <a:prstGeom prst="rect">
-            <a:avLst/>
-          </a:prstGeom>
-          <a:solidFill>
-            <a:srgbClr val="2A9D8F"/>
+            <a:ext cx="109728" cy="5143500"/>
+          </a:xfrm>
+          <a:prstGeom prst="rect">
+            <a:avLst/>
+          </a:prstGeom>
+          <a:solidFill>
+            <a:srgbClr val="E9C46A"/>
           </a:solidFill>
           <a:ln/>
         </p:spPr>
@@ -1826,8 +2401,8 @@
         </p:nvSpPr>
         <p:spPr>
           <a:xfrm>
-            <a:off x="548640" y="457200"/>
-            <a:ext cx="8046720" cy="640080"/>
+            <a:off x="731520" y="457200"/>
+            <a:ext cx="7772400" cy="731520"/>
           </a:xfrm>
           <a:prstGeom prst="rect">
             <a:avLst/>
@@ -1843,7 +2418,7 @@
               <a:buNone/>
             </a:pPr>
             <a:r>
-              <a:rPr lang="en-US" sz="2800" b="1" dirty="0">
+              <a:rPr lang="en-US" sz="3200" b="1" dirty="0">
                 <a:solidFill>
                   <a:srgbClr val="FFFFFF"/>
                 </a:solidFill>
@@ -1853,7 +2428,7 @@
               </a:rPr>
               <a:t>Key Takeaways</a:t>
             </a:r>
-            <a:endParaRPr lang="en-US" sz="2800" dirty="0"/>
+            <a:endParaRPr lang="en-US" sz="3200" dirty="0"/>
           </a:p>
         </p:txBody>
       </p:sp>
@@ -1865,8 +2440,8 @@
         </p:nvSpPr>
         <p:spPr>
           <a:xfrm>
-            <a:off x="731520" y="1371600"/>
-            <a:ext cx="7680960" cy="3200400"/>
+            <a:off x="731520" y="1463040"/>
+            <a:ext cx="7772400" cy="3200400"/>
           </a:xfrm>
           <a:prstGeom prst="rect">
             <a:avLst/>
@@ -1886,7 +2461,7 @@
               <a:buChar char="•"/>
             </a:pPr>
             <a:r>
-              <a:rPr lang="en-US" sz="1600" dirty="0">
+              <a:rPr lang="en-US" sz="1500" dirty="0">
                 <a:solidFill>
                   <a:srgbClr val="CADCFC"/>
                 </a:solidFill>
@@ -1894,9 +2469,9 @@
                 <a:ea typeface="Calibri" pitchFamily="34" charset="-122"/>
                 <a:cs typeface="Calibri" pitchFamily="34" charset="-120"/>
               </a:rPr>
-              <a:t>Perimeter (cm), Area (cm²), Volume (cm³), Capacity (mL/L)</a:t>
-            </a:r>
-            <a:endParaRPr lang="en-US" sz="1600" dirty="0"/>
+              <a:t>Perimeter = around (units). Area = inside 2D (square units). Volume = inside 3D (cubic units)</a:t>
+            </a:r>
+            <a:endParaRPr lang="en-US" sz="1500" dirty="0"/>
           </a:p>
           <a:p>
             <a:pPr marL="342900" indent="-342900">
@@ -1907,7 +2482,7 @@
               <a:buChar char="•"/>
             </a:pPr>
             <a:r>
-              <a:rPr lang="en-US" sz="1600" dirty="0">
+              <a:rPr lang="en-US" sz="1500" dirty="0">
                 <a:solidFill>
                   <a:srgbClr val="CADCFC"/>
                 </a:solidFill>
@@ -1915,9 +2490,9 @@
                 <a:ea typeface="Calibri" pitchFamily="34" charset="-122"/>
                 <a:cs typeface="Calibri" pitchFamily="34" charset="-120"/>
               </a:rPr>
-              <a:t>Know the formulas for rectangle, triangle, cuboid, cube</a:t>
-            </a:r>
-            <a:endParaRPr lang="en-US" sz="1600" dirty="0"/>
+              <a:t>Rectangle: P=2(l+w), A=l×w. Triangle: A=½bh</a:t>
+            </a:r>
+            <a:endParaRPr lang="en-US" sz="1500" dirty="0"/>
           </a:p>
           <a:p>
             <a:pPr marL="342900" indent="-342900">
@@ -1928,7 +2503,7 @@
               <a:buChar char="•"/>
             </a:pPr>
             <a:r>
-              <a:rPr lang="en-US" sz="1600" dirty="0">
+              <a:rPr lang="en-US" sz="1500" dirty="0">
                 <a:solidFill>
                   <a:srgbClr val="CADCFC"/>
                 </a:solidFill>
@@ -1936,9 +2511,9 @@
                 <a:ea typeface="Calibri" pitchFamily="34" charset="-122"/>
                 <a:cs typeface="Calibri" pitchFamily="34" charset="-120"/>
               </a:rPr>
-              <a:t>Compound shapes: split, calculate parts, add together</a:t>
-            </a:r>
-            <a:endParaRPr lang="en-US" sz="1600" dirty="0"/>
+              <a:t>Cuboid: SA=2lw+2lh+2wh, V=l×w×h</a:t>
+            </a:r>
+            <a:endParaRPr lang="en-US" sz="1500" dirty="0"/>
           </a:p>
           <a:p>
             <a:pPr marL="342900" indent="-342900">
@@ -1949,7 +2524,7 @@
               <a:buChar char="•"/>
             </a:pPr>
             <a:r>
-              <a:rPr lang="en-US" sz="1600" dirty="0">
+              <a:rPr lang="en-US" sz="1500" dirty="0">
                 <a:solidFill>
                   <a:srgbClr val="CADCFC"/>
                 </a:solidFill>
@@ -1957,9 +2532,30 @@
                 <a:ea typeface="Calibri" pitchFamily="34" charset="-122"/>
                 <a:cs typeface="Calibri" pitchFamily="34" charset="-120"/>
               </a:rPr>
-              <a:t>1 cm³ = 1 mL is the key volume↔capacity conversion</a:t>
-            </a:r>
-            <a:endParaRPr lang="en-US" sz="1600" dirty="0"/>
+              <a:t>1 cm³ = 1 mL. 1000 mL = 1 L</a:t>
+            </a:r>
+            <a:endParaRPr lang="en-US" sz="1500" dirty="0"/>
+          </a:p>
+          <a:p>
+            <a:pPr marL="342900" indent="-342900">
+              <a:spcAft>
+                <a:spcPts val="1000"/>
+              </a:spcAft>
+              <a:buSzPct val="100000"/>
+              <a:buChar char="•"/>
+            </a:pPr>
+            <a:r>
+              <a:rPr lang="en-US" sz="1500" dirty="0">
+                <a:solidFill>
+                  <a:srgbClr val="CADCFC"/>
+                </a:solidFill>
+                <a:latin typeface="Calibri" pitchFamily="34" charset="0"/>
+                <a:ea typeface="Calibri" pitchFamily="34" charset="-122"/>
+                <a:cs typeface="Calibri" pitchFamily="34" charset="-120"/>
+              </a:rPr>
+              <a:t>Compound shapes: split, calculate parts, combine</a:t>
+            </a:r>
+            <a:endParaRPr lang="en-US" sz="1500" dirty="0"/>
           </a:p>
         </p:txBody>
       </p:sp>
@@ -1971,8 +2567,8 @@
         </p:nvSpPr>
         <p:spPr>
           <a:xfrm>
-            <a:off x="548640" y="4572000"/>
-            <a:ext cx="3657600" cy="274320"/>
+            <a:off x="731520" y="4572000"/>
+            <a:ext cx="7772400" cy="365760"/>
           </a:xfrm>
           <a:prstGeom prst="rect">
             <a:avLst/>
@@ -1988,14 +2584,17 @@
               <a:buNone/>
             </a:pPr>
             <a:r>
-              <a:rPr lang="en-US" sz="1000" dirty="0">
+              <a:rPr lang="en-US" sz="1100" dirty="0">
                 <a:solidFill>
-                  <a:srgbClr val="6B6660"/>
+                  <a:srgbClr val="E9C46A"/>
                 </a:solidFill>
+                <a:latin typeface="Calibri" pitchFamily="34" charset="0"/>
+                <a:ea typeface="Calibri" pitchFamily="34" charset="-122"/>
+                <a:cs typeface="Calibri" pitchFamily="34" charset="-120"/>
               </a:rPr>
               <a:t>mrzocchi.com</a:t>
             </a:r>
-            <a:endParaRPr lang="en-US" sz="1000" dirty="0"/>
+            <a:endParaRPr lang="en-US" sz="1100" dirty="0"/>
           </a:p>
         </p:txBody>
       </p:sp>

--- a/static/ppts/G6_Math_Full_Revision.pptx
+++ b/static/ppts/G6_Math_Full_Revision.pptx
@@ -9,9 +9,13 @@
     <p:sldId id="257" r:id="rId3"/>
     <p:sldId id="258" r:id="rId4"/>
     <p:sldId id="259" r:id="rId5"/>
+    <p:sldId id="260" r:id="rId6"/>
+    <p:sldId id="261" r:id="rId7"/>
+    <p:sldId id="262" r:id="rId8"/>
+    <p:sldId id="263" r:id="rId9"/>
   </p:sldIdLst>
   <p:notesMasterIdLst>
-    <p:notesMasterId r:id="rId6"/>
+    <p:notesMasterId r:id="rId10"/>
   </p:notesMasterIdLst>
   <p:sldSz cx="9144000" cy="5143500"/>
   <p:notesSz cx="5143500" cy="9144000"/>
@@ -793,6 +797,358 @@
             <a:fld id="{F7021451-1387-4CA6-816F-3879F97B5CBC}" type="slidenum">
               <a:rPr lang="en-US"/>
               <a:t>4</a:t>
+            </a:fld>
+            <a:endParaRPr lang="en-US"/>
+          </a:p>
+        </p:txBody>
+      </p:sp>
+    </p:spTree>
+    <p:extLst>
+      <p:ext uri="{BB962C8B-B14F-4D97-AF65-F5344CB8AC3E}">
+        <p14:creationId xmlns:p14="http://schemas.microsoft.com/office/powerpoint/2010/main" val="1024086991"/>
+      </p:ext>
+    </p:extLst>
+  </p:cSld>
+  <p:clrMapOvr>
+    <a:masterClrMapping/>
+  </p:clrMapOvr>
+</p:notes>
+</file>
+
+<file path=ppt/notesSlides/notesSlide5.xml><?xml version="1.0" encoding="utf-8"?>
+<p:notes xmlns:a="http://schemas.openxmlformats.org/drawingml/2006/main" xmlns:r="http://schemas.openxmlformats.org/officeDocument/2006/relationships" xmlns:p="http://schemas.openxmlformats.org/presentationml/2006/main">
+  <p:cSld>
+    <p:spTree>
+      <p:nvGrpSpPr>
+        <p:cNvPr id="1" name=""/>
+        <p:cNvGrpSpPr/>
+        <p:nvPr/>
+      </p:nvGrpSpPr>
+      <p:grpSpPr>
+        <a:xfrm>
+          <a:off x="0" y="0"/>
+          <a:ext cx="0" cy="0"/>
+          <a:chOff x="0" y="0"/>
+          <a:chExt cx="0" cy="0"/>
+        </a:xfrm>
+      </p:grpSpPr>
+      <p:sp>
+        <p:nvSpPr>
+          <p:cNvPr id="2" name="Slide Image Placeholder 1"/>
+          <p:cNvSpPr>
+            <a:spLocks noGrp="1" noRot="1" noChangeAspect="1"/>
+          </p:cNvSpPr>
+          <p:nvPr>
+            <p:ph type="sldImg"/>
+          </p:nvPr>
+        </p:nvSpPr>
+        <p:spPr/>
+      </p:sp>
+      <p:sp>
+        <p:nvSpPr>
+          <p:cNvPr id="3" name="Notes Placeholder 2"/>
+          <p:cNvSpPr>
+            <a:spLocks noGrp="1"/>
+          </p:cNvSpPr>
+          <p:nvPr>
+            <p:ph type="body" idx="1"/>
+          </p:nvPr>
+        </p:nvSpPr>
+        <p:spPr/>
+        <p:txBody>
+          <a:bodyPr/>
+          <a:lstStyle/>
+          <a:p>
+            <a:r>
+              <a:rPr lang="en-US" dirty="0"/>
+              <a:t/>
+            </a:r>
+            <a:endParaRPr lang="en-US" dirty="0"/>
+          </a:p>
+        </p:txBody>
+      </p:sp>
+      <p:sp>
+        <p:nvSpPr>
+          <p:cNvPr id="4" name="Slide Number Placeholder 3"/>
+          <p:cNvSpPr>
+            <a:spLocks noGrp="1"/>
+          </p:cNvSpPr>
+          <p:nvPr>
+            <p:ph type="sldNum" sz="quarter" idx="10"/>
+          </p:nvPr>
+        </p:nvSpPr>
+        <p:spPr/>
+        <p:txBody>
+          <a:bodyPr/>
+          <a:lstStyle/>
+          <a:p>
+            <a:fld id="{F7021451-1387-4CA6-816F-3879F97B5CBC}" type="slidenum">
+              <a:rPr lang="en-US"/>
+              <a:t>5</a:t>
+            </a:fld>
+            <a:endParaRPr lang="en-US"/>
+          </a:p>
+        </p:txBody>
+      </p:sp>
+    </p:spTree>
+    <p:extLst>
+      <p:ext uri="{BB962C8B-B14F-4D97-AF65-F5344CB8AC3E}">
+        <p14:creationId xmlns:p14="http://schemas.microsoft.com/office/powerpoint/2010/main" val="1024086991"/>
+      </p:ext>
+    </p:extLst>
+  </p:cSld>
+  <p:clrMapOvr>
+    <a:masterClrMapping/>
+  </p:clrMapOvr>
+</p:notes>
+</file>
+
+<file path=ppt/notesSlides/notesSlide6.xml><?xml version="1.0" encoding="utf-8"?>
+<p:notes xmlns:a="http://schemas.openxmlformats.org/drawingml/2006/main" xmlns:r="http://schemas.openxmlformats.org/officeDocument/2006/relationships" xmlns:p="http://schemas.openxmlformats.org/presentationml/2006/main">
+  <p:cSld>
+    <p:spTree>
+      <p:nvGrpSpPr>
+        <p:cNvPr id="1" name=""/>
+        <p:cNvGrpSpPr/>
+        <p:nvPr/>
+      </p:nvGrpSpPr>
+      <p:grpSpPr>
+        <a:xfrm>
+          <a:off x="0" y="0"/>
+          <a:ext cx="0" cy="0"/>
+          <a:chOff x="0" y="0"/>
+          <a:chExt cx="0" cy="0"/>
+        </a:xfrm>
+      </p:grpSpPr>
+      <p:sp>
+        <p:nvSpPr>
+          <p:cNvPr id="2" name="Slide Image Placeholder 1"/>
+          <p:cNvSpPr>
+            <a:spLocks noGrp="1" noRot="1" noChangeAspect="1"/>
+          </p:cNvSpPr>
+          <p:nvPr>
+            <p:ph type="sldImg"/>
+          </p:nvPr>
+        </p:nvSpPr>
+        <p:spPr/>
+      </p:sp>
+      <p:sp>
+        <p:nvSpPr>
+          <p:cNvPr id="3" name="Notes Placeholder 2"/>
+          <p:cNvSpPr>
+            <a:spLocks noGrp="1"/>
+          </p:cNvSpPr>
+          <p:nvPr>
+            <p:ph type="body" idx="1"/>
+          </p:nvPr>
+        </p:nvSpPr>
+        <p:spPr/>
+        <p:txBody>
+          <a:bodyPr/>
+          <a:lstStyle/>
+          <a:p>
+            <a:r>
+              <a:rPr lang="en-US" dirty="0"/>
+              <a:t/>
+            </a:r>
+            <a:endParaRPr lang="en-US" dirty="0"/>
+          </a:p>
+        </p:txBody>
+      </p:sp>
+      <p:sp>
+        <p:nvSpPr>
+          <p:cNvPr id="4" name="Slide Number Placeholder 3"/>
+          <p:cNvSpPr>
+            <a:spLocks noGrp="1"/>
+          </p:cNvSpPr>
+          <p:nvPr>
+            <p:ph type="sldNum" sz="quarter" idx="10"/>
+          </p:nvPr>
+        </p:nvSpPr>
+        <p:spPr/>
+        <p:txBody>
+          <a:bodyPr/>
+          <a:lstStyle/>
+          <a:p>
+            <a:fld id="{F7021451-1387-4CA6-816F-3879F97B5CBC}" type="slidenum">
+              <a:rPr lang="en-US"/>
+              <a:t>6</a:t>
+            </a:fld>
+            <a:endParaRPr lang="en-US"/>
+          </a:p>
+        </p:txBody>
+      </p:sp>
+    </p:spTree>
+    <p:extLst>
+      <p:ext uri="{BB962C8B-B14F-4D97-AF65-F5344CB8AC3E}">
+        <p14:creationId xmlns:p14="http://schemas.microsoft.com/office/powerpoint/2010/main" val="1024086991"/>
+      </p:ext>
+    </p:extLst>
+  </p:cSld>
+  <p:clrMapOvr>
+    <a:masterClrMapping/>
+  </p:clrMapOvr>
+</p:notes>
+</file>
+
+<file path=ppt/notesSlides/notesSlide7.xml><?xml version="1.0" encoding="utf-8"?>
+<p:notes xmlns:a="http://schemas.openxmlformats.org/drawingml/2006/main" xmlns:r="http://schemas.openxmlformats.org/officeDocument/2006/relationships" xmlns:p="http://schemas.openxmlformats.org/presentationml/2006/main">
+  <p:cSld>
+    <p:spTree>
+      <p:nvGrpSpPr>
+        <p:cNvPr id="1" name=""/>
+        <p:cNvGrpSpPr/>
+        <p:nvPr/>
+      </p:nvGrpSpPr>
+      <p:grpSpPr>
+        <a:xfrm>
+          <a:off x="0" y="0"/>
+          <a:ext cx="0" cy="0"/>
+          <a:chOff x="0" y="0"/>
+          <a:chExt cx="0" cy="0"/>
+        </a:xfrm>
+      </p:grpSpPr>
+      <p:sp>
+        <p:nvSpPr>
+          <p:cNvPr id="2" name="Slide Image Placeholder 1"/>
+          <p:cNvSpPr>
+            <a:spLocks noGrp="1" noRot="1" noChangeAspect="1"/>
+          </p:cNvSpPr>
+          <p:nvPr>
+            <p:ph type="sldImg"/>
+          </p:nvPr>
+        </p:nvSpPr>
+        <p:spPr/>
+      </p:sp>
+      <p:sp>
+        <p:nvSpPr>
+          <p:cNvPr id="3" name="Notes Placeholder 2"/>
+          <p:cNvSpPr>
+            <a:spLocks noGrp="1"/>
+          </p:cNvSpPr>
+          <p:nvPr>
+            <p:ph type="body" idx="1"/>
+          </p:nvPr>
+        </p:nvSpPr>
+        <p:spPr/>
+        <p:txBody>
+          <a:bodyPr/>
+          <a:lstStyle/>
+          <a:p>
+            <a:r>
+              <a:rPr lang="en-US" dirty="0"/>
+              <a:t/>
+            </a:r>
+            <a:endParaRPr lang="en-US" dirty="0"/>
+          </a:p>
+        </p:txBody>
+      </p:sp>
+      <p:sp>
+        <p:nvSpPr>
+          <p:cNvPr id="4" name="Slide Number Placeholder 3"/>
+          <p:cNvSpPr>
+            <a:spLocks noGrp="1"/>
+          </p:cNvSpPr>
+          <p:nvPr>
+            <p:ph type="sldNum" sz="quarter" idx="10"/>
+          </p:nvPr>
+        </p:nvSpPr>
+        <p:spPr/>
+        <p:txBody>
+          <a:bodyPr/>
+          <a:lstStyle/>
+          <a:p>
+            <a:fld id="{F7021451-1387-4CA6-816F-3879F97B5CBC}" type="slidenum">
+              <a:rPr lang="en-US"/>
+              <a:t>7</a:t>
+            </a:fld>
+            <a:endParaRPr lang="en-US"/>
+          </a:p>
+        </p:txBody>
+      </p:sp>
+    </p:spTree>
+    <p:extLst>
+      <p:ext uri="{BB962C8B-B14F-4D97-AF65-F5344CB8AC3E}">
+        <p14:creationId xmlns:p14="http://schemas.microsoft.com/office/powerpoint/2010/main" val="1024086991"/>
+      </p:ext>
+    </p:extLst>
+  </p:cSld>
+  <p:clrMapOvr>
+    <a:masterClrMapping/>
+  </p:clrMapOvr>
+</p:notes>
+</file>
+
+<file path=ppt/notesSlides/notesSlide8.xml><?xml version="1.0" encoding="utf-8"?>
+<p:notes xmlns:a="http://schemas.openxmlformats.org/drawingml/2006/main" xmlns:r="http://schemas.openxmlformats.org/officeDocument/2006/relationships" xmlns:p="http://schemas.openxmlformats.org/presentationml/2006/main">
+  <p:cSld>
+    <p:spTree>
+      <p:nvGrpSpPr>
+        <p:cNvPr id="1" name=""/>
+        <p:cNvGrpSpPr/>
+        <p:nvPr/>
+      </p:nvGrpSpPr>
+      <p:grpSpPr>
+        <a:xfrm>
+          <a:off x="0" y="0"/>
+          <a:ext cx="0" cy="0"/>
+          <a:chOff x="0" y="0"/>
+          <a:chExt cx="0" cy="0"/>
+        </a:xfrm>
+      </p:grpSpPr>
+      <p:sp>
+        <p:nvSpPr>
+          <p:cNvPr id="2" name="Slide Image Placeholder 1"/>
+          <p:cNvSpPr>
+            <a:spLocks noGrp="1" noRot="1" noChangeAspect="1"/>
+          </p:cNvSpPr>
+          <p:nvPr>
+            <p:ph type="sldImg"/>
+          </p:nvPr>
+        </p:nvSpPr>
+        <p:spPr/>
+      </p:sp>
+      <p:sp>
+        <p:nvSpPr>
+          <p:cNvPr id="3" name="Notes Placeholder 2"/>
+          <p:cNvSpPr>
+            <a:spLocks noGrp="1"/>
+          </p:cNvSpPr>
+          <p:nvPr>
+            <p:ph type="body" idx="1"/>
+          </p:nvPr>
+        </p:nvSpPr>
+        <p:spPr/>
+        <p:txBody>
+          <a:bodyPr/>
+          <a:lstStyle/>
+          <a:p>
+            <a:r>
+              <a:rPr lang="en-US" dirty="0"/>
+              <a:t/>
+            </a:r>
+            <a:endParaRPr lang="en-US" dirty="0"/>
+          </a:p>
+        </p:txBody>
+      </p:sp>
+      <p:sp>
+        <p:nvSpPr>
+          <p:cNvPr id="4" name="Slide Number Placeholder 3"/>
+          <p:cNvSpPr>
+            <a:spLocks noGrp="1"/>
+          </p:cNvSpPr>
+          <p:nvPr>
+            <p:ph type="sldNum" sz="quarter" idx="10"/>
+          </p:nvPr>
+        </p:nvSpPr>
+        <p:spPr/>
+        <p:txBody>
+          <a:bodyPr/>
+          <a:lstStyle/>
+          <a:p>
+            <a:fld id="{F7021451-1387-4CA6-816F-3879F97B5CBC}" type="slidenum">
+              <a:rPr lang="en-US"/>
+              <a:t>8</a:t>
             </a:fld>
             <a:endParaRPr lang="en-US"/>
           </a:p>
@@ -1121,13 +1477,6 @@
 <file path=ppt/slides/slide1.xml><?xml version="1.0" encoding="utf-8"?>
 <p:sld xmlns:a="http://schemas.openxmlformats.org/drawingml/2006/main" xmlns:r="http://schemas.openxmlformats.org/officeDocument/2006/relationships" xmlns:p="http://schemas.openxmlformats.org/presentationml/2006/main">
   <p:cSld name="Slide 1">
-    <p:bg>
-      <p:bgPr>
-        <a:solidFill>
-          <a:srgbClr val="1B2A4A"/>
-        </a:solidFill>
-      </p:bgPr>
-    </p:bg>
     <p:spTree>
       <p:nvGrpSpPr>
         <p:cNvPr id="1" name=""/>
@@ -1151,7 +1500,27 @@
         <p:spPr>
           <a:xfrm>
             <a:off x="0" y="0"/>
-            <a:ext cx="109728" cy="5143500"/>
+            <a:ext cx="9144000" cy="5143500"/>
+          </a:xfrm>
+          <a:prstGeom prst="rect">
+            <a:avLst/>
+          </a:prstGeom>
+          <a:solidFill>
+            <a:srgbClr val="1B2A4A"/>
+          </a:solidFill>
+          <a:ln/>
+        </p:spPr>
+      </p:sp>
+      <p:sp>
+        <p:nvSpPr>
+          <p:cNvPr id="3" name="Shape 1"/>
+          <p:cNvSpPr/>
+          <p:nvPr/>
+        </p:nvSpPr>
+        <p:spPr>
+          <a:xfrm>
+            <a:off x="0" y="4777740"/>
+            <a:ext cx="9144000" cy="365760"/>
           </a:xfrm>
           <a:prstGeom prst="rect">
             <a:avLst/>
@@ -1164,14 +1533,14 @@
       </p:sp>
       <p:sp>
         <p:nvSpPr>
-          <p:cNvPr id="3" name="Text 1"/>
+          <p:cNvPr id="4" name="Text 2"/>
           <p:cNvSpPr/>
           <p:nvPr/>
         </p:nvSpPr>
         <p:spPr>
           <a:xfrm>
             <a:off x="731520" y="1097280"/>
-            <a:ext cx="7772400" cy="1371600"/>
+            <a:ext cx="7680960" cy="457200"/>
           </a:xfrm>
           <a:prstGeom prst="rect">
             <a:avLst/>
@@ -1187,6 +1556,45 @@
               <a:buNone/>
             </a:pPr>
             <a:r>
+              <a:rPr lang="en-US" sz="1400" b="1" spc="400" kern="0" dirty="0">
+                <a:solidFill>
+                  <a:srgbClr val="2A9D8F"/>
+                </a:solidFill>
+                <a:latin typeface="Calibri" pitchFamily="34" charset="0"/>
+                <a:ea typeface="Calibri" pitchFamily="34" charset="-122"/>
+                <a:cs typeface="Calibri" pitchFamily="34" charset="-120"/>
+              </a:rPr>
+              <a:t>GRADE 6 MATHEMATICS</a:t>
+            </a:r>
+            <a:endParaRPr lang="en-US" sz="1400" dirty="0"/>
+          </a:p>
+        </p:txBody>
+      </p:sp>
+      <p:sp>
+        <p:nvSpPr>
+          <p:cNvPr id="5" name="Text 3"/>
+          <p:cNvSpPr/>
+          <p:nvPr/>
+        </p:nvSpPr>
+        <p:spPr>
+          <a:xfrm>
+            <a:off x="731520" y="1645920"/>
+            <a:ext cx="7680960" cy="1463040"/>
+          </a:xfrm>
+          <a:prstGeom prst="rect">
+            <a:avLst/>
+          </a:prstGeom>
+          <a:noFill/>
+          <a:ln/>
+        </p:spPr>
+        <p:txBody>
+          <a:bodyPr wrap="square" rtlCol="0" anchor="t"/>
+          <a:lstStyle/>
+          <a:p>
+            <a:pPr indent="0" marL="0">
+              <a:buNone/>
+            </a:pPr>
+            <a:r>
               <a:rPr lang="en-US" sz="4000" b="1" dirty="0">
                 <a:solidFill>
                   <a:srgbClr val="FFFFFF"/>
@@ -1195,7 +1603,24 @@
                 <a:ea typeface="Georgia" pitchFamily="34" charset="-122"/>
                 <a:cs typeface="Georgia" pitchFamily="34" charset="-120"/>
               </a:rPr>
-              <a:t>Geometry — Full Revision</a:t>
+              <a:t>Geometry</a:t>
+            </a:r>
+            <a:endParaRPr lang="en-US" sz="4000" dirty="0"/>
+          </a:p>
+          <a:p>
+            <a:pPr indent="0" marL="0">
+              <a:buNone/>
+            </a:pPr>
+            <a:r>
+              <a:rPr lang="en-US" sz="4000" b="1" dirty="0">
+                <a:solidFill>
+                  <a:srgbClr val="FFFFFF"/>
+                </a:solidFill>
+                <a:latin typeface="Georgia" pitchFamily="34" charset="0"/>
+                <a:ea typeface="Georgia" pitchFamily="34" charset="-122"/>
+                <a:cs typeface="Georgia" pitchFamily="34" charset="-120"/>
+              </a:rPr>
+              <a:t>Full Revision</a:t>
             </a:r>
             <a:endParaRPr lang="en-US" sz="4000" dirty="0"/>
           </a:p>
@@ -1203,14 +1628,14 @@
       </p:sp>
       <p:sp>
         <p:nvSpPr>
-          <p:cNvPr id="4" name="Text 2"/>
+          <p:cNvPr id="6" name="Text 4"/>
           <p:cNvSpPr/>
           <p:nvPr/>
         </p:nvSpPr>
         <p:spPr>
           <a:xfrm>
-            <a:off x="731520" y="2560320"/>
-            <a:ext cx="7772400" cy="548640"/>
+            <a:off x="731520" y="3200400"/>
+            <a:ext cx="7680960" cy="548640"/>
           </a:xfrm>
           <a:prstGeom prst="rect">
             <a:avLst/>
@@ -1226,15 +1651,15 @@
               <a:buNone/>
             </a:pPr>
             <a:r>
-              <a:rPr lang="en-US" sz="1600" dirty="0">
+              <a:rPr lang="en-US" sz="1600" i="1" dirty="0">
                 <a:solidFill>
-                  <a:srgbClr val="E9C46A"/>
+                  <a:srgbClr val="9B9690"/>
                 </a:solidFill>
                 <a:latin typeface="Calibri" pitchFamily="34" charset="0"/>
                 <a:ea typeface="Calibri" pitchFamily="34" charset="-122"/>
                 <a:cs typeface="Calibri" pitchFamily="34" charset="-120"/>
               </a:rPr>
-              <a:t>Grade 6 Mathematics · Mr Zocchi</a:t>
+              <a:t>Perimeter, Area, Surface Area, Volume &amp; Capacity</a:t>
             </a:r>
             <a:endParaRPr lang="en-US" sz="1600" dirty="0"/>
           </a:p>
@@ -1242,166 +1667,14 @@
       </p:sp>
       <p:sp>
         <p:nvSpPr>
-          <p:cNvPr id="5" name="Shape 3"/>
+          <p:cNvPr id="7" name="Text 5"/>
           <p:cNvSpPr/>
           <p:nvPr/>
         </p:nvSpPr>
         <p:spPr>
           <a:xfrm>
-            <a:off x="731520" y="3474720"/>
-            <a:ext cx="2011680" cy="411480"/>
-          </a:xfrm>
-          <a:prstGeom prst="roundRect">
-            <a:avLst>
-              <a:gd name="adj" fmla="val 17778"/>
-            </a:avLst>
-          </a:prstGeom>
-          <a:solidFill>
-            <a:srgbClr val="2A9D8F"/>
-          </a:solidFill>
-          <a:ln/>
-        </p:spPr>
-      </p:sp>
-      <p:sp>
-        <p:nvSpPr>
-          <p:cNvPr id="6" name="Text 4"/>
-          <p:cNvSpPr/>
-          <p:nvPr/>
-        </p:nvSpPr>
-        <p:spPr>
-          <a:xfrm>
-            <a:off x="731520" y="3474720"/>
-            <a:ext cx="2011680" cy="411480"/>
-          </a:xfrm>
-          <a:prstGeom prst="rect">
-            <a:avLst/>
-          </a:prstGeom>
-          <a:noFill/>
-          <a:ln/>
-        </p:spPr>
-        <p:txBody>
-          <a:bodyPr wrap="square" rtlCol="0" anchor="ctr"/>
-          <a:lstStyle/>
-          <a:p>
-            <a:pPr algn="ctr" indent="0" marL="0">
-              <a:buNone/>
-            </a:pPr>
-            <a:r>
-              <a:rPr lang="en-US" sz="1200" b="1" dirty="0">
-                <a:solidFill>
-                  <a:srgbClr val="FFFFFF"/>
-                </a:solidFill>
-                <a:latin typeface="Calibri" pitchFamily="34" charset="0"/>
-                <a:ea typeface="Calibri" pitchFamily="34" charset="-122"/>
-                <a:cs typeface="Calibri" pitchFamily="34" charset="-120"/>
-              </a:rPr>
-              <a:t>Term 3 · Geometry</a:t>
-            </a:r>
-            <a:endParaRPr lang="en-US" sz="1200" dirty="0"/>
-          </a:p>
-        </p:txBody>
-      </p:sp>
-    </p:spTree>
-  </p:cSld>
-  <p:clrMapOvr>
-    <a:masterClrMapping/>
-  </p:clrMapOvr>
-</p:sld>
-</file>
-
-<file path=ppt/slides/slide2.xml><?xml version="1.0" encoding="utf-8"?>
-<p:sld xmlns:a="http://schemas.openxmlformats.org/drawingml/2006/main" xmlns:r="http://schemas.openxmlformats.org/officeDocument/2006/relationships" xmlns:p="http://schemas.openxmlformats.org/presentationml/2006/main">
-  <p:cSld name="Slide 2">
-    <p:bg>
-      <p:bgPr>
-        <a:solidFill>
-          <a:srgbClr val="FAF8F5"/>
-        </a:solidFill>
-      </p:bgPr>
-    </p:bg>
-    <p:spTree>
-      <p:nvGrpSpPr>
-        <p:cNvPr id="1" name=""/>
-        <p:cNvGrpSpPr/>
-        <p:nvPr/>
-      </p:nvGrpSpPr>
-      <p:grpSpPr>
-        <a:xfrm>
-          <a:off x="0" y="0"/>
-          <a:ext cx="0" cy="0"/>
-          <a:chOff x="0" y="0"/>
-          <a:chExt cx="0" cy="0"/>
-        </a:xfrm>
-      </p:grpSpPr>
-      <p:sp>
-        <p:nvSpPr>
-          <p:cNvPr id="2" name="Shape 0"/>
-          <p:cNvSpPr/>
-          <p:nvPr/>
-        </p:nvSpPr>
-        <p:spPr>
-          <a:xfrm>
-            <a:off x="0" y="0"/>
-            <a:ext cx="9144000" cy="54864"/>
-          </a:xfrm>
-          <a:prstGeom prst="rect">
-            <a:avLst/>
-          </a:prstGeom>
-          <a:solidFill>
-            <a:srgbClr val="2A9D8F"/>
-          </a:solidFill>
-          <a:ln/>
-        </p:spPr>
-      </p:sp>
-      <p:sp>
-        <p:nvSpPr>
-          <p:cNvPr id="3" name="Text 1"/>
-          <p:cNvSpPr/>
-          <p:nvPr/>
-        </p:nvSpPr>
-        <p:spPr>
-          <a:xfrm>
-            <a:off x="7772400" y="4709160"/>
-            <a:ext cx="1097280" cy="320040"/>
-          </a:xfrm>
-          <a:prstGeom prst="rect">
-            <a:avLst/>
-          </a:prstGeom>
-          <a:noFill/>
-          <a:ln/>
-        </p:spPr>
-        <p:txBody>
-          <a:bodyPr wrap="square" rtlCol="0" anchor="ctr"/>
-          <a:lstStyle/>
-          <a:p>
-            <a:pPr algn="r" indent="0" marL="0">
-              <a:buNone/>
-            </a:pPr>
-            <a:r>
-              <a:rPr lang="en-US" sz="900" dirty="0">
-                <a:solidFill>
-                  <a:srgbClr val="6B6660"/>
-                </a:solidFill>
-                <a:latin typeface="Calibri" pitchFamily="34" charset="0"/>
-                <a:ea typeface="Calibri" pitchFamily="34" charset="-122"/>
-                <a:cs typeface="Calibri" pitchFamily="34" charset="-120"/>
-              </a:rPr>
-              <a:t>2 / 4</a:t>
-            </a:r>
-            <a:endParaRPr lang="en-US" sz="900" dirty="0"/>
-          </a:p>
-        </p:txBody>
-      </p:sp>
-      <p:sp>
-        <p:nvSpPr>
-          <p:cNvPr id="4" name="Text 2"/>
-          <p:cNvSpPr/>
-          <p:nvPr/>
-        </p:nvSpPr>
-        <p:spPr>
-          <a:xfrm>
-            <a:off x="457200" y="274320"/>
-            <a:ext cx="8229600" cy="640080"/>
+            <a:off x="731520" y="4206240"/>
+            <a:ext cx="3657600" cy="365760"/>
           </a:xfrm>
           <a:prstGeom prst="rect">
             <a:avLst/>
@@ -1417,82 +1690,75 @@
               <a:buNone/>
             </a:pPr>
             <a:r>
-              <a:rPr lang="en-US" sz="2600" b="1" dirty="0">
+              <a:rPr lang="en-US" sz="1200" dirty="0">
                 <a:solidFill>
-                  <a:srgbClr val="1B2A4A"/>
+                  <a:srgbClr val="6B6660"/>
                 </a:solidFill>
-                <a:latin typeface="Georgia" pitchFamily="34" charset="0"/>
-                <a:ea typeface="Georgia" pitchFamily="34" charset="-122"/>
-                <a:cs typeface="Georgia" pitchFamily="34" charset="-120"/>
+                <a:latin typeface="Calibri" pitchFamily="34" charset="0"/>
+                <a:ea typeface="Calibri" pitchFamily="34" charset="-122"/>
+                <a:cs typeface="Calibri" pitchFamily="34" charset="-120"/>
               </a:rPr>
-              <a:t>2D Measurement</a:t>
+              <a:t>Mr Zocchi</a:t>
             </a:r>
-            <a:endParaRPr lang="en-US" sz="2600" dirty="0"/>
+            <a:endParaRPr lang="en-US" sz="1200" dirty="0"/>
           </a:p>
         </p:txBody>
       </p:sp>
-      <p:sp>
-        <p:nvSpPr>
-          <p:cNvPr id="5" name="Shape 3"/>
+    </p:spTree>
+  </p:cSld>
+  <p:clrMapOvr>
+    <a:masterClrMapping/>
+  </p:clrMapOvr>
+</p:sld>
+</file>
+
+<file path=ppt/slides/slide2.xml><?xml version="1.0" encoding="utf-8"?>
+<p:sld xmlns:a="http://schemas.openxmlformats.org/drawingml/2006/main" xmlns:r="http://schemas.openxmlformats.org/officeDocument/2006/relationships" xmlns:p="http://schemas.openxmlformats.org/presentationml/2006/main">
+  <p:cSld name="Slide 2">
+    <p:spTree>
+      <p:nvGrpSpPr>
+        <p:cNvPr id="1" name=""/>
+        <p:cNvGrpSpPr/>
+        <p:nvPr/>
+      </p:nvGrpSpPr>
+      <p:grpSpPr>
+        <a:xfrm>
+          <a:off x="0" y="0"/>
+          <a:ext cx="0" cy="0"/>
+          <a:chOff x="0" y="0"/>
+          <a:chExt cx="0" cy="0"/>
+        </a:xfrm>
+      </p:grpSpPr>
+      <p:sp>
+        <p:nvSpPr>
+          <p:cNvPr id="2" name="Shape 0"/>
           <p:cNvSpPr/>
           <p:nvPr/>
         </p:nvSpPr>
         <p:spPr>
           <a:xfrm>
-            <a:off x="457200" y="1188720"/>
-            <a:ext cx="2560320" cy="1828800"/>
+            <a:off x="0" y="0"/>
+            <a:ext cx="9144000" cy="5143500"/>
           </a:xfrm>
           <a:prstGeom prst="rect">
             <a:avLst/>
           </a:prstGeom>
           <a:solidFill>
-            <a:srgbClr val="FFFFFF"/>
-          </a:solidFill>
-          <a:ln w="12700">
-            <a:solidFill>
-              <a:srgbClr val="E5E2DC"/>
-            </a:solidFill>
-            <a:prstDash val="solid"/>
-          </a:ln>
-          <a:effectLst>
-            <a:outerShdw sx="100000" sy="100000" kx="0" ky="0" algn="bl" rotWithShape="0" blurRad="50800" dist="25400" dir="8100000">
-              <a:srgbClr val="000000">
-                <a:alpha val="10000"/>
-              </a:srgbClr>
-            </a:outerShdw>
-          </a:effectLst>
-        </p:spPr>
-      </p:sp>
-      <p:sp>
-        <p:nvSpPr>
-          <p:cNvPr id="6" name="Shape 4"/>
-          <p:cNvSpPr/>
-          <p:nvPr/>
-        </p:nvSpPr>
-        <p:spPr>
-          <a:xfrm>
-            <a:off x="457200" y="1188720"/>
-            <a:ext cx="2560320" cy="54864"/>
-          </a:xfrm>
-          <a:prstGeom prst="rect">
-            <a:avLst/>
-          </a:prstGeom>
-          <a:solidFill>
-            <a:srgbClr val="2A9D8F"/>
+            <a:srgbClr val="111D35"/>
           </a:solidFill>
           <a:ln/>
         </p:spPr>
       </p:sp>
       <p:sp>
         <p:nvSpPr>
-          <p:cNvPr id="7" name="Text 5"/>
+          <p:cNvPr id="3" name="Text 1"/>
           <p:cNvSpPr/>
           <p:nvPr/>
         </p:nvSpPr>
         <p:spPr>
           <a:xfrm>
-            <a:off x="594360" y="1325880"/>
-            <a:ext cx="2286000" cy="365760"/>
+            <a:off x="731520" y="914400"/>
+            <a:ext cx="1828800" cy="1097280"/>
           </a:xfrm>
           <a:prstGeom prst="rect">
             <a:avLst/>
@@ -1508,121 +1774,32 @@
               <a:buNone/>
             </a:pPr>
             <a:r>
-              <a:rPr lang="en-US" sz="1400" b="1" dirty="0">
+              <a:rPr lang="en-US" sz="7200" b="1" dirty="0">
                 <a:solidFill>
-                  <a:srgbClr val="1B2A4A"/>
+                  <a:srgbClr val="2A9D8F">
+                    <a:alpha val="70000"/>
+                  </a:srgbClr>
                 </a:solidFill>
-                <a:latin typeface="Calibri" pitchFamily="34" charset="0"/>
-                <a:ea typeface="Calibri" pitchFamily="34" charset="-122"/>
-                <a:cs typeface="Calibri" pitchFamily="34" charset="-120"/>
+                <a:latin typeface="Georgia" pitchFamily="34" charset="0"/>
+                <a:ea typeface="Georgia" pitchFamily="34" charset="-122"/>
+                <a:cs typeface="Georgia" pitchFamily="34" charset="-120"/>
               </a:rPr>
-              <a:t>Perimeter</a:t>
+              <a:t>01</a:t>
             </a:r>
-            <a:endParaRPr lang="en-US" sz="1400" dirty="0"/>
+            <a:endParaRPr lang="en-US" sz="7200" dirty="0"/>
           </a:p>
         </p:txBody>
       </p:sp>
       <p:sp>
         <p:nvSpPr>
-          <p:cNvPr id="8" name="Text 6"/>
+          <p:cNvPr id="4" name="Text 2"/>
           <p:cNvSpPr/>
           <p:nvPr/>
         </p:nvSpPr>
         <p:spPr>
           <a:xfrm>
-            <a:off x="594360" y="1737360"/>
-            <a:ext cx="2286000" cy="1097280"/>
-          </a:xfrm>
-          <a:prstGeom prst="rect">
-            <a:avLst/>
-          </a:prstGeom>
-          <a:noFill/>
-          <a:ln/>
-        </p:spPr>
-        <p:txBody>
-          <a:bodyPr wrap="square" rtlCol="0" anchor="t"/>
-          <a:lstStyle/>
-          <a:p>
-            <a:pPr indent="0" marL="0">
-              <a:buNone/>
-            </a:pPr>
-            <a:r>
-              <a:rPr lang="en-US" sz="1100" dirty="0">
-                <a:solidFill>
-                  <a:srgbClr val="3D3A36"/>
-                </a:solidFill>
-                <a:latin typeface="Calibri" pitchFamily="34" charset="0"/>
-                <a:ea typeface="Calibri" pitchFamily="34" charset="-122"/>
-                <a:cs typeface="Calibri" pitchFamily="34" charset="-120"/>
-              </a:rPr>
-              <a:t>Distance around a shape. Rectangle: P=2(l+w). Square: P=4s. Add all sides for irregular shapes.</a:t>
-            </a:r>
-            <a:endParaRPr lang="en-US" sz="1100" dirty="0"/>
-          </a:p>
-        </p:txBody>
-      </p:sp>
-      <p:sp>
-        <p:nvSpPr>
-          <p:cNvPr id="9" name="Shape 7"/>
-          <p:cNvSpPr/>
-          <p:nvPr/>
-        </p:nvSpPr>
-        <p:spPr>
-          <a:xfrm>
-            <a:off x="3291840" y="1188720"/>
-            <a:ext cx="2560320" cy="1828800"/>
-          </a:xfrm>
-          <a:prstGeom prst="rect">
-            <a:avLst/>
-          </a:prstGeom>
-          <a:solidFill>
-            <a:srgbClr val="FFFFFF"/>
-          </a:solidFill>
-          <a:ln w="12700">
-            <a:solidFill>
-              <a:srgbClr val="E5E2DC"/>
-            </a:solidFill>
-            <a:prstDash val="solid"/>
-          </a:ln>
-          <a:effectLst>
-            <a:outerShdw sx="100000" sy="100000" kx="0" ky="0" algn="bl" rotWithShape="0" blurRad="50800" dist="25400" dir="8100000">
-              <a:srgbClr val="000000">
-                <a:alpha val="10000"/>
-              </a:srgbClr>
-            </a:outerShdw>
-          </a:effectLst>
-        </p:spPr>
-      </p:sp>
-      <p:sp>
-        <p:nvSpPr>
-          <p:cNvPr id="10" name="Shape 8"/>
-          <p:cNvSpPr/>
-          <p:nvPr/>
-        </p:nvSpPr>
-        <p:spPr>
-          <a:xfrm>
-            <a:off x="3291840" y="1188720"/>
-            <a:ext cx="2560320" cy="54864"/>
-          </a:xfrm>
-          <a:prstGeom prst="rect">
-            <a:avLst/>
-          </a:prstGeom>
-          <a:solidFill>
-            <a:srgbClr val="2A9D8F"/>
-          </a:solidFill>
-          <a:ln/>
-        </p:spPr>
-      </p:sp>
-      <p:sp>
-        <p:nvSpPr>
-          <p:cNvPr id="11" name="Text 9"/>
-          <p:cNvSpPr/>
-          <p:nvPr/>
-        </p:nvSpPr>
-        <p:spPr>
-          <a:xfrm>
-            <a:off x="3429000" y="1325880"/>
-            <a:ext cx="2286000" cy="365760"/>
+            <a:off x="731520" y="2011680"/>
+            <a:ext cx="7680960" cy="1097280"/>
           </a:xfrm>
           <a:prstGeom prst="rect">
             <a:avLst/>
@@ -1638,101 +1815,30 @@
               <a:buNone/>
             </a:pPr>
             <a:r>
-              <a:rPr lang="en-US" sz="1400" b="1" dirty="0">
+              <a:rPr lang="en-US" sz="3200" b="1" dirty="0">
                 <a:solidFill>
-                  <a:srgbClr val="1B2A4A"/>
+                  <a:srgbClr val="FFFFFF"/>
                 </a:solidFill>
-                <a:latin typeface="Calibri" pitchFamily="34" charset="0"/>
-                <a:ea typeface="Calibri" pitchFamily="34" charset="-122"/>
-                <a:cs typeface="Calibri" pitchFamily="34" charset="-120"/>
+                <a:latin typeface="Georgia" pitchFamily="34" charset="0"/>
+                <a:ea typeface="Georgia" pitchFamily="34" charset="-122"/>
+                <a:cs typeface="Georgia" pitchFamily="34" charset="-120"/>
               </a:rPr>
-              <a:t>Area</a:t>
+              <a:t>Perimeter</a:t>
             </a:r>
-            <a:endParaRPr lang="en-US" sz="1400" dirty="0"/>
+            <a:endParaRPr lang="en-US" sz="3200" dirty="0"/>
           </a:p>
         </p:txBody>
       </p:sp>
       <p:sp>
         <p:nvSpPr>
-          <p:cNvPr id="12" name="Text 10"/>
+          <p:cNvPr id="5" name="Shape 3"/>
           <p:cNvSpPr/>
           <p:nvPr/>
         </p:nvSpPr>
         <p:spPr>
           <a:xfrm>
-            <a:off x="3429000" y="1737360"/>
-            <a:ext cx="2286000" cy="1097280"/>
-          </a:xfrm>
-          <a:prstGeom prst="rect">
-            <a:avLst/>
-          </a:prstGeom>
-          <a:noFill/>
-          <a:ln/>
-        </p:spPr>
-        <p:txBody>
-          <a:bodyPr wrap="square" rtlCol="0" anchor="t"/>
-          <a:lstStyle/>
-          <a:p>
-            <a:pPr indent="0" marL="0">
-              <a:buNone/>
-            </a:pPr>
-            <a:r>
-              <a:rPr lang="en-US" sz="1100" dirty="0">
-                <a:solidFill>
-                  <a:srgbClr val="3D3A36"/>
-                </a:solidFill>
-                <a:latin typeface="Calibri" pitchFamily="34" charset="0"/>
-                <a:ea typeface="Calibri" pitchFamily="34" charset="-122"/>
-                <a:cs typeface="Calibri" pitchFamily="34" charset="-120"/>
-              </a:rPr>
-              <a:t>Space inside a 2D shape. Rectangle: A=l×w. Triangle: A=½bh. Parallelogram: A=bh. Square units.</a:t>
-            </a:r>
-            <a:endParaRPr lang="en-US" sz="1100" dirty="0"/>
-          </a:p>
-        </p:txBody>
-      </p:sp>
-      <p:sp>
-        <p:nvSpPr>
-          <p:cNvPr id="13" name="Shape 11"/>
-          <p:cNvSpPr/>
-          <p:nvPr/>
-        </p:nvSpPr>
-        <p:spPr>
-          <a:xfrm>
-            <a:off x="6126480" y="1188720"/>
-            <a:ext cx="2560320" cy="1828800"/>
-          </a:xfrm>
-          <a:prstGeom prst="rect">
-            <a:avLst/>
-          </a:prstGeom>
-          <a:solidFill>
-            <a:srgbClr val="FFFFFF"/>
-          </a:solidFill>
-          <a:ln w="12700">
-            <a:solidFill>
-              <a:srgbClr val="E5E2DC"/>
-            </a:solidFill>
-            <a:prstDash val="solid"/>
-          </a:ln>
-          <a:effectLst>
-            <a:outerShdw sx="100000" sy="100000" kx="0" ky="0" algn="bl" rotWithShape="0" blurRad="50800" dist="25400" dir="8100000">
-              <a:srgbClr val="000000">
-                <a:alpha val="10000"/>
-              </a:srgbClr>
-            </a:outerShdw>
-          </a:effectLst>
-        </p:spPr>
-      </p:sp>
-      <p:sp>
-        <p:nvSpPr>
-          <p:cNvPr id="14" name="Shape 12"/>
-          <p:cNvSpPr/>
-          <p:nvPr/>
-        </p:nvSpPr>
-        <p:spPr>
-          <a:xfrm>
-            <a:off x="6126480" y="1188720"/>
-            <a:ext cx="2560320" cy="54864"/>
+            <a:off x="731520" y="3200400"/>
+            <a:ext cx="1828800" cy="54864"/>
           </a:xfrm>
           <a:prstGeom prst="rect">
             <a:avLst/>
@@ -1742,84 +1848,6 @@
           </a:solidFill>
           <a:ln/>
         </p:spPr>
-      </p:sp>
-      <p:sp>
-        <p:nvSpPr>
-          <p:cNvPr id="15" name="Text 13"/>
-          <p:cNvSpPr/>
-          <p:nvPr/>
-        </p:nvSpPr>
-        <p:spPr>
-          <a:xfrm>
-            <a:off x="6263640" y="1325880"/>
-            <a:ext cx="2286000" cy="365760"/>
-          </a:xfrm>
-          <a:prstGeom prst="rect">
-            <a:avLst/>
-          </a:prstGeom>
-          <a:noFill/>
-          <a:ln/>
-        </p:spPr>
-        <p:txBody>
-          <a:bodyPr wrap="square" rtlCol="0" anchor="ctr"/>
-          <a:lstStyle/>
-          <a:p>
-            <a:pPr indent="0" marL="0">
-              <a:buNone/>
-            </a:pPr>
-            <a:r>
-              <a:rPr lang="en-US" sz="1400" b="1" dirty="0">
-                <a:solidFill>
-                  <a:srgbClr val="1B2A4A"/>
-                </a:solidFill>
-                <a:latin typeface="Calibri" pitchFamily="34" charset="0"/>
-                <a:ea typeface="Calibri" pitchFamily="34" charset="-122"/>
-                <a:cs typeface="Calibri" pitchFamily="34" charset="-120"/>
-              </a:rPr>
-              <a:t>Compound Shapes</a:t>
-            </a:r>
-            <a:endParaRPr lang="en-US" sz="1400" dirty="0"/>
-          </a:p>
-        </p:txBody>
-      </p:sp>
-      <p:sp>
-        <p:nvSpPr>
-          <p:cNvPr id="16" name="Text 14"/>
-          <p:cNvSpPr/>
-          <p:nvPr/>
-        </p:nvSpPr>
-        <p:spPr>
-          <a:xfrm>
-            <a:off x="6263640" y="1737360"/>
-            <a:ext cx="2286000" cy="1097280"/>
-          </a:xfrm>
-          <a:prstGeom prst="rect">
-            <a:avLst/>
-          </a:prstGeom>
-          <a:noFill/>
-          <a:ln/>
-        </p:spPr>
-        <p:txBody>
-          <a:bodyPr wrap="square" rtlCol="0" anchor="t"/>
-          <a:lstStyle/>
-          <a:p>
-            <a:pPr indent="0" marL="0">
-              <a:buNone/>
-            </a:pPr>
-            <a:r>
-              <a:rPr lang="en-US" sz="1100" dirty="0">
-                <a:solidFill>
-                  <a:srgbClr val="3D3A36"/>
-                </a:solidFill>
-                <a:latin typeface="Calibri" pitchFamily="34" charset="0"/>
-                <a:ea typeface="Calibri" pitchFamily="34" charset="-122"/>
-                <a:cs typeface="Calibri" pitchFamily="34" charset="-120"/>
-              </a:rPr>
-              <a:t>Split into rectangles/triangles. Calculate each. Add together (or subtract for cut-outs).</a:t>
-            </a:r>
-            <a:endParaRPr lang="en-US" sz="1100" dirty="0"/>
-          </a:p>
-        </p:txBody>
       </p:sp>
     </p:spTree>
   </p:cSld>
@@ -1862,7 +1890,27 @@
         <p:spPr>
           <a:xfrm>
             <a:off x="0" y="0"/>
-            <a:ext cx="9144000" cy="54864"/>
+            <a:ext cx="9144000" cy="822960"/>
+          </a:xfrm>
+          <a:prstGeom prst="rect">
+            <a:avLst/>
+          </a:prstGeom>
+          <a:solidFill>
+            <a:srgbClr val="FFFFFF"/>
+          </a:solidFill>
+          <a:ln/>
+        </p:spPr>
+      </p:sp>
+      <p:sp>
+        <p:nvSpPr>
+          <p:cNvPr id="3" name="Shape 1"/>
+          <p:cNvSpPr/>
+          <p:nvPr/>
+        </p:nvSpPr>
+        <p:spPr>
+          <a:xfrm>
+            <a:off x="0" y="795528"/>
+            <a:ext cx="9144000" cy="27432"/>
           </a:xfrm>
           <a:prstGeom prst="rect">
             <a:avLst/>
@@ -1875,14 +1923,14 @@
       </p:sp>
       <p:sp>
         <p:nvSpPr>
-          <p:cNvPr id="3" name="Text 1"/>
+          <p:cNvPr id="4" name="Text 2"/>
           <p:cNvSpPr/>
           <p:nvPr/>
         </p:nvSpPr>
         <p:spPr>
           <a:xfrm>
-            <a:off x="7772400" y="4709160"/>
-            <a:ext cx="1097280" cy="320040"/>
+            <a:off x="640080" y="91440"/>
+            <a:ext cx="7863840" cy="640080"/>
           </a:xfrm>
           <a:prstGeom prst="rect">
             <a:avLst/>
@@ -1891,37 +1939,646 @@
           <a:ln/>
         </p:spPr>
         <p:txBody>
-          <a:bodyPr wrap="square" rtlCol="0" anchor="ctr"/>
+          <a:bodyPr wrap="square" lIns="0" tIns="0" rIns="0" bIns="0" rtlCol="0" anchor="ctr"/>
           <a:lstStyle/>
           <a:p>
-            <a:pPr algn="r" indent="0" marL="0">
+            <a:pPr indent="0" marL="0">
               <a:buNone/>
             </a:pPr>
             <a:r>
-              <a:rPr lang="en-US" sz="900" dirty="0">
+              <a:rPr lang="en-US" sz="2200" b="1" dirty="0">
                 <a:solidFill>
-                  <a:srgbClr val="6B6660"/>
+                  <a:srgbClr val="1B2A4A"/>
                 </a:solidFill>
-                <a:latin typeface="Calibri" pitchFamily="34" charset="0"/>
-                <a:ea typeface="Calibri" pitchFamily="34" charset="-122"/>
-                <a:cs typeface="Calibri" pitchFamily="34" charset="-120"/>
+                <a:latin typeface="Georgia" pitchFamily="34" charset="0"/>
+                <a:ea typeface="Georgia" pitchFamily="34" charset="-122"/>
+                <a:cs typeface="Georgia" pitchFamily="34" charset="-120"/>
               </a:rPr>
-              <a:t>3 / 4</a:t>
+              <a:t>Perimeter Formulas</a:t>
             </a:r>
-            <a:endParaRPr lang="en-US" sz="900" dirty="0"/>
+            <a:endParaRPr lang="en-US" sz="2200" dirty="0"/>
           </a:p>
         </p:txBody>
       </p:sp>
-      <p:sp>
-        <p:nvSpPr>
-          <p:cNvPr id="4" name="Text 2"/>
+      <p:graphicFrame>
+        <p:nvGraphicFramePr>
+          <p:cNvPr id="4" name="Table 0"/>
+          <p:cNvGraphicFramePr>
+            <a:graphicFrameLocks noGrp="1"/>
+          </p:cNvGraphicFramePr>
+          <p:nvPr>
+            <p:extLst>
+              <p:ext uri="{D42A27DB-BD31-4B8C-83A1-F6EECF244321}">
+                <p14:modId xmlns:p14="http://schemas.microsoft.com/office/powerpoint/2010/main" val="1579011935"/>
+              </p:ext>
+            </p:extLst>
+          </p:nvPr>
+        </p:nvGraphicFramePr>
+        <p:xfrm>
+          <a:off x="640080" y="1051560"/>
+          <a:ext cx="7863840" cy="914400"/>
+        </p:xfrm>
+        <a:graphic>
+          <a:graphicData uri="http://schemas.openxmlformats.org/drawingml/2006/table">
+            <a:tbl>
+              <a:tblPr/>
+              <a:tblGrid>
+                <a:gridCol w="3931920"/>
+                <a:gridCol w="3931920"/>
+              </a:tblGrid>
+              <a:tr h="502920">
+                <a:tc>
+                  <a:txBody>
+                    <a:bodyPr/>
+                    <a:lstStyle/>
+                    <a:p>
+                      <a:pPr indent="0" marL="0">
+                        <a:buNone/>
+                      </a:pPr>
+                      <a:r>
+                        <a:rPr lang="en-US" sz="1300" b="1" dirty="0">
+                          <a:solidFill>
+                            <a:srgbClr val="FFFFFF"/>
+                          </a:solidFill>
+                          <a:latin typeface="Calibri" pitchFamily="34" charset="0"/>
+                          <a:ea typeface="Calibri" pitchFamily="34" charset="-122"/>
+                          <a:cs typeface="Calibri" pitchFamily="34" charset="-120"/>
+                        </a:rPr>
+                        <a:t>Shape</a:t>
+                      </a:r>
+                      <a:endParaRPr lang="en-US" sz="1300" dirty="0">
+                        <a:latin typeface="Calibri" charset="0"/>
+                        <a:ea typeface="Calibri" charset="0"/>
+                        <a:cs typeface="Calibri" charset="0"/>
+                      </a:endParaRPr>
+                    </a:p>
+                  </a:txBody>
+                  <a:tcPr marL="91440" marR="91440" marT="45720" marB="45720">
+                    <a:lnL w="6350" cap="flat" cmpd="sng" algn="ctr">
+                      <a:solidFill>
+                        <a:srgbClr val="E5E2DC"/>
+                      </a:solidFill>
+                      <a:prstDash val="solid"/>
+                      <a:round/>
+                      <a:headEnd type="none" w="med" len="med"/>
+                      <a:tailEnd type="none" w="med" len="med"/>
+                    </a:lnL>
+                    <a:lnR w="6350" cap="flat" cmpd="sng" algn="ctr">
+                      <a:solidFill>
+                        <a:srgbClr val="E5E2DC"/>
+                      </a:solidFill>
+                      <a:prstDash val="solid"/>
+                      <a:round/>
+                      <a:headEnd type="none" w="med" len="med"/>
+                      <a:tailEnd type="none" w="med" len="med"/>
+                    </a:lnR>
+                    <a:lnT w="6350" cap="flat" cmpd="sng" algn="ctr">
+                      <a:solidFill>
+                        <a:srgbClr val="E5E2DC"/>
+                      </a:solidFill>
+                      <a:prstDash val="solid"/>
+                      <a:round/>
+                      <a:headEnd type="none" w="med" len="med"/>
+                      <a:tailEnd type="none" w="med" len="med"/>
+                    </a:lnT>
+                    <a:lnB w="6350" cap="flat" cmpd="sng" algn="ctr">
+                      <a:solidFill>
+                        <a:srgbClr val="E5E2DC"/>
+                      </a:solidFill>
+                      <a:prstDash val="solid"/>
+                      <a:round/>
+                      <a:headEnd type="none" w="med" len="med"/>
+                      <a:tailEnd type="none" w="med" len="med"/>
+                    </a:lnB>
+                    <a:solidFill>
+                      <a:srgbClr val="2A9D8F"/>
+                    </a:solidFill>
+                  </a:tcPr>
+                </a:tc>
+                <a:tc>
+                  <a:txBody>
+                    <a:bodyPr/>
+                    <a:lstStyle/>
+                    <a:p>
+                      <a:pPr indent="0" marL="0">
+                        <a:buNone/>
+                      </a:pPr>
+                      <a:r>
+                        <a:rPr lang="en-US" sz="1300" b="1" dirty="0">
+                          <a:solidFill>
+                            <a:srgbClr val="FFFFFF"/>
+                          </a:solidFill>
+                          <a:latin typeface="Calibri" pitchFamily="34" charset="0"/>
+                          <a:ea typeface="Calibri" pitchFamily="34" charset="-122"/>
+                          <a:cs typeface="Calibri" pitchFamily="34" charset="-120"/>
+                        </a:rPr>
+                        <a:t>Formula</a:t>
+                      </a:r>
+                      <a:endParaRPr lang="en-US" sz="1300" dirty="0">
+                        <a:latin typeface="Calibri" charset="0"/>
+                        <a:ea typeface="Calibri" charset="0"/>
+                        <a:cs typeface="Calibri" charset="0"/>
+                      </a:endParaRPr>
+                    </a:p>
+                  </a:txBody>
+                  <a:tcPr marL="91440" marR="91440" marT="45720" marB="45720">
+                    <a:lnL w="6350" cap="flat" cmpd="sng" algn="ctr">
+                      <a:solidFill>
+                        <a:srgbClr val="E5E2DC"/>
+                      </a:solidFill>
+                      <a:prstDash val="solid"/>
+                      <a:round/>
+                      <a:headEnd type="none" w="med" len="med"/>
+                      <a:tailEnd type="none" w="med" len="med"/>
+                    </a:lnL>
+                    <a:lnR w="6350" cap="flat" cmpd="sng" algn="ctr">
+                      <a:solidFill>
+                        <a:srgbClr val="E5E2DC"/>
+                      </a:solidFill>
+                      <a:prstDash val="solid"/>
+                      <a:round/>
+                      <a:headEnd type="none" w="med" len="med"/>
+                      <a:tailEnd type="none" w="med" len="med"/>
+                    </a:lnR>
+                    <a:lnT w="6350" cap="flat" cmpd="sng" algn="ctr">
+                      <a:solidFill>
+                        <a:srgbClr val="E5E2DC"/>
+                      </a:solidFill>
+                      <a:prstDash val="solid"/>
+                      <a:round/>
+                      <a:headEnd type="none" w="med" len="med"/>
+                      <a:tailEnd type="none" w="med" len="med"/>
+                    </a:lnT>
+                    <a:lnB w="6350" cap="flat" cmpd="sng" algn="ctr">
+                      <a:solidFill>
+                        <a:srgbClr val="E5E2DC"/>
+                      </a:solidFill>
+                      <a:prstDash val="solid"/>
+                      <a:round/>
+                      <a:headEnd type="none" w="med" len="med"/>
+                      <a:tailEnd type="none" w="med" len="med"/>
+                    </a:lnB>
+                    <a:solidFill>
+                      <a:srgbClr val="2A9D8F"/>
+                    </a:solidFill>
+                  </a:tcPr>
+                </a:tc>
+              </a:tr>
+              <a:tr h="502920">
+                <a:tc>
+                  <a:txBody>
+                    <a:bodyPr/>
+                    <a:lstStyle/>
+                    <a:p>
+                      <a:pPr indent="0" marL="0">
+                        <a:buNone/>
+                      </a:pPr>
+                      <a:r>
+                        <a:rPr lang="en-US" sz="1300" dirty="0">
+                          <a:solidFill>
+                            <a:srgbClr val="3D3A36"/>
+                          </a:solidFill>
+                          <a:latin typeface="Calibri" pitchFamily="34" charset="0"/>
+                          <a:ea typeface="Calibri" pitchFamily="34" charset="-122"/>
+                          <a:cs typeface="Calibri" pitchFamily="34" charset="-120"/>
+                        </a:rPr>
+                        <a:t>Square</a:t>
+                      </a:r>
+                      <a:endParaRPr lang="en-US" sz="1300" dirty="0">
+                        <a:latin typeface="Calibri" charset="0"/>
+                        <a:ea typeface="Calibri" charset="0"/>
+                        <a:cs typeface="Calibri" charset="0"/>
+                      </a:endParaRPr>
+                    </a:p>
+                  </a:txBody>
+                  <a:tcPr marL="91440" marR="91440" marT="45720" marB="45720">
+                    <a:lnL w="6350" cap="flat" cmpd="sng" algn="ctr">
+                      <a:solidFill>
+                        <a:srgbClr val="E5E2DC"/>
+                      </a:solidFill>
+                      <a:prstDash val="solid"/>
+                      <a:round/>
+                      <a:headEnd type="none" w="med" len="med"/>
+                      <a:tailEnd type="none" w="med" len="med"/>
+                    </a:lnL>
+                    <a:lnR w="6350" cap="flat" cmpd="sng" algn="ctr">
+                      <a:solidFill>
+                        <a:srgbClr val="E5E2DC"/>
+                      </a:solidFill>
+                      <a:prstDash val="solid"/>
+                      <a:round/>
+                      <a:headEnd type="none" w="med" len="med"/>
+                      <a:tailEnd type="none" w="med" len="med"/>
+                    </a:lnR>
+                    <a:lnT w="6350" cap="flat" cmpd="sng" algn="ctr">
+                      <a:solidFill>
+                        <a:srgbClr val="E5E2DC"/>
+                      </a:solidFill>
+                      <a:prstDash val="solid"/>
+                      <a:round/>
+                      <a:headEnd type="none" w="med" len="med"/>
+                      <a:tailEnd type="none" w="med" len="med"/>
+                    </a:lnT>
+                    <a:lnB w="6350" cap="flat" cmpd="sng" algn="ctr">
+                      <a:solidFill>
+                        <a:srgbClr val="E5E2DC"/>
+                      </a:solidFill>
+                      <a:prstDash val="solid"/>
+                      <a:round/>
+                      <a:headEnd type="none" w="med" len="med"/>
+                      <a:tailEnd type="none" w="med" len="med"/>
+                    </a:lnB>
+                  </a:tcPr>
+                </a:tc>
+                <a:tc>
+                  <a:txBody>
+                    <a:bodyPr/>
+                    <a:lstStyle/>
+                    <a:p>
+                      <a:pPr indent="0" marL="0">
+                        <a:buNone/>
+                      </a:pPr>
+                      <a:r>
+                        <a:rPr lang="en-US" sz="1300" dirty="0">
+                          <a:solidFill>
+                            <a:srgbClr val="3D3A36"/>
+                          </a:solidFill>
+                          <a:latin typeface="Calibri" pitchFamily="34" charset="0"/>
+                          <a:ea typeface="Calibri" pitchFamily="34" charset="-122"/>
+                          <a:cs typeface="Calibri" pitchFamily="34" charset="-120"/>
+                        </a:rPr>
+                        <a:t>P = 4s</a:t>
+                      </a:r>
+                      <a:endParaRPr lang="en-US" sz="1300" dirty="0">
+                        <a:latin typeface="Calibri" charset="0"/>
+                        <a:ea typeface="Calibri" charset="0"/>
+                        <a:cs typeface="Calibri" charset="0"/>
+                      </a:endParaRPr>
+                    </a:p>
+                  </a:txBody>
+                  <a:tcPr marL="91440" marR="91440" marT="45720" marB="45720">
+                    <a:lnL w="6350" cap="flat" cmpd="sng" algn="ctr">
+                      <a:solidFill>
+                        <a:srgbClr val="E5E2DC"/>
+                      </a:solidFill>
+                      <a:prstDash val="solid"/>
+                      <a:round/>
+                      <a:headEnd type="none" w="med" len="med"/>
+                      <a:tailEnd type="none" w="med" len="med"/>
+                    </a:lnL>
+                    <a:lnR w="6350" cap="flat" cmpd="sng" algn="ctr">
+                      <a:solidFill>
+                        <a:srgbClr val="E5E2DC"/>
+                      </a:solidFill>
+                      <a:prstDash val="solid"/>
+                      <a:round/>
+                      <a:headEnd type="none" w="med" len="med"/>
+                      <a:tailEnd type="none" w="med" len="med"/>
+                    </a:lnR>
+                    <a:lnT w="6350" cap="flat" cmpd="sng" algn="ctr">
+                      <a:solidFill>
+                        <a:srgbClr val="E5E2DC"/>
+                      </a:solidFill>
+                      <a:prstDash val="solid"/>
+                      <a:round/>
+                      <a:headEnd type="none" w="med" len="med"/>
+                      <a:tailEnd type="none" w="med" len="med"/>
+                    </a:lnT>
+                    <a:lnB w="6350" cap="flat" cmpd="sng" algn="ctr">
+                      <a:solidFill>
+                        <a:srgbClr val="E5E2DC"/>
+                      </a:solidFill>
+                      <a:prstDash val="solid"/>
+                      <a:round/>
+                      <a:headEnd type="none" w="med" len="med"/>
+                      <a:tailEnd type="none" w="med" len="med"/>
+                    </a:lnB>
+                  </a:tcPr>
+                </a:tc>
+              </a:tr>
+              <a:tr h="502920">
+                <a:tc>
+                  <a:txBody>
+                    <a:bodyPr/>
+                    <a:lstStyle/>
+                    <a:p>
+                      <a:pPr indent="0" marL="0">
+                        <a:buNone/>
+                      </a:pPr>
+                      <a:r>
+                        <a:rPr lang="en-US" sz="1300" dirty="0">
+                          <a:solidFill>
+                            <a:srgbClr val="3D3A36"/>
+                          </a:solidFill>
+                          <a:latin typeface="Calibri" pitchFamily="34" charset="0"/>
+                          <a:ea typeface="Calibri" pitchFamily="34" charset="-122"/>
+                          <a:cs typeface="Calibri" pitchFamily="34" charset="-120"/>
+                        </a:rPr>
+                        <a:t>Rectangle</a:t>
+                      </a:r>
+                      <a:endParaRPr lang="en-US" sz="1300" dirty="0">
+                        <a:latin typeface="Calibri" charset="0"/>
+                        <a:ea typeface="Calibri" charset="0"/>
+                        <a:cs typeface="Calibri" charset="0"/>
+                      </a:endParaRPr>
+                    </a:p>
+                  </a:txBody>
+                  <a:tcPr marL="91440" marR="91440" marT="45720" marB="45720">
+                    <a:lnL w="6350" cap="flat" cmpd="sng" algn="ctr">
+                      <a:solidFill>
+                        <a:srgbClr val="E5E2DC"/>
+                      </a:solidFill>
+                      <a:prstDash val="solid"/>
+                      <a:round/>
+                      <a:headEnd type="none" w="med" len="med"/>
+                      <a:tailEnd type="none" w="med" len="med"/>
+                    </a:lnL>
+                    <a:lnR w="6350" cap="flat" cmpd="sng" algn="ctr">
+                      <a:solidFill>
+                        <a:srgbClr val="E5E2DC"/>
+                      </a:solidFill>
+                      <a:prstDash val="solid"/>
+                      <a:round/>
+                      <a:headEnd type="none" w="med" len="med"/>
+                      <a:tailEnd type="none" w="med" len="med"/>
+                    </a:lnR>
+                    <a:lnT w="6350" cap="flat" cmpd="sng" algn="ctr">
+                      <a:solidFill>
+                        <a:srgbClr val="E5E2DC"/>
+                      </a:solidFill>
+                      <a:prstDash val="solid"/>
+                      <a:round/>
+                      <a:headEnd type="none" w="med" len="med"/>
+                      <a:tailEnd type="none" w="med" len="med"/>
+                    </a:lnT>
+                    <a:lnB w="6350" cap="flat" cmpd="sng" algn="ctr">
+                      <a:solidFill>
+                        <a:srgbClr val="E5E2DC"/>
+                      </a:solidFill>
+                      <a:prstDash val="solid"/>
+                      <a:round/>
+                      <a:headEnd type="none" w="med" len="med"/>
+                      <a:tailEnd type="none" w="med" len="med"/>
+                    </a:lnB>
+                  </a:tcPr>
+                </a:tc>
+                <a:tc>
+                  <a:txBody>
+                    <a:bodyPr/>
+                    <a:lstStyle/>
+                    <a:p>
+                      <a:pPr indent="0" marL="0">
+                        <a:buNone/>
+                      </a:pPr>
+                      <a:r>
+                        <a:rPr lang="en-US" sz="1300" dirty="0">
+                          <a:solidFill>
+                            <a:srgbClr val="3D3A36"/>
+                          </a:solidFill>
+                          <a:latin typeface="Calibri" pitchFamily="34" charset="0"/>
+                          <a:ea typeface="Calibri" pitchFamily="34" charset="-122"/>
+                          <a:cs typeface="Calibri" pitchFamily="34" charset="-120"/>
+                        </a:rPr>
+                        <a:t>P = 2(l+w)</a:t>
+                      </a:r>
+                      <a:endParaRPr lang="en-US" sz="1300" dirty="0">
+                        <a:latin typeface="Calibri" charset="0"/>
+                        <a:ea typeface="Calibri" charset="0"/>
+                        <a:cs typeface="Calibri" charset="0"/>
+                      </a:endParaRPr>
+                    </a:p>
+                  </a:txBody>
+                  <a:tcPr marL="91440" marR="91440" marT="45720" marB="45720">
+                    <a:lnL w="6350" cap="flat" cmpd="sng" algn="ctr">
+                      <a:solidFill>
+                        <a:srgbClr val="E5E2DC"/>
+                      </a:solidFill>
+                      <a:prstDash val="solid"/>
+                      <a:round/>
+                      <a:headEnd type="none" w="med" len="med"/>
+                      <a:tailEnd type="none" w="med" len="med"/>
+                    </a:lnL>
+                    <a:lnR w="6350" cap="flat" cmpd="sng" algn="ctr">
+                      <a:solidFill>
+                        <a:srgbClr val="E5E2DC"/>
+                      </a:solidFill>
+                      <a:prstDash val="solid"/>
+                      <a:round/>
+                      <a:headEnd type="none" w="med" len="med"/>
+                      <a:tailEnd type="none" w="med" len="med"/>
+                    </a:lnR>
+                    <a:lnT w="6350" cap="flat" cmpd="sng" algn="ctr">
+                      <a:solidFill>
+                        <a:srgbClr val="E5E2DC"/>
+                      </a:solidFill>
+                      <a:prstDash val="solid"/>
+                      <a:round/>
+                      <a:headEnd type="none" w="med" len="med"/>
+                      <a:tailEnd type="none" w="med" len="med"/>
+                    </a:lnT>
+                    <a:lnB w="6350" cap="flat" cmpd="sng" algn="ctr">
+                      <a:solidFill>
+                        <a:srgbClr val="E5E2DC"/>
+                      </a:solidFill>
+                      <a:prstDash val="solid"/>
+                      <a:round/>
+                      <a:headEnd type="none" w="med" len="med"/>
+                      <a:tailEnd type="none" w="med" len="med"/>
+                    </a:lnB>
+                  </a:tcPr>
+                </a:tc>
+              </a:tr>
+              <a:tr h="502920">
+                <a:tc>
+                  <a:txBody>
+                    <a:bodyPr/>
+                    <a:lstStyle/>
+                    <a:p>
+                      <a:pPr indent="0" marL="0">
+                        <a:buNone/>
+                      </a:pPr>
+                      <a:r>
+                        <a:rPr lang="en-US" sz="1300" dirty="0">
+                          <a:solidFill>
+                            <a:srgbClr val="3D3A36"/>
+                          </a:solidFill>
+                          <a:latin typeface="Calibri" pitchFamily="34" charset="0"/>
+                          <a:ea typeface="Calibri" pitchFamily="34" charset="-122"/>
+                          <a:cs typeface="Calibri" pitchFamily="34" charset="-120"/>
+                        </a:rPr>
+                        <a:t>Triangle</a:t>
+                      </a:r>
+                      <a:endParaRPr lang="en-US" sz="1300" dirty="0">
+                        <a:latin typeface="Calibri" charset="0"/>
+                        <a:ea typeface="Calibri" charset="0"/>
+                        <a:cs typeface="Calibri" charset="0"/>
+                      </a:endParaRPr>
+                    </a:p>
+                  </a:txBody>
+                  <a:tcPr marL="91440" marR="91440" marT="45720" marB="45720">
+                    <a:lnL w="6350" cap="flat" cmpd="sng" algn="ctr">
+                      <a:solidFill>
+                        <a:srgbClr val="E5E2DC"/>
+                      </a:solidFill>
+                      <a:prstDash val="solid"/>
+                      <a:round/>
+                      <a:headEnd type="none" w="med" len="med"/>
+                      <a:tailEnd type="none" w="med" len="med"/>
+                    </a:lnL>
+                    <a:lnR w="6350" cap="flat" cmpd="sng" algn="ctr">
+                      <a:solidFill>
+                        <a:srgbClr val="E5E2DC"/>
+                      </a:solidFill>
+                      <a:prstDash val="solid"/>
+                      <a:round/>
+                      <a:headEnd type="none" w="med" len="med"/>
+                      <a:tailEnd type="none" w="med" len="med"/>
+                    </a:lnR>
+                    <a:lnT w="6350" cap="flat" cmpd="sng" algn="ctr">
+                      <a:solidFill>
+                        <a:srgbClr val="E5E2DC"/>
+                      </a:solidFill>
+                      <a:prstDash val="solid"/>
+                      <a:round/>
+                      <a:headEnd type="none" w="med" len="med"/>
+                      <a:tailEnd type="none" w="med" len="med"/>
+                    </a:lnT>
+                    <a:lnB w="6350" cap="flat" cmpd="sng" algn="ctr">
+                      <a:solidFill>
+                        <a:srgbClr val="E5E2DC"/>
+                      </a:solidFill>
+                      <a:prstDash val="solid"/>
+                      <a:round/>
+                      <a:headEnd type="none" w="med" len="med"/>
+                      <a:tailEnd type="none" w="med" len="med"/>
+                    </a:lnB>
+                  </a:tcPr>
+                </a:tc>
+                <a:tc>
+                  <a:txBody>
+                    <a:bodyPr/>
+                    <a:lstStyle/>
+                    <a:p>
+                      <a:pPr indent="0" marL="0">
+                        <a:buNone/>
+                      </a:pPr>
+                      <a:r>
+                        <a:rPr lang="en-US" sz="1300" dirty="0">
+                          <a:solidFill>
+                            <a:srgbClr val="3D3A36"/>
+                          </a:solidFill>
+                          <a:latin typeface="Calibri" pitchFamily="34" charset="0"/>
+                          <a:ea typeface="Calibri" pitchFamily="34" charset="-122"/>
+                          <a:cs typeface="Calibri" pitchFamily="34" charset="-120"/>
+                        </a:rPr>
+                        <a:t>P = a+b+c</a:t>
+                      </a:r>
+                      <a:endParaRPr lang="en-US" sz="1300" dirty="0">
+                        <a:latin typeface="Calibri" charset="0"/>
+                        <a:ea typeface="Calibri" charset="0"/>
+                        <a:cs typeface="Calibri" charset="0"/>
+                      </a:endParaRPr>
+                    </a:p>
+                  </a:txBody>
+                  <a:tcPr marL="91440" marR="91440" marT="45720" marB="45720">
+                    <a:lnL w="6350" cap="flat" cmpd="sng" algn="ctr">
+                      <a:solidFill>
+                        <a:srgbClr val="E5E2DC"/>
+                      </a:solidFill>
+                      <a:prstDash val="solid"/>
+                      <a:round/>
+                      <a:headEnd type="none" w="med" len="med"/>
+                      <a:tailEnd type="none" w="med" len="med"/>
+                    </a:lnL>
+                    <a:lnR w="6350" cap="flat" cmpd="sng" algn="ctr">
+                      <a:solidFill>
+                        <a:srgbClr val="E5E2DC"/>
+                      </a:solidFill>
+                      <a:prstDash val="solid"/>
+                      <a:round/>
+                      <a:headEnd type="none" w="med" len="med"/>
+                      <a:tailEnd type="none" w="med" len="med"/>
+                    </a:lnR>
+                    <a:lnT w="6350" cap="flat" cmpd="sng" algn="ctr">
+                      <a:solidFill>
+                        <a:srgbClr val="E5E2DC"/>
+                      </a:solidFill>
+                      <a:prstDash val="solid"/>
+                      <a:round/>
+                      <a:headEnd type="none" w="med" len="med"/>
+                      <a:tailEnd type="none" w="med" len="med"/>
+                    </a:lnT>
+                    <a:lnB w="6350" cap="flat" cmpd="sng" algn="ctr">
+                      <a:solidFill>
+                        <a:srgbClr val="E5E2DC"/>
+                      </a:solidFill>
+                      <a:prstDash val="solid"/>
+                      <a:round/>
+                      <a:headEnd type="none" w="med" len="med"/>
+                      <a:tailEnd type="none" w="med" len="med"/>
+                    </a:lnB>
+                  </a:tcPr>
+                </a:tc>
+              </a:tr>
+            </a:tbl>
+          </a:graphicData>
+        </a:graphic>
+      </p:graphicFrame>
+    </p:spTree>
+  </p:cSld>
+  <p:clrMapOvr>
+    <a:masterClrMapping/>
+  </p:clrMapOvr>
+</p:sld>
+</file>
+
+<file path=ppt/slides/slide4.xml><?xml version="1.0" encoding="utf-8"?>
+<p:sld xmlns:a="http://schemas.openxmlformats.org/drawingml/2006/main" xmlns:r="http://schemas.openxmlformats.org/officeDocument/2006/relationships" xmlns:p="http://schemas.openxmlformats.org/presentationml/2006/main">
+  <p:cSld name="Slide 4">
+    <p:spTree>
+      <p:nvGrpSpPr>
+        <p:cNvPr id="1" name=""/>
+        <p:cNvGrpSpPr/>
+        <p:nvPr/>
+      </p:nvGrpSpPr>
+      <p:grpSpPr>
+        <a:xfrm>
+          <a:off x="0" y="0"/>
+          <a:ext cx="0" cy="0"/>
+          <a:chOff x="0" y="0"/>
+          <a:chExt cx="0" cy="0"/>
+        </a:xfrm>
+      </p:grpSpPr>
+      <p:sp>
+        <p:nvSpPr>
+          <p:cNvPr id="2" name="Shape 0"/>
           <p:cNvSpPr/>
           <p:nvPr/>
         </p:nvSpPr>
         <p:spPr>
           <a:xfrm>
-            <a:off x="457200" y="274320"/>
-            <a:ext cx="8229600" cy="640080"/>
+            <a:off x="0" y="0"/>
+            <a:ext cx="9144000" cy="5143500"/>
+          </a:xfrm>
+          <a:prstGeom prst="rect">
+            <a:avLst/>
+          </a:prstGeom>
+          <a:solidFill>
+            <a:srgbClr val="111D35"/>
+          </a:solidFill>
+          <a:ln/>
+        </p:spPr>
+      </p:sp>
+      <p:sp>
+        <p:nvSpPr>
+          <p:cNvPr id="3" name="Text 1"/>
+          <p:cNvSpPr/>
+          <p:nvPr/>
+        </p:nvSpPr>
+        <p:spPr>
+          <a:xfrm>
+            <a:off x="731520" y="914400"/>
+            <a:ext cx="1828800" cy="1097280"/>
           </a:xfrm>
           <a:prstGeom prst="rect">
             <a:avLst/>
@@ -1937,472 +2594,32 @@
               <a:buNone/>
             </a:pPr>
             <a:r>
-              <a:rPr lang="en-US" sz="2600" b="1" dirty="0">
+              <a:rPr lang="en-US" sz="7200" b="1" dirty="0">
                 <a:solidFill>
-                  <a:srgbClr val="1B2A4A"/>
+                  <a:srgbClr val="2A9D8F">
+                    <a:alpha val="70000"/>
+                  </a:srgbClr>
                 </a:solidFill>
                 <a:latin typeface="Georgia" pitchFamily="34" charset="0"/>
                 <a:ea typeface="Georgia" pitchFamily="34" charset="-122"/>
                 <a:cs typeface="Georgia" pitchFamily="34" charset="-120"/>
               </a:rPr>
-              <a:t>3D Measurement</a:t>
+              <a:t>02</a:t>
             </a:r>
-            <a:endParaRPr lang="en-US" sz="2600" dirty="0"/>
+            <a:endParaRPr lang="en-US" sz="7200" dirty="0"/>
           </a:p>
         </p:txBody>
       </p:sp>
       <p:sp>
         <p:nvSpPr>
-          <p:cNvPr id="5" name="Shape 3"/>
+          <p:cNvPr id="4" name="Text 2"/>
           <p:cNvSpPr/>
           <p:nvPr/>
         </p:nvSpPr>
         <p:spPr>
           <a:xfrm>
-            <a:off x="457200" y="1188720"/>
-            <a:ext cx="2560320" cy="1828800"/>
-          </a:xfrm>
-          <a:prstGeom prst="rect">
-            <a:avLst/>
-          </a:prstGeom>
-          <a:solidFill>
-            <a:srgbClr val="FFFFFF"/>
-          </a:solidFill>
-          <a:ln w="12700">
-            <a:solidFill>
-              <a:srgbClr val="E5E2DC"/>
-            </a:solidFill>
-            <a:prstDash val="solid"/>
-          </a:ln>
-          <a:effectLst>
-            <a:outerShdw sx="100000" sy="100000" kx="0" ky="0" algn="bl" rotWithShape="0" blurRad="50800" dist="25400" dir="8100000">
-              <a:srgbClr val="000000">
-                <a:alpha val="10000"/>
-              </a:srgbClr>
-            </a:outerShdw>
-          </a:effectLst>
-        </p:spPr>
-      </p:sp>
-      <p:sp>
-        <p:nvSpPr>
-          <p:cNvPr id="6" name="Shape 4"/>
-          <p:cNvSpPr/>
-          <p:nvPr/>
-        </p:nvSpPr>
-        <p:spPr>
-          <a:xfrm>
-            <a:off x="457200" y="1188720"/>
-            <a:ext cx="2560320" cy="54864"/>
-          </a:xfrm>
-          <a:prstGeom prst="rect">
-            <a:avLst/>
-          </a:prstGeom>
-          <a:solidFill>
-            <a:srgbClr val="2A9D8F"/>
-          </a:solidFill>
-          <a:ln/>
-        </p:spPr>
-      </p:sp>
-      <p:sp>
-        <p:nvSpPr>
-          <p:cNvPr id="7" name="Text 5"/>
-          <p:cNvSpPr/>
-          <p:nvPr/>
-        </p:nvSpPr>
-        <p:spPr>
-          <a:xfrm>
-            <a:off x="594360" y="1325880"/>
-            <a:ext cx="2286000" cy="365760"/>
-          </a:xfrm>
-          <a:prstGeom prst="rect">
-            <a:avLst/>
-          </a:prstGeom>
-          <a:noFill/>
-          <a:ln/>
-        </p:spPr>
-        <p:txBody>
-          <a:bodyPr wrap="square" rtlCol="0" anchor="ctr"/>
-          <a:lstStyle/>
-          <a:p>
-            <a:pPr indent="0" marL="0">
-              <a:buNone/>
-            </a:pPr>
-            <a:r>
-              <a:rPr lang="en-US" sz="1400" b="1" dirty="0">
-                <a:solidFill>
-                  <a:srgbClr val="1B2A4A"/>
-                </a:solidFill>
-                <a:latin typeface="Calibri" pitchFamily="34" charset="0"/>
-                <a:ea typeface="Calibri" pitchFamily="34" charset="-122"/>
-                <a:cs typeface="Calibri" pitchFamily="34" charset="-120"/>
-              </a:rPr>
-              <a:t>Surface Area</a:t>
-            </a:r>
-            <a:endParaRPr lang="en-US" sz="1400" dirty="0"/>
-          </a:p>
-        </p:txBody>
-      </p:sp>
-      <p:sp>
-        <p:nvSpPr>
-          <p:cNvPr id="8" name="Text 6"/>
-          <p:cNvSpPr/>
-          <p:nvPr/>
-        </p:nvSpPr>
-        <p:spPr>
-          <a:xfrm>
-            <a:off x="594360" y="1737360"/>
-            <a:ext cx="2286000" cy="1097280"/>
-          </a:xfrm>
-          <a:prstGeom prst="rect">
-            <a:avLst/>
-          </a:prstGeom>
-          <a:noFill/>
-          <a:ln/>
-        </p:spPr>
-        <p:txBody>
-          <a:bodyPr wrap="square" rtlCol="0" anchor="t"/>
-          <a:lstStyle/>
-          <a:p>
-            <a:pPr indent="0" marL="0">
-              <a:buNone/>
-            </a:pPr>
-            <a:r>
-              <a:rPr lang="en-US" sz="1100" dirty="0">
-                <a:solidFill>
-                  <a:srgbClr val="3D3A36"/>
-                </a:solidFill>
-                <a:latin typeface="Calibri" pitchFamily="34" charset="0"/>
-                <a:ea typeface="Calibri" pitchFamily="34" charset="-122"/>
-                <a:cs typeface="Calibri" pitchFamily="34" charset="-120"/>
-              </a:rPr>
-              <a:t>Total area of all faces. Cuboid: SA=2lw+2lh+2wh. Cube: SA=6s². Draw net to see all faces.</a:t>
-            </a:r>
-            <a:endParaRPr lang="en-US" sz="1100" dirty="0"/>
-          </a:p>
-        </p:txBody>
-      </p:sp>
-      <p:sp>
-        <p:nvSpPr>
-          <p:cNvPr id="9" name="Shape 7"/>
-          <p:cNvSpPr/>
-          <p:nvPr/>
-        </p:nvSpPr>
-        <p:spPr>
-          <a:xfrm>
-            <a:off x="3291840" y="1188720"/>
-            <a:ext cx="2560320" cy="1828800"/>
-          </a:xfrm>
-          <a:prstGeom prst="rect">
-            <a:avLst/>
-          </a:prstGeom>
-          <a:solidFill>
-            <a:srgbClr val="FFFFFF"/>
-          </a:solidFill>
-          <a:ln w="12700">
-            <a:solidFill>
-              <a:srgbClr val="E5E2DC"/>
-            </a:solidFill>
-            <a:prstDash val="solid"/>
-          </a:ln>
-          <a:effectLst>
-            <a:outerShdw sx="100000" sy="100000" kx="0" ky="0" algn="bl" rotWithShape="0" blurRad="50800" dist="25400" dir="8100000">
-              <a:srgbClr val="000000">
-                <a:alpha val="10000"/>
-              </a:srgbClr>
-            </a:outerShdw>
-          </a:effectLst>
-        </p:spPr>
-      </p:sp>
-      <p:sp>
-        <p:nvSpPr>
-          <p:cNvPr id="10" name="Shape 8"/>
-          <p:cNvSpPr/>
-          <p:nvPr/>
-        </p:nvSpPr>
-        <p:spPr>
-          <a:xfrm>
-            <a:off x="3291840" y="1188720"/>
-            <a:ext cx="2560320" cy="54864"/>
-          </a:xfrm>
-          <a:prstGeom prst="rect">
-            <a:avLst/>
-          </a:prstGeom>
-          <a:solidFill>
-            <a:srgbClr val="2A9D8F"/>
-          </a:solidFill>
-          <a:ln/>
-        </p:spPr>
-      </p:sp>
-      <p:sp>
-        <p:nvSpPr>
-          <p:cNvPr id="11" name="Text 9"/>
-          <p:cNvSpPr/>
-          <p:nvPr/>
-        </p:nvSpPr>
-        <p:spPr>
-          <a:xfrm>
-            <a:off x="3429000" y="1325880"/>
-            <a:ext cx="2286000" cy="365760"/>
-          </a:xfrm>
-          <a:prstGeom prst="rect">
-            <a:avLst/>
-          </a:prstGeom>
-          <a:noFill/>
-          <a:ln/>
-        </p:spPr>
-        <p:txBody>
-          <a:bodyPr wrap="square" rtlCol="0" anchor="ctr"/>
-          <a:lstStyle/>
-          <a:p>
-            <a:pPr indent="0" marL="0">
-              <a:buNone/>
-            </a:pPr>
-            <a:r>
-              <a:rPr lang="en-US" sz="1400" b="1" dirty="0">
-                <a:solidFill>
-                  <a:srgbClr val="1B2A4A"/>
-                </a:solidFill>
-                <a:latin typeface="Calibri" pitchFamily="34" charset="0"/>
-                <a:ea typeface="Calibri" pitchFamily="34" charset="-122"/>
-                <a:cs typeface="Calibri" pitchFamily="34" charset="-120"/>
-              </a:rPr>
-              <a:t>Volume</a:t>
-            </a:r>
-            <a:endParaRPr lang="en-US" sz="1400" dirty="0"/>
-          </a:p>
-        </p:txBody>
-      </p:sp>
-      <p:sp>
-        <p:nvSpPr>
-          <p:cNvPr id="12" name="Text 10"/>
-          <p:cNvSpPr/>
-          <p:nvPr/>
-        </p:nvSpPr>
-        <p:spPr>
-          <a:xfrm>
-            <a:off x="3429000" y="1737360"/>
-            <a:ext cx="2286000" cy="1097280"/>
-          </a:xfrm>
-          <a:prstGeom prst="rect">
-            <a:avLst/>
-          </a:prstGeom>
-          <a:noFill/>
-          <a:ln/>
-        </p:spPr>
-        <p:txBody>
-          <a:bodyPr wrap="square" rtlCol="0" anchor="t"/>
-          <a:lstStyle/>
-          <a:p>
-            <a:pPr indent="0" marL="0">
-              <a:buNone/>
-            </a:pPr>
-            <a:r>
-              <a:rPr lang="en-US" sz="1100" dirty="0">
-                <a:solidFill>
-                  <a:srgbClr val="3D3A36"/>
-                </a:solidFill>
-                <a:latin typeface="Calibri" pitchFamily="34" charset="0"/>
-                <a:ea typeface="Calibri" pitchFamily="34" charset="-122"/>
-                <a:cs typeface="Calibri" pitchFamily="34" charset="-120"/>
-              </a:rPr>
-              <a:t>3D space inside. Cuboid: V=lwh. Prism: V=cross-section × length. Cubic units.</a:t>
-            </a:r>
-            <a:endParaRPr lang="en-US" sz="1100" dirty="0"/>
-          </a:p>
-        </p:txBody>
-      </p:sp>
-      <p:sp>
-        <p:nvSpPr>
-          <p:cNvPr id="13" name="Shape 11"/>
-          <p:cNvSpPr/>
-          <p:nvPr/>
-        </p:nvSpPr>
-        <p:spPr>
-          <a:xfrm>
-            <a:off x="6126480" y="1188720"/>
-            <a:ext cx="2560320" cy="1828800"/>
-          </a:xfrm>
-          <a:prstGeom prst="rect">
-            <a:avLst/>
-          </a:prstGeom>
-          <a:solidFill>
-            <a:srgbClr val="FFFFFF"/>
-          </a:solidFill>
-          <a:ln w="12700">
-            <a:solidFill>
-              <a:srgbClr val="E5E2DC"/>
-            </a:solidFill>
-            <a:prstDash val="solid"/>
-          </a:ln>
-          <a:effectLst>
-            <a:outerShdw sx="100000" sy="100000" kx="0" ky="0" algn="bl" rotWithShape="0" blurRad="50800" dist="25400" dir="8100000">
-              <a:srgbClr val="000000">
-                <a:alpha val="10000"/>
-              </a:srgbClr>
-            </a:outerShdw>
-          </a:effectLst>
-        </p:spPr>
-      </p:sp>
-      <p:sp>
-        <p:nvSpPr>
-          <p:cNvPr id="14" name="Shape 12"/>
-          <p:cNvSpPr/>
-          <p:nvPr/>
-        </p:nvSpPr>
-        <p:spPr>
-          <a:xfrm>
-            <a:off x="6126480" y="1188720"/>
-            <a:ext cx="2560320" cy="54864"/>
-          </a:xfrm>
-          <a:prstGeom prst="rect">
-            <a:avLst/>
-          </a:prstGeom>
-          <a:solidFill>
-            <a:srgbClr val="2A9D8F"/>
-          </a:solidFill>
-          <a:ln/>
-        </p:spPr>
-      </p:sp>
-      <p:sp>
-        <p:nvSpPr>
-          <p:cNvPr id="15" name="Text 13"/>
-          <p:cNvSpPr/>
-          <p:nvPr/>
-        </p:nvSpPr>
-        <p:spPr>
-          <a:xfrm>
-            <a:off x="6263640" y="1325880"/>
-            <a:ext cx="2286000" cy="365760"/>
-          </a:xfrm>
-          <a:prstGeom prst="rect">
-            <a:avLst/>
-          </a:prstGeom>
-          <a:noFill/>
-          <a:ln/>
-        </p:spPr>
-        <p:txBody>
-          <a:bodyPr wrap="square" rtlCol="0" anchor="ctr"/>
-          <a:lstStyle/>
-          <a:p>
-            <a:pPr indent="0" marL="0">
-              <a:buNone/>
-            </a:pPr>
-            <a:r>
-              <a:rPr lang="en-US" sz="1400" b="1" dirty="0">
-                <a:solidFill>
-                  <a:srgbClr val="1B2A4A"/>
-                </a:solidFill>
-                <a:latin typeface="Calibri" pitchFamily="34" charset="0"/>
-                <a:ea typeface="Calibri" pitchFamily="34" charset="-122"/>
-                <a:cs typeface="Calibri" pitchFamily="34" charset="-120"/>
-              </a:rPr>
-              <a:t>Capacity</a:t>
-            </a:r>
-            <a:endParaRPr lang="en-US" sz="1400" dirty="0"/>
-          </a:p>
-        </p:txBody>
-      </p:sp>
-      <p:sp>
-        <p:nvSpPr>
-          <p:cNvPr id="16" name="Text 14"/>
-          <p:cNvSpPr/>
-          <p:nvPr/>
-        </p:nvSpPr>
-        <p:spPr>
-          <a:xfrm>
-            <a:off x="6263640" y="1737360"/>
-            <a:ext cx="2286000" cy="1097280"/>
-          </a:xfrm>
-          <a:prstGeom prst="rect">
-            <a:avLst/>
-          </a:prstGeom>
-          <a:noFill/>
-          <a:ln/>
-        </p:spPr>
-        <p:txBody>
-          <a:bodyPr wrap="square" rtlCol="0" anchor="t"/>
-          <a:lstStyle/>
-          <a:p>
-            <a:pPr indent="0" marL="0">
-              <a:buNone/>
-            </a:pPr>
-            <a:r>
-              <a:rPr lang="en-US" sz="1100" dirty="0">
-                <a:solidFill>
-                  <a:srgbClr val="3D3A36"/>
-                </a:solidFill>
-                <a:latin typeface="Calibri" pitchFamily="34" charset="0"/>
-                <a:ea typeface="Calibri" pitchFamily="34" charset="-122"/>
-                <a:cs typeface="Calibri" pitchFamily="34" charset="-120"/>
-              </a:rPr>
-              <a:t>Max a container holds. 1cm³=1mL. 1000cm³=1L. 1m³=1000L. Convert before calculating.</a:t>
-            </a:r>
-            <a:endParaRPr lang="en-US" sz="1100" dirty="0"/>
-          </a:p>
-        </p:txBody>
-      </p:sp>
-    </p:spTree>
-  </p:cSld>
-  <p:clrMapOvr>
-    <a:masterClrMapping/>
-  </p:clrMapOvr>
-</p:sld>
-</file>
-
-<file path=ppt/slides/slide4.xml><?xml version="1.0" encoding="utf-8"?>
-<p:sld xmlns:a="http://schemas.openxmlformats.org/drawingml/2006/main" xmlns:r="http://schemas.openxmlformats.org/officeDocument/2006/relationships" xmlns:p="http://schemas.openxmlformats.org/presentationml/2006/main">
-  <p:cSld name="Slide 4">
-    <p:bg>
-      <p:bgPr>
-        <a:solidFill>
-          <a:srgbClr val="1B2A4A"/>
-        </a:solidFill>
-      </p:bgPr>
-    </p:bg>
-    <p:spTree>
-      <p:nvGrpSpPr>
-        <p:cNvPr id="1" name=""/>
-        <p:cNvGrpSpPr/>
-        <p:nvPr/>
-      </p:nvGrpSpPr>
-      <p:grpSpPr>
-        <a:xfrm>
-          <a:off x="0" y="0"/>
-          <a:ext cx="0" cy="0"/>
-          <a:chOff x="0" y="0"/>
-          <a:chExt cx="0" cy="0"/>
-        </a:xfrm>
-      </p:grpSpPr>
-      <p:sp>
-        <p:nvSpPr>
-          <p:cNvPr id="2" name="Shape 0"/>
-          <p:cNvSpPr/>
-          <p:nvPr/>
-        </p:nvSpPr>
-        <p:spPr>
-          <a:xfrm>
-            <a:off x="0" y="0"/>
-            <a:ext cx="109728" cy="5143500"/>
-          </a:xfrm>
-          <a:prstGeom prst="rect">
-            <a:avLst/>
-          </a:prstGeom>
-          <a:solidFill>
-            <a:srgbClr val="E9C46A"/>
-          </a:solidFill>
-          <a:ln/>
-        </p:spPr>
-      </p:sp>
-      <p:sp>
-        <p:nvSpPr>
-          <p:cNvPr id="3" name="Text 1"/>
-          <p:cNvSpPr/>
-          <p:nvPr/>
-        </p:nvSpPr>
-        <p:spPr>
-          <a:xfrm>
-            <a:off x="731520" y="457200"/>
-            <a:ext cx="7772400" cy="731520"/>
+            <a:off x="731520" y="2011680"/>
+            <a:ext cx="7680960" cy="1097280"/>
           </a:xfrm>
           <a:prstGeom prst="rect">
             <a:avLst/>
@@ -2426,7 +2643,7 @@
                 <a:ea typeface="Georgia" pitchFamily="34" charset="-122"/>
                 <a:cs typeface="Georgia" pitchFamily="34" charset="-120"/>
               </a:rPr>
-              <a:t>Key Takeaways</a:t>
+              <a:t>Area</a:t>
             </a:r>
             <a:endParaRPr lang="en-US" sz="3200" dirty="0"/>
           </a:p>
@@ -2434,14 +2651,106 @@
       </p:sp>
       <p:sp>
         <p:nvSpPr>
+          <p:cNvPr id="5" name="Shape 3"/>
+          <p:cNvSpPr/>
+          <p:nvPr/>
+        </p:nvSpPr>
+        <p:spPr>
+          <a:xfrm>
+            <a:off x="731520" y="3200400"/>
+            <a:ext cx="1828800" cy="54864"/>
+          </a:xfrm>
+          <a:prstGeom prst="rect">
+            <a:avLst/>
+          </a:prstGeom>
+          <a:solidFill>
+            <a:srgbClr val="2A9D8F"/>
+          </a:solidFill>
+          <a:ln/>
+        </p:spPr>
+      </p:sp>
+    </p:spTree>
+  </p:cSld>
+  <p:clrMapOvr>
+    <a:masterClrMapping/>
+  </p:clrMapOvr>
+</p:sld>
+</file>
+
+<file path=ppt/slides/slide5.xml><?xml version="1.0" encoding="utf-8"?>
+<p:sld xmlns:a="http://schemas.openxmlformats.org/drawingml/2006/main" xmlns:r="http://schemas.openxmlformats.org/officeDocument/2006/relationships" xmlns:p="http://schemas.openxmlformats.org/presentationml/2006/main">
+  <p:cSld name="Slide 5">
+    <p:bg>
+      <p:bgPr>
+        <a:solidFill>
+          <a:srgbClr val="FAF8F5"/>
+        </a:solidFill>
+      </p:bgPr>
+    </p:bg>
+    <p:spTree>
+      <p:nvGrpSpPr>
+        <p:cNvPr id="1" name=""/>
+        <p:cNvGrpSpPr/>
+        <p:nvPr/>
+      </p:nvGrpSpPr>
+      <p:grpSpPr>
+        <a:xfrm>
+          <a:off x="0" y="0"/>
+          <a:ext cx="0" cy="0"/>
+          <a:chOff x="0" y="0"/>
+          <a:chExt cx="0" cy="0"/>
+        </a:xfrm>
+      </p:grpSpPr>
+      <p:sp>
+        <p:nvSpPr>
+          <p:cNvPr id="2" name="Shape 0"/>
+          <p:cNvSpPr/>
+          <p:nvPr/>
+        </p:nvSpPr>
+        <p:spPr>
+          <a:xfrm>
+            <a:off x="0" y="0"/>
+            <a:ext cx="9144000" cy="822960"/>
+          </a:xfrm>
+          <a:prstGeom prst="rect">
+            <a:avLst/>
+          </a:prstGeom>
+          <a:solidFill>
+            <a:srgbClr val="FFFFFF"/>
+          </a:solidFill>
+          <a:ln/>
+        </p:spPr>
+      </p:sp>
+      <p:sp>
+        <p:nvSpPr>
+          <p:cNvPr id="3" name="Shape 1"/>
+          <p:cNvSpPr/>
+          <p:nvPr/>
+        </p:nvSpPr>
+        <p:spPr>
+          <a:xfrm>
+            <a:off x="0" y="795528"/>
+            <a:ext cx="9144000" cy="27432"/>
+          </a:xfrm>
+          <a:prstGeom prst="rect">
+            <a:avLst/>
+          </a:prstGeom>
+          <a:solidFill>
+            <a:srgbClr val="2A9D8F"/>
+          </a:solidFill>
+          <a:ln/>
+        </p:spPr>
+      </p:sp>
+      <p:sp>
+        <p:nvSpPr>
           <p:cNvPr id="4" name="Text 2"/>
           <p:cNvSpPr/>
           <p:nvPr/>
         </p:nvSpPr>
         <p:spPr>
           <a:xfrm>
-            <a:off x="731520" y="1463040"/>
-            <a:ext cx="7772400" cy="3200400"/>
+            <a:off x="640080" y="91440"/>
+            <a:ext cx="7863840" cy="640080"/>
           </a:xfrm>
           <a:prstGeom prst="rect">
             <a:avLst/>
@@ -2450,125 +2759,910 @@
           <a:ln/>
         </p:spPr>
         <p:txBody>
-          <a:bodyPr wrap="square" rtlCol="0" anchor="t"/>
+          <a:bodyPr wrap="square" lIns="0" tIns="0" rIns="0" bIns="0" rtlCol="0" anchor="ctr"/>
           <a:lstStyle/>
           <a:p>
-            <a:pPr marL="342900" indent="-342900">
-              <a:spcAft>
-                <a:spcPts val="1000"/>
-              </a:spcAft>
-              <a:buSzPct val="100000"/>
-              <a:buChar char="•"/>
+            <a:pPr indent="0" marL="0">
+              <a:buNone/>
             </a:pPr>
             <a:r>
-              <a:rPr lang="en-US" sz="1500" dirty="0">
+              <a:rPr lang="en-US" sz="2200" b="1" dirty="0">
                 <a:solidFill>
-                  <a:srgbClr val="CADCFC"/>
+                  <a:srgbClr val="1B2A4A"/>
                 </a:solidFill>
-                <a:latin typeface="Calibri" pitchFamily="34" charset="0"/>
-                <a:ea typeface="Calibri" pitchFamily="34" charset="-122"/>
-                <a:cs typeface="Calibri" pitchFamily="34" charset="-120"/>
+                <a:latin typeface="Georgia" pitchFamily="34" charset="0"/>
+                <a:ea typeface="Georgia" pitchFamily="34" charset="-122"/>
+                <a:cs typeface="Georgia" pitchFamily="34" charset="-120"/>
               </a:rPr>
-              <a:t>Perimeter = around (units). Area = inside 2D (square units). Volume = inside 3D (cubic units)</a:t>
+              <a:t>Area Formulas</a:t>
             </a:r>
-            <a:endParaRPr lang="en-US" sz="1500" dirty="0"/>
-          </a:p>
-          <a:p>
-            <a:pPr marL="342900" indent="-342900">
-              <a:spcAft>
-                <a:spcPts val="1000"/>
-              </a:spcAft>
-              <a:buSzPct val="100000"/>
-              <a:buChar char="•"/>
-            </a:pPr>
-            <a:r>
-              <a:rPr lang="en-US" sz="1500" dirty="0">
-                <a:solidFill>
-                  <a:srgbClr val="CADCFC"/>
-                </a:solidFill>
-                <a:latin typeface="Calibri" pitchFamily="34" charset="0"/>
-                <a:ea typeface="Calibri" pitchFamily="34" charset="-122"/>
-                <a:cs typeface="Calibri" pitchFamily="34" charset="-120"/>
-              </a:rPr>
-              <a:t>Rectangle: P=2(l+w), A=l×w. Triangle: A=½bh</a:t>
-            </a:r>
-            <a:endParaRPr lang="en-US" sz="1500" dirty="0"/>
-          </a:p>
-          <a:p>
-            <a:pPr marL="342900" indent="-342900">
-              <a:spcAft>
-                <a:spcPts val="1000"/>
-              </a:spcAft>
-              <a:buSzPct val="100000"/>
-              <a:buChar char="•"/>
-            </a:pPr>
-            <a:r>
-              <a:rPr lang="en-US" sz="1500" dirty="0">
-                <a:solidFill>
-                  <a:srgbClr val="CADCFC"/>
-                </a:solidFill>
-                <a:latin typeface="Calibri" pitchFamily="34" charset="0"/>
-                <a:ea typeface="Calibri" pitchFamily="34" charset="-122"/>
-                <a:cs typeface="Calibri" pitchFamily="34" charset="-120"/>
-              </a:rPr>
-              <a:t>Cuboid: SA=2lw+2lh+2wh, V=l×w×h</a:t>
-            </a:r>
-            <a:endParaRPr lang="en-US" sz="1500" dirty="0"/>
-          </a:p>
-          <a:p>
-            <a:pPr marL="342900" indent="-342900">
-              <a:spcAft>
-                <a:spcPts val="1000"/>
-              </a:spcAft>
-              <a:buSzPct val="100000"/>
-              <a:buChar char="•"/>
-            </a:pPr>
-            <a:r>
-              <a:rPr lang="en-US" sz="1500" dirty="0">
-                <a:solidFill>
-                  <a:srgbClr val="CADCFC"/>
-                </a:solidFill>
-                <a:latin typeface="Calibri" pitchFamily="34" charset="0"/>
-                <a:ea typeface="Calibri" pitchFamily="34" charset="-122"/>
-                <a:cs typeface="Calibri" pitchFamily="34" charset="-120"/>
-              </a:rPr>
-              <a:t>1 cm³ = 1 mL. 1000 mL = 1 L</a:t>
-            </a:r>
-            <a:endParaRPr lang="en-US" sz="1500" dirty="0"/>
-          </a:p>
-          <a:p>
-            <a:pPr marL="342900" indent="-342900">
-              <a:spcAft>
-                <a:spcPts val="1000"/>
-              </a:spcAft>
-              <a:buSzPct val="100000"/>
-              <a:buChar char="•"/>
-            </a:pPr>
-            <a:r>
-              <a:rPr lang="en-US" sz="1500" dirty="0">
-                <a:solidFill>
-                  <a:srgbClr val="CADCFC"/>
-                </a:solidFill>
-                <a:latin typeface="Calibri" pitchFamily="34" charset="0"/>
-                <a:ea typeface="Calibri" pitchFamily="34" charset="-122"/>
-                <a:cs typeface="Calibri" pitchFamily="34" charset="-120"/>
-              </a:rPr>
-              <a:t>Compound shapes: split, calculate parts, combine</a:t>
-            </a:r>
-            <a:endParaRPr lang="en-US" sz="1500" dirty="0"/>
+            <a:endParaRPr lang="en-US" sz="2200" dirty="0"/>
           </a:p>
         </p:txBody>
       </p:sp>
-      <p:sp>
-        <p:nvSpPr>
-          <p:cNvPr id="5" name="Text 3"/>
+      <p:graphicFrame>
+        <p:nvGraphicFramePr>
+          <p:cNvPr id="6" name="Table 0"/>
+          <p:cNvGraphicFramePr>
+            <a:graphicFrameLocks noGrp="1"/>
+          </p:cNvGraphicFramePr>
+          <p:nvPr>
+            <p:extLst>
+              <p:ext uri="{D42A27DB-BD31-4B8C-83A1-F6EECF244321}">
+                <p14:modId xmlns:p14="http://schemas.microsoft.com/office/powerpoint/2010/main" val="1579011935"/>
+              </p:ext>
+            </p:extLst>
+          </p:nvPr>
+        </p:nvGraphicFramePr>
+        <p:xfrm>
+          <a:off x="640080" y="1051560"/>
+          <a:ext cx="7863840" cy="914400"/>
+        </p:xfrm>
+        <a:graphic>
+          <a:graphicData uri="http://schemas.openxmlformats.org/drawingml/2006/table">
+            <a:tbl>
+              <a:tblPr/>
+              <a:tblGrid>
+                <a:gridCol w="3931920"/>
+                <a:gridCol w="3931920"/>
+              </a:tblGrid>
+              <a:tr h="502920">
+                <a:tc>
+                  <a:txBody>
+                    <a:bodyPr/>
+                    <a:lstStyle/>
+                    <a:p>
+                      <a:pPr indent="0" marL="0">
+                        <a:buNone/>
+                      </a:pPr>
+                      <a:r>
+                        <a:rPr lang="en-US" sz="1300" b="1" dirty="0">
+                          <a:solidFill>
+                            <a:srgbClr val="FFFFFF"/>
+                          </a:solidFill>
+                          <a:latin typeface="Calibri" pitchFamily="34" charset="0"/>
+                          <a:ea typeface="Calibri" pitchFamily="34" charset="-122"/>
+                          <a:cs typeface="Calibri" pitchFamily="34" charset="-120"/>
+                        </a:rPr>
+                        <a:t>Shape</a:t>
+                      </a:r>
+                      <a:endParaRPr lang="en-US" sz="1300" dirty="0">
+                        <a:latin typeface="Calibri" charset="0"/>
+                        <a:ea typeface="Calibri" charset="0"/>
+                        <a:cs typeface="Calibri" charset="0"/>
+                      </a:endParaRPr>
+                    </a:p>
+                  </a:txBody>
+                  <a:tcPr marL="91440" marR="91440" marT="45720" marB="45720">
+                    <a:lnL w="6350" cap="flat" cmpd="sng" algn="ctr">
+                      <a:solidFill>
+                        <a:srgbClr val="E5E2DC"/>
+                      </a:solidFill>
+                      <a:prstDash val="solid"/>
+                      <a:round/>
+                      <a:headEnd type="none" w="med" len="med"/>
+                      <a:tailEnd type="none" w="med" len="med"/>
+                    </a:lnL>
+                    <a:lnR w="6350" cap="flat" cmpd="sng" algn="ctr">
+                      <a:solidFill>
+                        <a:srgbClr val="E5E2DC"/>
+                      </a:solidFill>
+                      <a:prstDash val="solid"/>
+                      <a:round/>
+                      <a:headEnd type="none" w="med" len="med"/>
+                      <a:tailEnd type="none" w="med" len="med"/>
+                    </a:lnR>
+                    <a:lnT w="6350" cap="flat" cmpd="sng" algn="ctr">
+                      <a:solidFill>
+                        <a:srgbClr val="E5E2DC"/>
+                      </a:solidFill>
+                      <a:prstDash val="solid"/>
+                      <a:round/>
+                      <a:headEnd type="none" w="med" len="med"/>
+                      <a:tailEnd type="none" w="med" len="med"/>
+                    </a:lnT>
+                    <a:lnB w="6350" cap="flat" cmpd="sng" algn="ctr">
+                      <a:solidFill>
+                        <a:srgbClr val="E5E2DC"/>
+                      </a:solidFill>
+                      <a:prstDash val="solid"/>
+                      <a:round/>
+                      <a:headEnd type="none" w="med" len="med"/>
+                      <a:tailEnd type="none" w="med" len="med"/>
+                    </a:lnB>
+                    <a:solidFill>
+                      <a:srgbClr val="2A9D8F"/>
+                    </a:solidFill>
+                  </a:tcPr>
+                </a:tc>
+                <a:tc>
+                  <a:txBody>
+                    <a:bodyPr/>
+                    <a:lstStyle/>
+                    <a:p>
+                      <a:pPr indent="0" marL="0">
+                        <a:buNone/>
+                      </a:pPr>
+                      <a:r>
+                        <a:rPr lang="en-US" sz="1300" b="1" dirty="0">
+                          <a:solidFill>
+                            <a:srgbClr val="FFFFFF"/>
+                          </a:solidFill>
+                          <a:latin typeface="Calibri" pitchFamily="34" charset="0"/>
+                          <a:ea typeface="Calibri" pitchFamily="34" charset="-122"/>
+                          <a:cs typeface="Calibri" pitchFamily="34" charset="-120"/>
+                        </a:rPr>
+                        <a:t>Formula</a:t>
+                      </a:r>
+                      <a:endParaRPr lang="en-US" sz="1300" dirty="0">
+                        <a:latin typeface="Calibri" charset="0"/>
+                        <a:ea typeface="Calibri" charset="0"/>
+                        <a:cs typeface="Calibri" charset="0"/>
+                      </a:endParaRPr>
+                    </a:p>
+                  </a:txBody>
+                  <a:tcPr marL="91440" marR="91440" marT="45720" marB="45720">
+                    <a:lnL w="6350" cap="flat" cmpd="sng" algn="ctr">
+                      <a:solidFill>
+                        <a:srgbClr val="E5E2DC"/>
+                      </a:solidFill>
+                      <a:prstDash val="solid"/>
+                      <a:round/>
+                      <a:headEnd type="none" w="med" len="med"/>
+                      <a:tailEnd type="none" w="med" len="med"/>
+                    </a:lnL>
+                    <a:lnR w="6350" cap="flat" cmpd="sng" algn="ctr">
+                      <a:solidFill>
+                        <a:srgbClr val="E5E2DC"/>
+                      </a:solidFill>
+                      <a:prstDash val="solid"/>
+                      <a:round/>
+                      <a:headEnd type="none" w="med" len="med"/>
+                      <a:tailEnd type="none" w="med" len="med"/>
+                    </a:lnR>
+                    <a:lnT w="6350" cap="flat" cmpd="sng" algn="ctr">
+                      <a:solidFill>
+                        <a:srgbClr val="E5E2DC"/>
+                      </a:solidFill>
+                      <a:prstDash val="solid"/>
+                      <a:round/>
+                      <a:headEnd type="none" w="med" len="med"/>
+                      <a:tailEnd type="none" w="med" len="med"/>
+                    </a:lnT>
+                    <a:lnB w="6350" cap="flat" cmpd="sng" algn="ctr">
+                      <a:solidFill>
+                        <a:srgbClr val="E5E2DC"/>
+                      </a:solidFill>
+                      <a:prstDash val="solid"/>
+                      <a:round/>
+                      <a:headEnd type="none" w="med" len="med"/>
+                      <a:tailEnd type="none" w="med" len="med"/>
+                    </a:lnB>
+                    <a:solidFill>
+                      <a:srgbClr val="2A9D8F"/>
+                    </a:solidFill>
+                  </a:tcPr>
+                </a:tc>
+              </a:tr>
+              <a:tr h="502920">
+                <a:tc>
+                  <a:txBody>
+                    <a:bodyPr/>
+                    <a:lstStyle/>
+                    <a:p>
+                      <a:pPr indent="0" marL="0">
+                        <a:buNone/>
+                      </a:pPr>
+                      <a:r>
+                        <a:rPr lang="en-US" sz="1300" dirty="0">
+                          <a:solidFill>
+                            <a:srgbClr val="3D3A36"/>
+                          </a:solidFill>
+                          <a:latin typeface="Calibri" pitchFamily="34" charset="0"/>
+                          <a:ea typeface="Calibri" pitchFamily="34" charset="-122"/>
+                          <a:cs typeface="Calibri" pitchFamily="34" charset="-120"/>
+                        </a:rPr>
+                        <a:t>Square</a:t>
+                      </a:r>
+                      <a:endParaRPr lang="en-US" sz="1300" dirty="0">
+                        <a:latin typeface="Calibri" charset="0"/>
+                        <a:ea typeface="Calibri" charset="0"/>
+                        <a:cs typeface="Calibri" charset="0"/>
+                      </a:endParaRPr>
+                    </a:p>
+                  </a:txBody>
+                  <a:tcPr marL="91440" marR="91440" marT="45720" marB="45720">
+                    <a:lnL w="6350" cap="flat" cmpd="sng" algn="ctr">
+                      <a:solidFill>
+                        <a:srgbClr val="E5E2DC"/>
+                      </a:solidFill>
+                      <a:prstDash val="solid"/>
+                      <a:round/>
+                      <a:headEnd type="none" w="med" len="med"/>
+                      <a:tailEnd type="none" w="med" len="med"/>
+                    </a:lnL>
+                    <a:lnR w="6350" cap="flat" cmpd="sng" algn="ctr">
+                      <a:solidFill>
+                        <a:srgbClr val="E5E2DC"/>
+                      </a:solidFill>
+                      <a:prstDash val="solid"/>
+                      <a:round/>
+                      <a:headEnd type="none" w="med" len="med"/>
+                      <a:tailEnd type="none" w="med" len="med"/>
+                    </a:lnR>
+                    <a:lnT w="6350" cap="flat" cmpd="sng" algn="ctr">
+                      <a:solidFill>
+                        <a:srgbClr val="E5E2DC"/>
+                      </a:solidFill>
+                      <a:prstDash val="solid"/>
+                      <a:round/>
+                      <a:headEnd type="none" w="med" len="med"/>
+                      <a:tailEnd type="none" w="med" len="med"/>
+                    </a:lnT>
+                    <a:lnB w="6350" cap="flat" cmpd="sng" algn="ctr">
+                      <a:solidFill>
+                        <a:srgbClr val="E5E2DC"/>
+                      </a:solidFill>
+                      <a:prstDash val="solid"/>
+                      <a:round/>
+                      <a:headEnd type="none" w="med" len="med"/>
+                      <a:tailEnd type="none" w="med" len="med"/>
+                    </a:lnB>
+                  </a:tcPr>
+                </a:tc>
+                <a:tc>
+                  <a:txBody>
+                    <a:bodyPr/>
+                    <a:lstStyle/>
+                    <a:p>
+                      <a:pPr indent="0" marL="0">
+                        <a:buNone/>
+                      </a:pPr>
+                      <a:r>
+                        <a:rPr lang="en-US" sz="1300" dirty="0">
+                          <a:solidFill>
+                            <a:srgbClr val="3D3A36"/>
+                          </a:solidFill>
+                          <a:latin typeface="Calibri" pitchFamily="34" charset="0"/>
+                          <a:ea typeface="Calibri" pitchFamily="34" charset="-122"/>
+                          <a:cs typeface="Calibri" pitchFamily="34" charset="-120"/>
+                        </a:rPr>
+                        <a:t>A = s²</a:t>
+                      </a:r>
+                      <a:endParaRPr lang="en-US" sz="1300" dirty="0">
+                        <a:latin typeface="Calibri" charset="0"/>
+                        <a:ea typeface="Calibri" charset="0"/>
+                        <a:cs typeface="Calibri" charset="0"/>
+                      </a:endParaRPr>
+                    </a:p>
+                  </a:txBody>
+                  <a:tcPr marL="91440" marR="91440" marT="45720" marB="45720">
+                    <a:lnL w="6350" cap="flat" cmpd="sng" algn="ctr">
+                      <a:solidFill>
+                        <a:srgbClr val="E5E2DC"/>
+                      </a:solidFill>
+                      <a:prstDash val="solid"/>
+                      <a:round/>
+                      <a:headEnd type="none" w="med" len="med"/>
+                      <a:tailEnd type="none" w="med" len="med"/>
+                    </a:lnL>
+                    <a:lnR w="6350" cap="flat" cmpd="sng" algn="ctr">
+                      <a:solidFill>
+                        <a:srgbClr val="E5E2DC"/>
+                      </a:solidFill>
+                      <a:prstDash val="solid"/>
+                      <a:round/>
+                      <a:headEnd type="none" w="med" len="med"/>
+                      <a:tailEnd type="none" w="med" len="med"/>
+                    </a:lnR>
+                    <a:lnT w="6350" cap="flat" cmpd="sng" algn="ctr">
+                      <a:solidFill>
+                        <a:srgbClr val="E5E2DC"/>
+                      </a:solidFill>
+                      <a:prstDash val="solid"/>
+                      <a:round/>
+                      <a:headEnd type="none" w="med" len="med"/>
+                      <a:tailEnd type="none" w="med" len="med"/>
+                    </a:lnT>
+                    <a:lnB w="6350" cap="flat" cmpd="sng" algn="ctr">
+                      <a:solidFill>
+                        <a:srgbClr val="E5E2DC"/>
+                      </a:solidFill>
+                      <a:prstDash val="solid"/>
+                      <a:round/>
+                      <a:headEnd type="none" w="med" len="med"/>
+                      <a:tailEnd type="none" w="med" len="med"/>
+                    </a:lnB>
+                  </a:tcPr>
+                </a:tc>
+              </a:tr>
+              <a:tr h="502920">
+                <a:tc>
+                  <a:txBody>
+                    <a:bodyPr/>
+                    <a:lstStyle/>
+                    <a:p>
+                      <a:pPr indent="0" marL="0">
+                        <a:buNone/>
+                      </a:pPr>
+                      <a:r>
+                        <a:rPr lang="en-US" sz="1300" dirty="0">
+                          <a:solidFill>
+                            <a:srgbClr val="3D3A36"/>
+                          </a:solidFill>
+                          <a:latin typeface="Calibri" pitchFamily="34" charset="0"/>
+                          <a:ea typeface="Calibri" pitchFamily="34" charset="-122"/>
+                          <a:cs typeface="Calibri" pitchFamily="34" charset="-120"/>
+                        </a:rPr>
+                        <a:t>Rectangle</a:t>
+                      </a:r>
+                      <a:endParaRPr lang="en-US" sz="1300" dirty="0">
+                        <a:latin typeface="Calibri" charset="0"/>
+                        <a:ea typeface="Calibri" charset="0"/>
+                        <a:cs typeface="Calibri" charset="0"/>
+                      </a:endParaRPr>
+                    </a:p>
+                  </a:txBody>
+                  <a:tcPr marL="91440" marR="91440" marT="45720" marB="45720">
+                    <a:lnL w="6350" cap="flat" cmpd="sng" algn="ctr">
+                      <a:solidFill>
+                        <a:srgbClr val="E5E2DC"/>
+                      </a:solidFill>
+                      <a:prstDash val="solid"/>
+                      <a:round/>
+                      <a:headEnd type="none" w="med" len="med"/>
+                      <a:tailEnd type="none" w="med" len="med"/>
+                    </a:lnL>
+                    <a:lnR w="6350" cap="flat" cmpd="sng" algn="ctr">
+                      <a:solidFill>
+                        <a:srgbClr val="E5E2DC"/>
+                      </a:solidFill>
+                      <a:prstDash val="solid"/>
+                      <a:round/>
+                      <a:headEnd type="none" w="med" len="med"/>
+                      <a:tailEnd type="none" w="med" len="med"/>
+                    </a:lnR>
+                    <a:lnT w="6350" cap="flat" cmpd="sng" algn="ctr">
+                      <a:solidFill>
+                        <a:srgbClr val="E5E2DC"/>
+                      </a:solidFill>
+                      <a:prstDash val="solid"/>
+                      <a:round/>
+                      <a:headEnd type="none" w="med" len="med"/>
+                      <a:tailEnd type="none" w="med" len="med"/>
+                    </a:lnT>
+                    <a:lnB w="6350" cap="flat" cmpd="sng" algn="ctr">
+                      <a:solidFill>
+                        <a:srgbClr val="E5E2DC"/>
+                      </a:solidFill>
+                      <a:prstDash val="solid"/>
+                      <a:round/>
+                      <a:headEnd type="none" w="med" len="med"/>
+                      <a:tailEnd type="none" w="med" len="med"/>
+                    </a:lnB>
+                  </a:tcPr>
+                </a:tc>
+                <a:tc>
+                  <a:txBody>
+                    <a:bodyPr/>
+                    <a:lstStyle/>
+                    <a:p>
+                      <a:pPr indent="0" marL="0">
+                        <a:buNone/>
+                      </a:pPr>
+                      <a:r>
+                        <a:rPr lang="en-US" sz="1300" dirty="0">
+                          <a:solidFill>
+                            <a:srgbClr val="3D3A36"/>
+                          </a:solidFill>
+                          <a:latin typeface="Calibri" pitchFamily="34" charset="0"/>
+                          <a:ea typeface="Calibri" pitchFamily="34" charset="-122"/>
+                          <a:cs typeface="Calibri" pitchFamily="34" charset="-120"/>
+                        </a:rPr>
+                        <a:t>A = l×w</a:t>
+                      </a:r>
+                      <a:endParaRPr lang="en-US" sz="1300" dirty="0">
+                        <a:latin typeface="Calibri" charset="0"/>
+                        <a:ea typeface="Calibri" charset="0"/>
+                        <a:cs typeface="Calibri" charset="0"/>
+                      </a:endParaRPr>
+                    </a:p>
+                  </a:txBody>
+                  <a:tcPr marL="91440" marR="91440" marT="45720" marB="45720">
+                    <a:lnL w="6350" cap="flat" cmpd="sng" algn="ctr">
+                      <a:solidFill>
+                        <a:srgbClr val="E5E2DC"/>
+                      </a:solidFill>
+                      <a:prstDash val="solid"/>
+                      <a:round/>
+                      <a:headEnd type="none" w="med" len="med"/>
+                      <a:tailEnd type="none" w="med" len="med"/>
+                    </a:lnL>
+                    <a:lnR w="6350" cap="flat" cmpd="sng" algn="ctr">
+                      <a:solidFill>
+                        <a:srgbClr val="E5E2DC"/>
+                      </a:solidFill>
+                      <a:prstDash val="solid"/>
+                      <a:round/>
+                      <a:headEnd type="none" w="med" len="med"/>
+                      <a:tailEnd type="none" w="med" len="med"/>
+                    </a:lnR>
+                    <a:lnT w="6350" cap="flat" cmpd="sng" algn="ctr">
+                      <a:solidFill>
+                        <a:srgbClr val="E5E2DC"/>
+                      </a:solidFill>
+                      <a:prstDash val="solid"/>
+                      <a:round/>
+                      <a:headEnd type="none" w="med" len="med"/>
+                      <a:tailEnd type="none" w="med" len="med"/>
+                    </a:lnT>
+                    <a:lnB w="6350" cap="flat" cmpd="sng" algn="ctr">
+                      <a:solidFill>
+                        <a:srgbClr val="E5E2DC"/>
+                      </a:solidFill>
+                      <a:prstDash val="solid"/>
+                      <a:round/>
+                      <a:headEnd type="none" w="med" len="med"/>
+                      <a:tailEnd type="none" w="med" len="med"/>
+                    </a:lnB>
+                  </a:tcPr>
+                </a:tc>
+              </a:tr>
+              <a:tr h="502920">
+                <a:tc>
+                  <a:txBody>
+                    <a:bodyPr/>
+                    <a:lstStyle/>
+                    <a:p>
+                      <a:pPr indent="0" marL="0">
+                        <a:buNone/>
+                      </a:pPr>
+                      <a:r>
+                        <a:rPr lang="en-US" sz="1300" dirty="0">
+                          <a:solidFill>
+                            <a:srgbClr val="3D3A36"/>
+                          </a:solidFill>
+                          <a:latin typeface="Calibri" pitchFamily="34" charset="0"/>
+                          <a:ea typeface="Calibri" pitchFamily="34" charset="-122"/>
+                          <a:cs typeface="Calibri" pitchFamily="34" charset="-120"/>
+                        </a:rPr>
+                        <a:t>Triangle</a:t>
+                      </a:r>
+                      <a:endParaRPr lang="en-US" sz="1300" dirty="0">
+                        <a:latin typeface="Calibri" charset="0"/>
+                        <a:ea typeface="Calibri" charset="0"/>
+                        <a:cs typeface="Calibri" charset="0"/>
+                      </a:endParaRPr>
+                    </a:p>
+                  </a:txBody>
+                  <a:tcPr marL="91440" marR="91440" marT="45720" marB="45720">
+                    <a:lnL w="6350" cap="flat" cmpd="sng" algn="ctr">
+                      <a:solidFill>
+                        <a:srgbClr val="E5E2DC"/>
+                      </a:solidFill>
+                      <a:prstDash val="solid"/>
+                      <a:round/>
+                      <a:headEnd type="none" w="med" len="med"/>
+                      <a:tailEnd type="none" w="med" len="med"/>
+                    </a:lnL>
+                    <a:lnR w="6350" cap="flat" cmpd="sng" algn="ctr">
+                      <a:solidFill>
+                        <a:srgbClr val="E5E2DC"/>
+                      </a:solidFill>
+                      <a:prstDash val="solid"/>
+                      <a:round/>
+                      <a:headEnd type="none" w="med" len="med"/>
+                      <a:tailEnd type="none" w="med" len="med"/>
+                    </a:lnR>
+                    <a:lnT w="6350" cap="flat" cmpd="sng" algn="ctr">
+                      <a:solidFill>
+                        <a:srgbClr val="E5E2DC"/>
+                      </a:solidFill>
+                      <a:prstDash val="solid"/>
+                      <a:round/>
+                      <a:headEnd type="none" w="med" len="med"/>
+                      <a:tailEnd type="none" w="med" len="med"/>
+                    </a:lnT>
+                    <a:lnB w="6350" cap="flat" cmpd="sng" algn="ctr">
+                      <a:solidFill>
+                        <a:srgbClr val="E5E2DC"/>
+                      </a:solidFill>
+                      <a:prstDash val="solid"/>
+                      <a:round/>
+                      <a:headEnd type="none" w="med" len="med"/>
+                      <a:tailEnd type="none" w="med" len="med"/>
+                    </a:lnB>
+                  </a:tcPr>
+                </a:tc>
+                <a:tc>
+                  <a:txBody>
+                    <a:bodyPr/>
+                    <a:lstStyle/>
+                    <a:p>
+                      <a:pPr indent="0" marL="0">
+                        <a:buNone/>
+                      </a:pPr>
+                      <a:r>
+                        <a:rPr lang="en-US" sz="1300" dirty="0">
+                          <a:solidFill>
+                            <a:srgbClr val="3D3A36"/>
+                          </a:solidFill>
+                          <a:latin typeface="Calibri" pitchFamily="34" charset="0"/>
+                          <a:ea typeface="Calibri" pitchFamily="34" charset="-122"/>
+                          <a:cs typeface="Calibri" pitchFamily="34" charset="-120"/>
+                        </a:rPr>
+                        <a:t>A = ½bh</a:t>
+                      </a:r>
+                      <a:endParaRPr lang="en-US" sz="1300" dirty="0">
+                        <a:latin typeface="Calibri" charset="0"/>
+                        <a:ea typeface="Calibri" charset="0"/>
+                        <a:cs typeface="Calibri" charset="0"/>
+                      </a:endParaRPr>
+                    </a:p>
+                  </a:txBody>
+                  <a:tcPr marL="91440" marR="91440" marT="45720" marB="45720">
+                    <a:lnL w="6350" cap="flat" cmpd="sng" algn="ctr">
+                      <a:solidFill>
+                        <a:srgbClr val="E5E2DC"/>
+                      </a:solidFill>
+                      <a:prstDash val="solid"/>
+                      <a:round/>
+                      <a:headEnd type="none" w="med" len="med"/>
+                      <a:tailEnd type="none" w="med" len="med"/>
+                    </a:lnL>
+                    <a:lnR w="6350" cap="flat" cmpd="sng" algn="ctr">
+                      <a:solidFill>
+                        <a:srgbClr val="E5E2DC"/>
+                      </a:solidFill>
+                      <a:prstDash val="solid"/>
+                      <a:round/>
+                      <a:headEnd type="none" w="med" len="med"/>
+                      <a:tailEnd type="none" w="med" len="med"/>
+                    </a:lnR>
+                    <a:lnT w="6350" cap="flat" cmpd="sng" algn="ctr">
+                      <a:solidFill>
+                        <a:srgbClr val="E5E2DC"/>
+                      </a:solidFill>
+                      <a:prstDash val="solid"/>
+                      <a:round/>
+                      <a:headEnd type="none" w="med" len="med"/>
+                      <a:tailEnd type="none" w="med" len="med"/>
+                    </a:lnT>
+                    <a:lnB w="6350" cap="flat" cmpd="sng" algn="ctr">
+                      <a:solidFill>
+                        <a:srgbClr val="E5E2DC"/>
+                      </a:solidFill>
+                      <a:prstDash val="solid"/>
+                      <a:round/>
+                      <a:headEnd type="none" w="med" len="med"/>
+                      <a:tailEnd type="none" w="med" len="med"/>
+                    </a:lnB>
+                  </a:tcPr>
+                </a:tc>
+              </a:tr>
+              <a:tr h="502920">
+                <a:tc>
+                  <a:txBody>
+                    <a:bodyPr/>
+                    <a:lstStyle/>
+                    <a:p>
+                      <a:pPr indent="0" marL="0">
+                        <a:buNone/>
+                      </a:pPr>
+                      <a:r>
+                        <a:rPr lang="en-US" sz="1300" dirty="0">
+                          <a:solidFill>
+                            <a:srgbClr val="3D3A36"/>
+                          </a:solidFill>
+                          <a:latin typeface="Calibri" pitchFamily="34" charset="0"/>
+                          <a:ea typeface="Calibri" pitchFamily="34" charset="-122"/>
+                          <a:cs typeface="Calibri" pitchFamily="34" charset="-120"/>
+                        </a:rPr>
+                        <a:t>Parallelogram</a:t>
+                      </a:r>
+                      <a:endParaRPr lang="en-US" sz="1300" dirty="0">
+                        <a:latin typeface="Calibri" charset="0"/>
+                        <a:ea typeface="Calibri" charset="0"/>
+                        <a:cs typeface="Calibri" charset="0"/>
+                      </a:endParaRPr>
+                    </a:p>
+                  </a:txBody>
+                  <a:tcPr marL="91440" marR="91440" marT="45720" marB="45720">
+                    <a:lnL w="6350" cap="flat" cmpd="sng" algn="ctr">
+                      <a:solidFill>
+                        <a:srgbClr val="E5E2DC"/>
+                      </a:solidFill>
+                      <a:prstDash val="solid"/>
+                      <a:round/>
+                      <a:headEnd type="none" w="med" len="med"/>
+                      <a:tailEnd type="none" w="med" len="med"/>
+                    </a:lnL>
+                    <a:lnR w="6350" cap="flat" cmpd="sng" algn="ctr">
+                      <a:solidFill>
+                        <a:srgbClr val="E5E2DC"/>
+                      </a:solidFill>
+                      <a:prstDash val="solid"/>
+                      <a:round/>
+                      <a:headEnd type="none" w="med" len="med"/>
+                      <a:tailEnd type="none" w="med" len="med"/>
+                    </a:lnR>
+                    <a:lnT w="6350" cap="flat" cmpd="sng" algn="ctr">
+                      <a:solidFill>
+                        <a:srgbClr val="E5E2DC"/>
+                      </a:solidFill>
+                      <a:prstDash val="solid"/>
+                      <a:round/>
+                      <a:headEnd type="none" w="med" len="med"/>
+                      <a:tailEnd type="none" w="med" len="med"/>
+                    </a:lnT>
+                    <a:lnB w="6350" cap="flat" cmpd="sng" algn="ctr">
+                      <a:solidFill>
+                        <a:srgbClr val="E5E2DC"/>
+                      </a:solidFill>
+                      <a:prstDash val="solid"/>
+                      <a:round/>
+                      <a:headEnd type="none" w="med" len="med"/>
+                      <a:tailEnd type="none" w="med" len="med"/>
+                    </a:lnB>
+                  </a:tcPr>
+                </a:tc>
+                <a:tc>
+                  <a:txBody>
+                    <a:bodyPr/>
+                    <a:lstStyle/>
+                    <a:p>
+                      <a:pPr indent="0" marL="0">
+                        <a:buNone/>
+                      </a:pPr>
+                      <a:r>
+                        <a:rPr lang="en-US" sz="1300" dirty="0">
+                          <a:solidFill>
+                            <a:srgbClr val="3D3A36"/>
+                          </a:solidFill>
+                          <a:latin typeface="Calibri" pitchFamily="34" charset="0"/>
+                          <a:ea typeface="Calibri" pitchFamily="34" charset="-122"/>
+                          <a:cs typeface="Calibri" pitchFamily="34" charset="-120"/>
+                        </a:rPr>
+                        <a:t>A = bh</a:t>
+                      </a:r>
+                      <a:endParaRPr lang="en-US" sz="1300" dirty="0">
+                        <a:latin typeface="Calibri" charset="0"/>
+                        <a:ea typeface="Calibri" charset="0"/>
+                        <a:cs typeface="Calibri" charset="0"/>
+                      </a:endParaRPr>
+                    </a:p>
+                  </a:txBody>
+                  <a:tcPr marL="91440" marR="91440" marT="45720" marB="45720">
+                    <a:lnL w="6350" cap="flat" cmpd="sng" algn="ctr">
+                      <a:solidFill>
+                        <a:srgbClr val="E5E2DC"/>
+                      </a:solidFill>
+                      <a:prstDash val="solid"/>
+                      <a:round/>
+                      <a:headEnd type="none" w="med" len="med"/>
+                      <a:tailEnd type="none" w="med" len="med"/>
+                    </a:lnL>
+                    <a:lnR w="6350" cap="flat" cmpd="sng" algn="ctr">
+                      <a:solidFill>
+                        <a:srgbClr val="E5E2DC"/>
+                      </a:solidFill>
+                      <a:prstDash val="solid"/>
+                      <a:round/>
+                      <a:headEnd type="none" w="med" len="med"/>
+                      <a:tailEnd type="none" w="med" len="med"/>
+                    </a:lnR>
+                    <a:lnT w="6350" cap="flat" cmpd="sng" algn="ctr">
+                      <a:solidFill>
+                        <a:srgbClr val="E5E2DC"/>
+                      </a:solidFill>
+                      <a:prstDash val="solid"/>
+                      <a:round/>
+                      <a:headEnd type="none" w="med" len="med"/>
+                      <a:tailEnd type="none" w="med" len="med"/>
+                    </a:lnT>
+                    <a:lnB w="6350" cap="flat" cmpd="sng" algn="ctr">
+                      <a:solidFill>
+                        <a:srgbClr val="E5E2DC"/>
+                      </a:solidFill>
+                      <a:prstDash val="solid"/>
+                      <a:round/>
+                      <a:headEnd type="none" w="med" len="med"/>
+                      <a:tailEnd type="none" w="med" len="med"/>
+                    </a:lnB>
+                  </a:tcPr>
+                </a:tc>
+              </a:tr>
+              <a:tr h="502920">
+                <a:tc>
+                  <a:txBody>
+                    <a:bodyPr/>
+                    <a:lstStyle/>
+                    <a:p>
+                      <a:pPr indent="0" marL="0">
+                        <a:buNone/>
+                      </a:pPr>
+                      <a:r>
+                        <a:rPr lang="en-US" sz="1300" dirty="0">
+                          <a:solidFill>
+                            <a:srgbClr val="3D3A36"/>
+                          </a:solidFill>
+                          <a:latin typeface="Calibri" pitchFamily="34" charset="0"/>
+                          <a:ea typeface="Calibri" pitchFamily="34" charset="-122"/>
+                          <a:cs typeface="Calibri" pitchFamily="34" charset="-120"/>
+                        </a:rPr>
+                        <a:t>Circle</a:t>
+                      </a:r>
+                      <a:endParaRPr lang="en-US" sz="1300" dirty="0">
+                        <a:latin typeface="Calibri" charset="0"/>
+                        <a:ea typeface="Calibri" charset="0"/>
+                        <a:cs typeface="Calibri" charset="0"/>
+                      </a:endParaRPr>
+                    </a:p>
+                  </a:txBody>
+                  <a:tcPr marL="91440" marR="91440" marT="45720" marB="45720">
+                    <a:lnL w="6350" cap="flat" cmpd="sng" algn="ctr">
+                      <a:solidFill>
+                        <a:srgbClr val="E5E2DC"/>
+                      </a:solidFill>
+                      <a:prstDash val="solid"/>
+                      <a:round/>
+                      <a:headEnd type="none" w="med" len="med"/>
+                      <a:tailEnd type="none" w="med" len="med"/>
+                    </a:lnL>
+                    <a:lnR w="6350" cap="flat" cmpd="sng" algn="ctr">
+                      <a:solidFill>
+                        <a:srgbClr val="E5E2DC"/>
+                      </a:solidFill>
+                      <a:prstDash val="solid"/>
+                      <a:round/>
+                      <a:headEnd type="none" w="med" len="med"/>
+                      <a:tailEnd type="none" w="med" len="med"/>
+                    </a:lnR>
+                    <a:lnT w="6350" cap="flat" cmpd="sng" algn="ctr">
+                      <a:solidFill>
+                        <a:srgbClr val="E5E2DC"/>
+                      </a:solidFill>
+                      <a:prstDash val="solid"/>
+                      <a:round/>
+                      <a:headEnd type="none" w="med" len="med"/>
+                      <a:tailEnd type="none" w="med" len="med"/>
+                    </a:lnT>
+                    <a:lnB w="6350" cap="flat" cmpd="sng" algn="ctr">
+                      <a:solidFill>
+                        <a:srgbClr val="E5E2DC"/>
+                      </a:solidFill>
+                      <a:prstDash val="solid"/>
+                      <a:round/>
+                      <a:headEnd type="none" w="med" len="med"/>
+                      <a:tailEnd type="none" w="med" len="med"/>
+                    </a:lnB>
+                  </a:tcPr>
+                </a:tc>
+                <a:tc>
+                  <a:txBody>
+                    <a:bodyPr/>
+                    <a:lstStyle/>
+                    <a:p>
+                      <a:pPr indent="0" marL="0">
+                        <a:buNone/>
+                      </a:pPr>
+                      <a:r>
+                        <a:rPr lang="en-US" sz="1300" dirty="0">
+                          <a:solidFill>
+                            <a:srgbClr val="3D3A36"/>
+                          </a:solidFill>
+                          <a:latin typeface="Calibri" pitchFamily="34" charset="0"/>
+                          <a:ea typeface="Calibri" pitchFamily="34" charset="-122"/>
+                          <a:cs typeface="Calibri" pitchFamily="34" charset="-120"/>
+                        </a:rPr>
+                        <a:t>A = πr²</a:t>
+                      </a:r>
+                      <a:endParaRPr lang="en-US" sz="1300" dirty="0">
+                        <a:latin typeface="Calibri" charset="0"/>
+                        <a:ea typeface="Calibri" charset="0"/>
+                        <a:cs typeface="Calibri" charset="0"/>
+                      </a:endParaRPr>
+                    </a:p>
+                  </a:txBody>
+                  <a:tcPr marL="91440" marR="91440" marT="45720" marB="45720">
+                    <a:lnL w="6350" cap="flat" cmpd="sng" algn="ctr">
+                      <a:solidFill>
+                        <a:srgbClr val="E5E2DC"/>
+                      </a:solidFill>
+                      <a:prstDash val="solid"/>
+                      <a:round/>
+                      <a:headEnd type="none" w="med" len="med"/>
+                      <a:tailEnd type="none" w="med" len="med"/>
+                    </a:lnL>
+                    <a:lnR w="6350" cap="flat" cmpd="sng" algn="ctr">
+                      <a:solidFill>
+                        <a:srgbClr val="E5E2DC"/>
+                      </a:solidFill>
+                      <a:prstDash val="solid"/>
+                      <a:round/>
+                      <a:headEnd type="none" w="med" len="med"/>
+                      <a:tailEnd type="none" w="med" len="med"/>
+                    </a:lnR>
+                    <a:lnT w="6350" cap="flat" cmpd="sng" algn="ctr">
+                      <a:solidFill>
+                        <a:srgbClr val="E5E2DC"/>
+                      </a:solidFill>
+                      <a:prstDash val="solid"/>
+                      <a:round/>
+                      <a:headEnd type="none" w="med" len="med"/>
+                      <a:tailEnd type="none" w="med" len="med"/>
+                    </a:lnT>
+                    <a:lnB w="6350" cap="flat" cmpd="sng" algn="ctr">
+                      <a:solidFill>
+                        <a:srgbClr val="E5E2DC"/>
+                      </a:solidFill>
+                      <a:prstDash val="solid"/>
+                      <a:round/>
+                      <a:headEnd type="none" w="med" len="med"/>
+                      <a:tailEnd type="none" w="med" len="med"/>
+                    </a:lnB>
+                  </a:tcPr>
+                </a:tc>
+              </a:tr>
+            </a:tbl>
+          </a:graphicData>
+        </a:graphic>
+      </p:graphicFrame>
+    </p:spTree>
+  </p:cSld>
+  <p:clrMapOvr>
+    <a:masterClrMapping/>
+  </p:clrMapOvr>
+</p:sld>
+</file>
+
+<file path=ppt/slides/slide6.xml><?xml version="1.0" encoding="utf-8"?>
+<p:sld xmlns:a="http://schemas.openxmlformats.org/drawingml/2006/main" xmlns:r="http://schemas.openxmlformats.org/officeDocument/2006/relationships" xmlns:p="http://schemas.openxmlformats.org/presentationml/2006/main">
+  <p:cSld name="Slide 6">
+    <p:spTree>
+      <p:nvGrpSpPr>
+        <p:cNvPr id="1" name=""/>
+        <p:cNvGrpSpPr/>
+        <p:nvPr/>
+      </p:nvGrpSpPr>
+      <p:grpSpPr>
+        <a:xfrm>
+          <a:off x="0" y="0"/>
+          <a:ext cx="0" cy="0"/>
+          <a:chOff x="0" y="0"/>
+          <a:chExt cx="0" cy="0"/>
+        </a:xfrm>
+      </p:grpSpPr>
+      <p:sp>
+        <p:nvSpPr>
+          <p:cNvPr id="2" name="Shape 0"/>
           <p:cNvSpPr/>
           <p:nvPr/>
         </p:nvSpPr>
         <p:spPr>
           <a:xfrm>
-            <a:off x="731520" y="4572000"/>
-            <a:ext cx="7772400" cy="365760"/>
+            <a:off x="0" y="0"/>
+            <a:ext cx="9144000" cy="5143500"/>
+          </a:xfrm>
+          <a:prstGeom prst="rect">
+            <a:avLst/>
+          </a:prstGeom>
+          <a:solidFill>
+            <a:srgbClr val="111D35"/>
+          </a:solidFill>
+          <a:ln/>
+        </p:spPr>
+      </p:sp>
+      <p:sp>
+        <p:nvSpPr>
+          <p:cNvPr id="3" name="Text 1"/>
+          <p:cNvSpPr/>
+          <p:nvPr/>
+        </p:nvSpPr>
+        <p:spPr>
+          <a:xfrm>
+            <a:off x="731520" y="914400"/>
+            <a:ext cx="1828800" cy="1097280"/>
           </a:xfrm>
           <a:prstGeom prst="rect">
             <a:avLst/>
@@ -2584,9 +3678,1152 @@
               <a:buNone/>
             </a:pPr>
             <a:r>
-              <a:rPr lang="en-US" sz="1100" dirty="0">
+              <a:rPr lang="en-US" sz="7200" b="1" dirty="0">
                 <a:solidFill>
-                  <a:srgbClr val="E9C46A"/>
+                  <a:srgbClr val="2A9D8F">
+                    <a:alpha val="70000"/>
+                  </a:srgbClr>
+                </a:solidFill>
+                <a:latin typeface="Georgia" pitchFamily="34" charset="0"/>
+                <a:ea typeface="Georgia" pitchFamily="34" charset="-122"/>
+                <a:cs typeface="Georgia" pitchFamily="34" charset="-120"/>
+              </a:rPr>
+              <a:t>03</a:t>
+            </a:r>
+            <a:endParaRPr lang="en-US" sz="7200" dirty="0"/>
+          </a:p>
+        </p:txBody>
+      </p:sp>
+      <p:sp>
+        <p:nvSpPr>
+          <p:cNvPr id="4" name="Text 2"/>
+          <p:cNvSpPr/>
+          <p:nvPr/>
+        </p:nvSpPr>
+        <p:spPr>
+          <a:xfrm>
+            <a:off x="731520" y="2011680"/>
+            <a:ext cx="7680960" cy="1097280"/>
+          </a:xfrm>
+          <a:prstGeom prst="rect">
+            <a:avLst/>
+          </a:prstGeom>
+          <a:noFill/>
+          <a:ln/>
+        </p:spPr>
+        <p:txBody>
+          <a:bodyPr wrap="square" rtlCol="0" anchor="ctr"/>
+          <a:lstStyle/>
+          <a:p>
+            <a:pPr indent="0" marL="0">
+              <a:buNone/>
+            </a:pPr>
+            <a:r>
+              <a:rPr lang="en-US" sz="3200" b="1" dirty="0">
+                <a:solidFill>
+                  <a:srgbClr val="FFFFFF"/>
+                </a:solidFill>
+                <a:latin typeface="Georgia" pitchFamily="34" charset="0"/>
+                <a:ea typeface="Georgia" pitchFamily="34" charset="-122"/>
+                <a:cs typeface="Georgia" pitchFamily="34" charset="-120"/>
+              </a:rPr>
+              <a:t>Surface Area &amp; Volume</a:t>
+            </a:r>
+            <a:endParaRPr lang="en-US" sz="3200" dirty="0"/>
+          </a:p>
+        </p:txBody>
+      </p:sp>
+      <p:sp>
+        <p:nvSpPr>
+          <p:cNvPr id="5" name="Shape 3"/>
+          <p:cNvSpPr/>
+          <p:nvPr/>
+        </p:nvSpPr>
+        <p:spPr>
+          <a:xfrm>
+            <a:off x="731520" y="3200400"/>
+            <a:ext cx="1828800" cy="54864"/>
+          </a:xfrm>
+          <a:prstGeom prst="rect">
+            <a:avLst/>
+          </a:prstGeom>
+          <a:solidFill>
+            <a:srgbClr val="2A9D8F"/>
+          </a:solidFill>
+          <a:ln/>
+        </p:spPr>
+      </p:sp>
+    </p:spTree>
+  </p:cSld>
+  <p:clrMapOvr>
+    <a:masterClrMapping/>
+  </p:clrMapOvr>
+</p:sld>
+</file>
+
+<file path=ppt/slides/slide7.xml><?xml version="1.0" encoding="utf-8"?>
+<p:sld xmlns:a="http://schemas.openxmlformats.org/drawingml/2006/main" xmlns:r="http://schemas.openxmlformats.org/officeDocument/2006/relationships" xmlns:p="http://schemas.openxmlformats.org/presentationml/2006/main">
+  <p:cSld name="Slide 7">
+    <p:bg>
+      <p:bgPr>
+        <a:solidFill>
+          <a:srgbClr val="FAF8F5"/>
+        </a:solidFill>
+      </p:bgPr>
+    </p:bg>
+    <p:spTree>
+      <p:nvGrpSpPr>
+        <p:cNvPr id="1" name=""/>
+        <p:cNvGrpSpPr/>
+        <p:nvPr/>
+      </p:nvGrpSpPr>
+      <p:grpSpPr>
+        <a:xfrm>
+          <a:off x="0" y="0"/>
+          <a:ext cx="0" cy="0"/>
+          <a:chOff x="0" y="0"/>
+          <a:chExt cx="0" cy="0"/>
+        </a:xfrm>
+      </p:grpSpPr>
+      <p:sp>
+        <p:nvSpPr>
+          <p:cNvPr id="2" name="Shape 0"/>
+          <p:cNvSpPr/>
+          <p:nvPr/>
+        </p:nvSpPr>
+        <p:spPr>
+          <a:xfrm>
+            <a:off x="0" y="0"/>
+            <a:ext cx="9144000" cy="822960"/>
+          </a:xfrm>
+          <a:prstGeom prst="rect">
+            <a:avLst/>
+          </a:prstGeom>
+          <a:solidFill>
+            <a:srgbClr val="FFFFFF"/>
+          </a:solidFill>
+          <a:ln/>
+        </p:spPr>
+      </p:sp>
+      <p:sp>
+        <p:nvSpPr>
+          <p:cNvPr id="3" name="Shape 1"/>
+          <p:cNvSpPr/>
+          <p:nvPr/>
+        </p:nvSpPr>
+        <p:spPr>
+          <a:xfrm>
+            <a:off x="0" y="795528"/>
+            <a:ext cx="9144000" cy="27432"/>
+          </a:xfrm>
+          <a:prstGeom prst="rect">
+            <a:avLst/>
+          </a:prstGeom>
+          <a:solidFill>
+            <a:srgbClr val="2A9D8F"/>
+          </a:solidFill>
+          <a:ln/>
+        </p:spPr>
+      </p:sp>
+      <p:sp>
+        <p:nvSpPr>
+          <p:cNvPr id="4" name="Text 2"/>
+          <p:cNvSpPr/>
+          <p:nvPr/>
+        </p:nvSpPr>
+        <p:spPr>
+          <a:xfrm>
+            <a:off x="640080" y="91440"/>
+            <a:ext cx="7863840" cy="640080"/>
+          </a:xfrm>
+          <a:prstGeom prst="rect">
+            <a:avLst/>
+          </a:prstGeom>
+          <a:noFill/>
+          <a:ln/>
+        </p:spPr>
+        <p:txBody>
+          <a:bodyPr wrap="square" lIns="0" tIns="0" rIns="0" bIns="0" rtlCol="0" anchor="ctr"/>
+          <a:lstStyle/>
+          <a:p>
+            <a:pPr indent="0" marL="0">
+              <a:buNone/>
+            </a:pPr>
+            <a:r>
+              <a:rPr lang="en-US" sz="2200" b="1" dirty="0">
+                <a:solidFill>
+                  <a:srgbClr val="1B2A4A"/>
+                </a:solidFill>
+                <a:latin typeface="Georgia" pitchFamily="34" charset="0"/>
+                <a:ea typeface="Georgia" pitchFamily="34" charset="-122"/>
+                <a:cs typeface="Georgia" pitchFamily="34" charset="-120"/>
+              </a:rPr>
+              <a:t>3D Formulas &amp; Conversions</a:t>
+            </a:r>
+            <a:endParaRPr lang="en-US" sz="2200" dirty="0"/>
+          </a:p>
+        </p:txBody>
+      </p:sp>
+      <p:graphicFrame>
+        <p:nvGraphicFramePr>
+          <p:cNvPr id="8" name="Table 0"/>
+          <p:cNvGraphicFramePr>
+            <a:graphicFrameLocks noGrp="1"/>
+          </p:cNvGraphicFramePr>
+          <p:nvPr>
+            <p:extLst>
+              <p:ext uri="{D42A27DB-BD31-4B8C-83A1-F6EECF244321}">
+                <p14:modId xmlns:p14="http://schemas.microsoft.com/office/powerpoint/2010/main" val="1579011935"/>
+              </p:ext>
+            </p:extLst>
+          </p:nvPr>
+        </p:nvGraphicFramePr>
+        <p:xfrm>
+          <a:off x="640080" y="1051560"/>
+          <a:ext cx="7863840" cy="914400"/>
+        </p:xfrm>
+        <a:graphic>
+          <a:graphicData uri="http://schemas.openxmlformats.org/drawingml/2006/table">
+            <a:tbl>
+              <a:tblPr/>
+              <a:tblGrid>
+                <a:gridCol w="3931920"/>
+                <a:gridCol w="3931920"/>
+              </a:tblGrid>
+              <a:tr h="502920">
+                <a:tc>
+                  <a:txBody>
+                    <a:bodyPr/>
+                    <a:lstStyle/>
+                    <a:p>
+                      <a:pPr indent="0" marL="0">
+                        <a:buNone/>
+                      </a:pPr>
+                      <a:r>
+                        <a:rPr lang="en-US" sz="1300" b="1" dirty="0">
+                          <a:solidFill>
+                            <a:srgbClr val="FFFFFF"/>
+                          </a:solidFill>
+                          <a:latin typeface="Calibri" pitchFamily="34" charset="0"/>
+                          <a:ea typeface="Calibri" pitchFamily="34" charset="-122"/>
+                          <a:cs typeface="Calibri" pitchFamily="34" charset="-120"/>
+                        </a:rPr>
+                        <a:t>Formula / Rule</a:t>
+                      </a:r>
+                      <a:endParaRPr lang="en-US" sz="1300" dirty="0">
+                        <a:latin typeface="Calibri" charset="0"/>
+                        <a:ea typeface="Calibri" charset="0"/>
+                        <a:cs typeface="Calibri" charset="0"/>
+                      </a:endParaRPr>
+                    </a:p>
+                  </a:txBody>
+                  <a:tcPr marL="91440" marR="91440" marT="45720" marB="45720">
+                    <a:lnL w="6350" cap="flat" cmpd="sng" algn="ctr">
+                      <a:solidFill>
+                        <a:srgbClr val="E5E2DC"/>
+                      </a:solidFill>
+                      <a:prstDash val="solid"/>
+                      <a:round/>
+                      <a:headEnd type="none" w="med" len="med"/>
+                      <a:tailEnd type="none" w="med" len="med"/>
+                    </a:lnL>
+                    <a:lnR w="6350" cap="flat" cmpd="sng" algn="ctr">
+                      <a:solidFill>
+                        <a:srgbClr val="E5E2DC"/>
+                      </a:solidFill>
+                      <a:prstDash val="solid"/>
+                      <a:round/>
+                      <a:headEnd type="none" w="med" len="med"/>
+                      <a:tailEnd type="none" w="med" len="med"/>
+                    </a:lnR>
+                    <a:lnT w="6350" cap="flat" cmpd="sng" algn="ctr">
+                      <a:solidFill>
+                        <a:srgbClr val="E5E2DC"/>
+                      </a:solidFill>
+                      <a:prstDash val="solid"/>
+                      <a:round/>
+                      <a:headEnd type="none" w="med" len="med"/>
+                      <a:tailEnd type="none" w="med" len="med"/>
+                    </a:lnT>
+                    <a:lnB w="6350" cap="flat" cmpd="sng" algn="ctr">
+                      <a:solidFill>
+                        <a:srgbClr val="E5E2DC"/>
+                      </a:solidFill>
+                      <a:prstDash val="solid"/>
+                      <a:round/>
+                      <a:headEnd type="none" w="med" len="med"/>
+                      <a:tailEnd type="none" w="med" len="med"/>
+                    </a:lnB>
+                    <a:solidFill>
+                      <a:srgbClr val="2A9D8F"/>
+                    </a:solidFill>
+                  </a:tcPr>
+                </a:tc>
+                <a:tc>
+                  <a:txBody>
+                    <a:bodyPr/>
+                    <a:lstStyle/>
+                    <a:p>
+                      <a:pPr indent="0" marL="0">
+                        <a:buNone/>
+                      </a:pPr>
+                      <a:r>
+                        <a:rPr lang="en-US" sz="1300" b="1" dirty="0">
+                          <a:solidFill>
+                            <a:srgbClr val="FFFFFF"/>
+                          </a:solidFill>
+                          <a:latin typeface="Calibri" pitchFamily="34" charset="0"/>
+                          <a:ea typeface="Calibri" pitchFamily="34" charset="-122"/>
+                          <a:cs typeface="Calibri" pitchFamily="34" charset="-120"/>
+                        </a:rPr>
+                        <a:t>Detail</a:t>
+                      </a:r>
+                      <a:endParaRPr lang="en-US" sz="1300" dirty="0">
+                        <a:latin typeface="Calibri" charset="0"/>
+                        <a:ea typeface="Calibri" charset="0"/>
+                        <a:cs typeface="Calibri" charset="0"/>
+                      </a:endParaRPr>
+                    </a:p>
+                  </a:txBody>
+                  <a:tcPr marL="91440" marR="91440" marT="45720" marB="45720">
+                    <a:lnL w="6350" cap="flat" cmpd="sng" algn="ctr">
+                      <a:solidFill>
+                        <a:srgbClr val="E5E2DC"/>
+                      </a:solidFill>
+                      <a:prstDash val="solid"/>
+                      <a:round/>
+                      <a:headEnd type="none" w="med" len="med"/>
+                      <a:tailEnd type="none" w="med" len="med"/>
+                    </a:lnL>
+                    <a:lnR w="6350" cap="flat" cmpd="sng" algn="ctr">
+                      <a:solidFill>
+                        <a:srgbClr val="E5E2DC"/>
+                      </a:solidFill>
+                      <a:prstDash val="solid"/>
+                      <a:round/>
+                      <a:headEnd type="none" w="med" len="med"/>
+                      <a:tailEnd type="none" w="med" len="med"/>
+                    </a:lnR>
+                    <a:lnT w="6350" cap="flat" cmpd="sng" algn="ctr">
+                      <a:solidFill>
+                        <a:srgbClr val="E5E2DC"/>
+                      </a:solidFill>
+                      <a:prstDash val="solid"/>
+                      <a:round/>
+                      <a:headEnd type="none" w="med" len="med"/>
+                      <a:tailEnd type="none" w="med" len="med"/>
+                    </a:lnT>
+                    <a:lnB w="6350" cap="flat" cmpd="sng" algn="ctr">
+                      <a:solidFill>
+                        <a:srgbClr val="E5E2DC"/>
+                      </a:solidFill>
+                      <a:prstDash val="solid"/>
+                      <a:round/>
+                      <a:headEnd type="none" w="med" len="med"/>
+                      <a:tailEnd type="none" w="med" len="med"/>
+                    </a:lnB>
+                    <a:solidFill>
+                      <a:srgbClr val="2A9D8F"/>
+                    </a:solidFill>
+                  </a:tcPr>
+                </a:tc>
+              </a:tr>
+              <a:tr h="502920">
+                <a:tc>
+                  <a:txBody>
+                    <a:bodyPr/>
+                    <a:lstStyle/>
+                    <a:p>
+                      <a:pPr indent="0" marL="0">
+                        <a:buNone/>
+                      </a:pPr>
+                      <a:r>
+                        <a:rPr lang="en-US" sz="1300" dirty="0">
+                          <a:solidFill>
+                            <a:srgbClr val="3D3A36"/>
+                          </a:solidFill>
+                          <a:latin typeface="Calibri" pitchFamily="34" charset="0"/>
+                          <a:ea typeface="Calibri" pitchFamily="34" charset="-122"/>
+                          <a:cs typeface="Calibri" pitchFamily="34" charset="-120"/>
+                        </a:rPr>
+                        <a:t>Cube: SA=6s², V=s³</a:t>
+                      </a:r>
+                      <a:endParaRPr lang="en-US" sz="1300" dirty="0">
+                        <a:latin typeface="Calibri" charset="0"/>
+                        <a:ea typeface="Calibri" charset="0"/>
+                        <a:cs typeface="Calibri" charset="0"/>
+                      </a:endParaRPr>
+                    </a:p>
+                  </a:txBody>
+                  <a:tcPr marL="91440" marR="91440" marT="45720" marB="45720">
+                    <a:lnL w="6350" cap="flat" cmpd="sng" algn="ctr">
+                      <a:solidFill>
+                        <a:srgbClr val="E5E2DC"/>
+                      </a:solidFill>
+                      <a:prstDash val="solid"/>
+                      <a:round/>
+                      <a:headEnd type="none" w="med" len="med"/>
+                      <a:tailEnd type="none" w="med" len="med"/>
+                    </a:lnL>
+                    <a:lnR w="6350" cap="flat" cmpd="sng" algn="ctr">
+                      <a:solidFill>
+                        <a:srgbClr val="E5E2DC"/>
+                      </a:solidFill>
+                      <a:prstDash val="solid"/>
+                      <a:round/>
+                      <a:headEnd type="none" w="med" len="med"/>
+                      <a:tailEnd type="none" w="med" len="med"/>
+                    </a:lnR>
+                    <a:lnT w="6350" cap="flat" cmpd="sng" algn="ctr">
+                      <a:solidFill>
+                        <a:srgbClr val="E5E2DC"/>
+                      </a:solidFill>
+                      <a:prstDash val="solid"/>
+                      <a:round/>
+                      <a:headEnd type="none" w="med" len="med"/>
+                      <a:tailEnd type="none" w="med" len="med"/>
+                    </a:lnT>
+                    <a:lnB w="6350" cap="flat" cmpd="sng" algn="ctr">
+                      <a:solidFill>
+                        <a:srgbClr val="E5E2DC"/>
+                      </a:solidFill>
+                      <a:prstDash val="solid"/>
+                      <a:round/>
+                      <a:headEnd type="none" w="med" len="med"/>
+                      <a:tailEnd type="none" w="med" len="med"/>
+                    </a:lnB>
+                  </a:tcPr>
+                </a:tc>
+                <a:tc>
+                  <a:txBody>
+                    <a:bodyPr/>
+                    <a:lstStyle/>
+                    <a:p>
+                      <a:pPr indent="0" marL="0">
+                        <a:buNone/>
+                      </a:pPr>
+                      <a:r>
+                        <a:rPr lang="en-US" sz="1300" dirty="0">
+                          <a:solidFill>
+                            <a:srgbClr val="3D3A36"/>
+                          </a:solidFill>
+                          <a:latin typeface="Calibri" pitchFamily="34" charset="0"/>
+                          <a:ea typeface="Calibri" pitchFamily="34" charset="-122"/>
+                          <a:cs typeface="Calibri" pitchFamily="34" charset="-120"/>
+                        </a:rPr>
+                        <a:t>All edges equal</a:t>
+                      </a:r>
+                      <a:endParaRPr lang="en-US" sz="1300" dirty="0">
+                        <a:latin typeface="Calibri" charset="0"/>
+                        <a:ea typeface="Calibri" charset="0"/>
+                        <a:cs typeface="Calibri" charset="0"/>
+                      </a:endParaRPr>
+                    </a:p>
+                  </a:txBody>
+                  <a:tcPr marL="91440" marR="91440" marT="45720" marB="45720">
+                    <a:lnL w="6350" cap="flat" cmpd="sng" algn="ctr">
+                      <a:solidFill>
+                        <a:srgbClr val="E5E2DC"/>
+                      </a:solidFill>
+                      <a:prstDash val="solid"/>
+                      <a:round/>
+                      <a:headEnd type="none" w="med" len="med"/>
+                      <a:tailEnd type="none" w="med" len="med"/>
+                    </a:lnL>
+                    <a:lnR w="6350" cap="flat" cmpd="sng" algn="ctr">
+                      <a:solidFill>
+                        <a:srgbClr val="E5E2DC"/>
+                      </a:solidFill>
+                      <a:prstDash val="solid"/>
+                      <a:round/>
+                      <a:headEnd type="none" w="med" len="med"/>
+                      <a:tailEnd type="none" w="med" len="med"/>
+                    </a:lnR>
+                    <a:lnT w="6350" cap="flat" cmpd="sng" algn="ctr">
+                      <a:solidFill>
+                        <a:srgbClr val="E5E2DC"/>
+                      </a:solidFill>
+                      <a:prstDash val="solid"/>
+                      <a:round/>
+                      <a:headEnd type="none" w="med" len="med"/>
+                      <a:tailEnd type="none" w="med" len="med"/>
+                    </a:lnT>
+                    <a:lnB w="6350" cap="flat" cmpd="sng" algn="ctr">
+                      <a:solidFill>
+                        <a:srgbClr val="E5E2DC"/>
+                      </a:solidFill>
+                      <a:prstDash val="solid"/>
+                      <a:round/>
+                      <a:headEnd type="none" w="med" len="med"/>
+                      <a:tailEnd type="none" w="med" len="med"/>
+                    </a:lnB>
+                  </a:tcPr>
+                </a:tc>
+              </a:tr>
+              <a:tr h="502920">
+                <a:tc>
+                  <a:txBody>
+                    <a:bodyPr/>
+                    <a:lstStyle/>
+                    <a:p>
+                      <a:pPr indent="0" marL="0">
+                        <a:buNone/>
+                      </a:pPr>
+                      <a:r>
+                        <a:rPr lang="en-US" sz="1300" dirty="0">
+                          <a:solidFill>
+                            <a:srgbClr val="3D3A36"/>
+                          </a:solidFill>
+                          <a:latin typeface="Calibri" pitchFamily="34" charset="0"/>
+                          <a:ea typeface="Calibri" pitchFamily="34" charset="-122"/>
+                          <a:cs typeface="Calibri" pitchFamily="34" charset="-120"/>
+                        </a:rPr>
+                        <a:t>Rect. Prism: SA=2(lw+lh+wh), V=lwh</a:t>
+                      </a:r>
+                      <a:endParaRPr lang="en-US" sz="1300" dirty="0">
+                        <a:latin typeface="Calibri" charset="0"/>
+                        <a:ea typeface="Calibri" charset="0"/>
+                        <a:cs typeface="Calibri" charset="0"/>
+                      </a:endParaRPr>
+                    </a:p>
+                  </a:txBody>
+                  <a:tcPr marL="91440" marR="91440" marT="45720" marB="45720">
+                    <a:lnL w="6350" cap="flat" cmpd="sng" algn="ctr">
+                      <a:solidFill>
+                        <a:srgbClr val="E5E2DC"/>
+                      </a:solidFill>
+                      <a:prstDash val="solid"/>
+                      <a:round/>
+                      <a:headEnd type="none" w="med" len="med"/>
+                      <a:tailEnd type="none" w="med" len="med"/>
+                    </a:lnL>
+                    <a:lnR w="6350" cap="flat" cmpd="sng" algn="ctr">
+                      <a:solidFill>
+                        <a:srgbClr val="E5E2DC"/>
+                      </a:solidFill>
+                      <a:prstDash val="solid"/>
+                      <a:round/>
+                      <a:headEnd type="none" w="med" len="med"/>
+                      <a:tailEnd type="none" w="med" len="med"/>
+                    </a:lnR>
+                    <a:lnT w="6350" cap="flat" cmpd="sng" algn="ctr">
+                      <a:solidFill>
+                        <a:srgbClr val="E5E2DC"/>
+                      </a:solidFill>
+                      <a:prstDash val="solid"/>
+                      <a:round/>
+                      <a:headEnd type="none" w="med" len="med"/>
+                      <a:tailEnd type="none" w="med" len="med"/>
+                    </a:lnT>
+                    <a:lnB w="6350" cap="flat" cmpd="sng" algn="ctr">
+                      <a:solidFill>
+                        <a:srgbClr val="E5E2DC"/>
+                      </a:solidFill>
+                      <a:prstDash val="solid"/>
+                      <a:round/>
+                      <a:headEnd type="none" w="med" len="med"/>
+                      <a:tailEnd type="none" w="med" len="med"/>
+                    </a:lnB>
+                  </a:tcPr>
+                </a:tc>
+                <a:tc>
+                  <a:txBody>
+                    <a:bodyPr/>
+                    <a:lstStyle/>
+                    <a:p>
+                      <a:pPr indent="0" marL="0">
+                        <a:buNone/>
+                      </a:pPr>
+                      <a:r>
+                        <a:rPr lang="en-US" sz="1300" dirty="0">
+                          <a:solidFill>
+                            <a:srgbClr val="3D3A36"/>
+                          </a:solidFill>
+                          <a:latin typeface="Calibri" pitchFamily="34" charset="0"/>
+                          <a:ea typeface="Calibri" pitchFamily="34" charset="-122"/>
+                          <a:cs typeface="Calibri" pitchFamily="34" charset="-120"/>
+                        </a:rPr>
+                        <a:t>3 dimensions</a:t>
+                      </a:r>
+                      <a:endParaRPr lang="en-US" sz="1300" dirty="0">
+                        <a:latin typeface="Calibri" charset="0"/>
+                        <a:ea typeface="Calibri" charset="0"/>
+                        <a:cs typeface="Calibri" charset="0"/>
+                      </a:endParaRPr>
+                    </a:p>
+                  </a:txBody>
+                  <a:tcPr marL="91440" marR="91440" marT="45720" marB="45720">
+                    <a:lnL w="6350" cap="flat" cmpd="sng" algn="ctr">
+                      <a:solidFill>
+                        <a:srgbClr val="E5E2DC"/>
+                      </a:solidFill>
+                      <a:prstDash val="solid"/>
+                      <a:round/>
+                      <a:headEnd type="none" w="med" len="med"/>
+                      <a:tailEnd type="none" w="med" len="med"/>
+                    </a:lnL>
+                    <a:lnR w="6350" cap="flat" cmpd="sng" algn="ctr">
+                      <a:solidFill>
+                        <a:srgbClr val="E5E2DC"/>
+                      </a:solidFill>
+                      <a:prstDash val="solid"/>
+                      <a:round/>
+                      <a:headEnd type="none" w="med" len="med"/>
+                      <a:tailEnd type="none" w="med" len="med"/>
+                    </a:lnR>
+                    <a:lnT w="6350" cap="flat" cmpd="sng" algn="ctr">
+                      <a:solidFill>
+                        <a:srgbClr val="E5E2DC"/>
+                      </a:solidFill>
+                      <a:prstDash val="solid"/>
+                      <a:round/>
+                      <a:headEnd type="none" w="med" len="med"/>
+                      <a:tailEnd type="none" w="med" len="med"/>
+                    </a:lnT>
+                    <a:lnB w="6350" cap="flat" cmpd="sng" algn="ctr">
+                      <a:solidFill>
+                        <a:srgbClr val="E5E2DC"/>
+                      </a:solidFill>
+                      <a:prstDash val="solid"/>
+                      <a:round/>
+                      <a:headEnd type="none" w="med" len="med"/>
+                      <a:tailEnd type="none" w="med" len="med"/>
+                    </a:lnB>
+                  </a:tcPr>
+                </a:tc>
+              </a:tr>
+              <a:tr h="502920">
+                <a:tc>
+                  <a:txBody>
+                    <a:bodyPr/>
+                    <a:lstStyle/>
+                    <a:p>
+                      <a:pPr indent="0" marL="0">
+                        <a:buNone/>
+                      </a:pPr>
+                      <a:r>
+                        <a:rPr lang="en-US" sz="1300" dirty="0">
+                          <a:solidFill>
+                            <a:srgbClr val="3D3A36"/>
+                          </a:solidFill>
+                          <a:latin typeface="Calibri" pitchFamily="34" charset="0"/>
+                          <a:ea typeface="Calibri" pitchFamily="34" charset="-122"/>
+                          <a:cs typeface="Calibri" pitchFamily="34" charset="-120"/>
+                        </a:rPr>
+                        <a:t>Tri. Prism: V=½bh×length</a:t>
+                      </a:r>
+                      <a:endParaRPr lang="en-US" sz="1300" dirty="0">
+                        <a:latin typeface="Calibri" charset="0"/>
+                        <a:ea typeface="Calibri" charset="0"/>
+                        <a:cs typeface="Calibri" charset="0"/>
+                      </a:endParaRPr>
+                    </a:p>
+                  </a:txBody>
+                  <a:tcPr marL="91440" marR="91440" marT="45720" marB="45720">
+                    <a:lnL w="6350" cap="flat" cmpd="sng" algn="ctr">
+                      <a:solidFill>
+                        <a:srgbClr val="E5E2DC"/>
+                      </a:solidFill>
+                      <a:prstDash val="solid"/>
+                      <a:round/>
+                      <a:headEnd type="none" w="med" len="med"/>
+                      <a:tailEnd type="none" w="med" len="med"/>
+                    </a:lnL>
+                    <a:lnR w="6350" cap="flat" cmpd="sng" algn="ctr">
+                      <a:solidFill>
+                        <a:srgbClr val="E5E2DC"/>
+                      </a:solidFill>
+                      <a:prstDash val="solid"/>
+                      <a:round/>
+                      <a:headEnd type="none" w="med" len="med"/>
+                      <a:tailEnd type="none" w="med" len="med"/>
+                    </a:lnR>
+                    <a:lnT w="6350" cap="flat" cmpd="sng" algn="ctr">
+                      <a:solidFill>
+                        <a:srgbClr val="E5E2DC"/>
+                      </a:solidFill>
+                      <a:prstDash val="solid"/>
+                      <a:round/>
+                      <a:headEnd type="none" w="med" len="med"/>
+                      <a:tailEnd type="none" w="med" len="med"/>
+                    </a:lnT>
+                    <a:lnB w="6350" cap="flat" cmpd="sng" algn="ctr">
+                      <a:solidFill>
+                        <a:srgbClr val="E5E2DC"/>
+                      </a:solidFill>
+                      <a:prstDash val="solid"/>
+                      <a:round/>
+                      <a:headEnd type="none" w="med" len="med"/>
+                      <a:tailEnd type="none" w="med" len="med"/>
+                    </a:lnB>
+                  </a:tcPr>
+                </a:tc>
+                <a:tc>
+                  <a:txBody>
+                    <a:bodyPr/>
+                    <a:lstStyle/>
+                    <a:p>
+                      <a:pPr indent="0" marL="0">
+                        <a:buNone/>
+                      </a:pPr>
+                      <a:r>
+                        <a:rPr lang="en-US" sz="1300" dirty="0">
+                          <a:solidFill>
+                            <a:srgbClr val="3D3A36"/>
+                          </a:solidFill>
+                          <a:latin typeface="Calibri" pitchFamily="34" charset="0"/>
+                          <a:ea typeface="Calibri" pitchFamily="34" charset="-122"/>
+                          <a:cs typeface="Calibri" pitchFamily="34" charset="-120"/>
+                        </a:rPr>
+                        <a:t>Triangle area × length</a:t>
+                      </a:r>
+                      <a:endParaRPr lang="en-US" sz="1300" dirty="0">
+                        <a:latin typeface="Calibri" charset="0"/>
+                        <a:ea typeface="Calibri" charset="0"/>
+                        <a:cs typeface="Calibri" charset="0"/>
+                      </a:endParaRPr>
+                    </a:p>
+                  </a:txBody>
+                  <a:tcPr marL="91440" marR="91440" marT="45720" marB="45720">
+                    <a:lnL w="6350" cap="flat" cmpd="sng" algn="ctr">
+                      <a:solidFill>
+                        <a:srgbClr val="E5E2DC"/>
+                      </a:solidFill>
+                      <a:prstDash val="solid"/>
+                      <a:round/>
+                      <a:headEnd type="none" w="med" len="med"/>
+                      <a:tailEnd type="none" w="med" len="med"/>
+                    </a:lnL>
+                    <a:lnR w="6350" cap="flat" cmpd="sng" algn="ctr">
+                      <a:solidFill>
+                        <a:srgbClr val="E5E2DC"/>
+                      </a:solidFill>
+                      <a:prstDash val="solid"/>
+                      <a:round/>
+                      <a:headEnd type="none" w="med" len="med"/>
+                      <a:tailEnd type="none" w="med" len="med"/>
+                    </a:lnR>
+                    <a:lnT w="6350" cap="flat" cmpd="sng" algn="ctr">
+                      <a:solidFill>
+                        <a:srgbClr val="E5E2DC"/>
+                      </a:solidFill>
+                      <a:prstDash val="solid"/>
+                      <a:round/>
+                      <a:headEnd type="none" w="med" len="med"/>
+                      <a:tailEnd type="none" w="med" len="med"/>
+                    </a:lnT>
+                    <a:lnB w="6350" cap="flat" cmpd="sng" algn="ctr">
+                      <a:solidFill>
+                        <a:srgbClr val="E5E2DC"/>
+                      </a:solidFill>
+                      <a:prstDash val="solid"/>
+                      <a:round/>
+                      <a:headEnd type="none" w="med" len="med"/>
+                      <a:tailEnd type="none" w="med" len="med"/>
+                    </a:lnB>
+                  </a:tcPr>
+                </a:tc>
+              </a:tr>
+              <a:tr h="502920">
+                <a:tc>
+                  <a:txBody>
+                    <a:bodyPr/>
+                    <a:lstStyle/>
+                    <a:p>
+                      <a:pPr indent="0" marL="0">
+                        <a:buNone/>
+                      </a:pPr>
+                      <a:r>
+                        <a:rPr lang="en-US" sz="1300" dirty="0">
+                          <a:solidFill>
+                            <a:srgbClr val="3D3A36"/>
+                          </a:solidFill>
+                          <a:latin typeface="Calibri" pitchFamily="34" charset="0"/>
+                          <a:ea typeface="Calibri" pitchFamily="34" charset="-122"/>
+                          <a:cs typeface="Calibri" pitchFamily="34" charset="-120"/>
+                        </a:rPr>
+                        <a:t>1 cm³ = 1 mL</a:t>
+                      </a:r>
+                      <a:endParaRPr lang="en-US" sz="1300" dirty="0">
+                        <a:latin typeface="Calibri" charset="0"/>
+                        <a:ea typeface="Calibri" charset="0"/>
+                        <a:cs typeface="Calibri" charset="0"/>
+                      </a:endParaRPr>
+                    </a:p>
+                  </a:txBody>
+                  <a:tcPr marL="91440" marR="91440" marT="45720" marB="45720">
+                    <a:lnL w="6350" cap="flat" cmpd="sng" algn="ctr">
+                      <a:solidFill>
+                        <a:srgbClr val="E5E2DC"/>
+                      </a:solidFill>
+                      <a:prstDash val="solid"/>
+                      <a:round/>
+                      <a:headEnd type="none" w="med" len="med"/>
+                      <a:tailEnd type="none" w="med" len="med"/>
+                    </a:lnL>
+                    <a:lnR w="6350" cap="flat" cmpd="sng" algn="ctr">
+                      <a:solidFill>
+                        <a:srgbClr val="E5E2DC"/>
+                      </a:solidFill>
+                      <a:prstDash val="solid"/>
+                      <a:round/>
+                      <a:headEnd type="none" w="med" len="med"/>
+                      <a:tailEnd type="none" w="med" len="med"/>
+                    </a:lnR>
+                    <a:lnT w="6350" cap="flat" cmpd="sng" algn="ctr">
+                      <a:solidFill>
+                        <a:srgbClr val="E5E2DC"/>
+                      </a:solidFill>
+                      <a:prstDash val="solid"/>
+                      <a:round/>
+                      <a:headEnd type="none" w="med" len="med"/>
+                      <a:tailEnd type="none" w="med" len="med"/>
+                    </a:lnT>
+                    <a:lnB w="6350" cap="flat" cmpd="sng" algn="ctr">
+                      <a:solidFill>
+                        <a:srgbClr val="E5E2DC"/>
+                      </a:solidFill>
+                      <a:prstDash val="solid"/>
+                      <a:round/>
+                      <a:headEnd type="none" w="med" len="med"/>
+                      <a:tailEnd type="none" w="med" len="med"/>
+                    </a:lnB>
+                  </a:tcPr>
+                </a:tc>
+                <a:tc>
+                  <a:txBody>
+                    <a:bodyPr/>
+                    <a:lstStyle/>
+                    <a:p>
+                      <a:pPr indent="0" marL="0">
+                        <a:buNone/>
+                      </a:pPr>
+                      <a:r>
+                        <a:rPr lang="en-US" sz="1300" dirty="0">
+                          <a:solidFill>
+                            <a:srgbClr val="3D3A36"/>
+                          </a:solidFill>
+                          <a:latin typeface="Calibri" pitchFamily="34" charset="0"/>
+                          <a:ea typeface="Calibri" pitchFamily="34" charset="-122"/>
+                          <a:cs typeface="Calibri" pitchFamily="34" charset="-120"/>
+                        </a:rPr>
+                        <a:t>Volume ↔ Capacity</a:t>
+                      </a:r>
+                      <a:endParaRPr lang="en-US" sz="1300" dirty="0">
+                        <a:latin typeface="Calibri" charset="0"/>
+                        <a:ea typeface="Calibri" charset="0"/>
+                        <a:cs typeface="Calibri" charset="0"/>
+                      </a:endParaRPr>
+                    </a:p>
+                  </a:txBody>
+                  <a:tcPr marL="91440" marR="91440" marT="45720" marB="45720">
+                    <a:lnL w="6350" cap="flat" cmpd="sng" algn="ctr">
+                      <a:solidFill>
+                        <a:srgbClr val="E5E2DC"/>
+                      </a:solidFill>
+                      <a:prstDash val="solid"/>
+                      <a:round/>
+                      <a:headEnd type="none" w="med" len="med"/>
+                      <a:tailEnd type="none" w="med" len="med"/>
+                    </a:lnL>
+                    <a:lnR w="6350" cap="flat" cmpd="sng" algn="ctr">
+                      <a:solidFill>
+                        <a:srgbClr val="E5E2DC"/>
+                      </a:solidFill>
+                      <a:prstDash val="solid"/>
+                      <a:round/>
+                      <a:headEnd type="none" w="med" len="med"/>
+                      <a:tailEnd type="none" w="med" len="med"/>
+                    </a:lnR>
+                    <a:lnT w="6350" cap="flat" cmpd="sng" algn="ctr">
+                      <a:solidFill>
+                        <a:srgbClr val="E5E2DC"/>
+                      </a:solidFill>
+                      <a:prstDash val="solid"/>
+                      <a:round/>
+                      <a:headEnd type="none" w="med" len="med"/>
+                      <a:tailEnd type="none" w="med" len="med"/>
+                    </a:lnT>
+                    <a:lnB w="6350" cap="flat" cmpd="sng" algn="ctr">
+                      <a:solidFill>
+                        <a:srgbClr val="E5E2DC"/>
+                      </a:solidFill>
+                      <a:prstDash val="solid"/>
+                      <a:round/>
+                      <a:headEnd type="none" w="med" len="med"/>
+                      <a:tailEnd type="none" w="med" len="med"/>
+                    </a:lnB>
+                  </a:tcPr>
+                </a:tc>
+              </a:tr>
+              <a:tr h="502920">
+                <a:tc>
+                  <a:txBody>
+                    <a:bodyPr/>
+                    <a:lstStyle/>
+                    <a:p>
+                      <a:pPr indent="0" marL="0">
+                        <a:buNone/>
+                      </a:pPr>
+                      <a:r>
+                        <a:rPr lang="en-US" sz="1300" dirty="0">
+                          <a:solidFill>
+                            <a:srgbClr val="3D3A36"/>
+                          </a:solidFill>
+                          <a:latin typeface="Calibri" pitchFamily="34" charset="0"/>
+                          <a:ea typeface="Calibri" pitchFamily="34" charset="-122"/>
+                          <a:cs typeface="Calibri" pitchFamily="34" charset="-120"/>
+                        </a:rPr>
+                        <a:t>1 m³ = 1,000 L</a:t>
+                      </a:r>
+                      <a:endParaRPr lang="en-US" sz="1300" dirty="0">
+                        <a:latin typeface="Calibri" charset="0"/>
+                        <a:ea typeface="Calibri" charset="0"/>
+                        <a:cs typeface="Calibri" charset="0"/>
+                      </a:endParaRPr>
+                    </a:p>
+                  </a:txBody>
+                  <a:tcPr marL="91440" marR="91440" marT="45720" marB="45720">
+                    <a:lnL w="6350" cap="flat" cmpd="sng" algn="ctr">
+                      <a:solidFill>
+                        <a:srgbClr val="E5E2DC"/>
+                      </a:solidFill>
+                      <a:prstDash val="solid"/>
+                      <a:round/>
+                      <a:headEnd type="none" w="med" len="med"/>
+                      <a:tailEnd type="none" w="med" len="med"/>
+                    </a:lnL>
+                    <a:lnR w="6350" cap="flat" cmpd="sng" algn="ctr">
+                      <a:solidFill>
+                        <a:srgbClr val="E5E2DC"/>
+                      </a:solidFill>
+                      <a:prstDash val="solid"/>
+                      <a:round/>
+                      <a:headEnd type="none" w="med" len="med"/>
+                      <a:tailEnd type="none" w="med" len="med"/>
+                    </a:lnR>
+                    <a:lnT w="6350" cap="flat" cmpd="sng" algn="ctr">
+                      <a:solidFill>
+                        <a:srgbClr val="E5E2DC"/>
+                      </a:solidFill>
+                      <a:prstDash val="solid"/>
+                      <a:round/>
+                      <a:headEnd type="none" w="med" len="med"/>
+                      <a:tailEnd type="none" w="med" len="med"/>
+                    </a:lnT>
+                    <a:lnB w="6350" cap="flat" cmpd="sng" algn="ctr">
+                      <a:solidFill>
+                        <a:srgbClr val="E5E2DC"/>
+                      </a:solidFill>
+                      <a:prstDash val="solid"/>
+                      <a:round/>
+                      <a:headEnd type="none" w="med" len="med"/>
+                      <a:tailEnd type="none" w="med" len="med"/>
+                    </a:lnB>
+                  </a:tcPr>
+                </a:tc>
+                <a:tc>
+                  <a:txBody>
+                    <a:bodyPr/>
+                    <a:lstStyle/>
+                    <a:p>
+                      <a:pPr indent="0" marL="0">
+                        <a:buNone/>
+                      </a:pPr>
+                      <a:r>
+                        <a:rPr lang="en-US" sz="1300" dirty="0">
+                          <a:solidFill>
+                            <a:srgbClr val="3D3A36"/>
+                          </a:solidFill>
+                          <a:latin typeface="Calibri" pitchFamily="34" charset="0"/>
+                          <a:ea typeface="Calibri" pitchFamily="34" charset="-122"/>
+                          <a:cs typeface="Calibri" pitchFamily="34" charset="-120"/>
+                        </a:rPr>
+                        <a:t>Multiply by 1,000</a:t>
+                      </a:r>
+                      <a:endParaRPr lang="en-US" sz="1300" dirty="0">
+                        <a:latin typeface="Calibri" charset="0"/>
+                        <a:ea typeface="Calibri" charset="0"/>
+                        <a:cs typeface="Calibri" charset="0"/>
+                      </a:endParaRPr>
+                    </a:p>
+                  </a:txBody>
+                  <a:tcPr marL="91440" marR="91440" marT="45720" marB="45720">
+                    <a:lnL w="6350" cap="flat" cmpd="sng" algn="ctr">
+                      <a:solidFill>
+                        <a:srgbClr val="E5E2DC"/>
+                      </a:solidFill>
+                      <a:prstDash val="solid"/>
+                      <a:round/>
+                      <a:headEnd type="none" w="med" len="med"/>
+                      <a:tailEnd type="none" w="med" len="med"/>
+                    </a:lnL>
+                    <a:lnR w="6350" cap="flat" cmpd="sng" algn="ctr">
+                      <a:solidFill>
+                        <a:srgbClr val="E5E2DC"/>
+                      </a:solidFill>
+                      <a:prstDash val="solid"/>
+                      <a:round/>
+                      <a:headEnd type="none" w="med" len="med"/>
+                      <a:tailEnd type="none" w="med" len="med"/>
+                    </a:lnR>
+                    <a:lnT w="6350" cap="flat" cmpd="sng" algn="ctr">
+                      <a:solidFill>
+                        <a:srgbClr val="E5E2DC"/>
+                      </a:solidFill>
+                      <a:prstDash val="solid"/>
+                      <a:round/>
+                      <a:headEnd type="none" w="med" len="med"/>
+                      <a:tailEnd type="none" w="med" len="med"/>
+                    </a:lnT>
+                    <a:lnB w="6350" cap="flat" cmpd="sng" algn="ctr">
+                      <a:solidFill>
+                        <a:srgbClr val="E5E2DC"/>
+                      </a:solidFill>
+                      <a:prstDash val="solid"/>
+                      <a:round/>
+                      <a:headEnd type="none" w="med" len="med"/>
+                      <a:tailEnd type="none" w="med" len="med"/>
+                    </a:lnB>
+                  </a:tcPr>
+                </a:tc>
+              </a:tr>
+            </a:tbl>
+          </a:graphicData>
+        </a:graphic>
+      </p:graphicFrame>
+    </p:spTree>
+  </p:cSld>
+  <p:clrMapOvr>
+    <a:masterClrMapping/>
+  </p:clrMapOvr>
+</p:sld>
+</file>
+
+<file path=ppt/slides/slide8.xml><?xml version="1.0" encoding="utf-8"?>
+<p:sld xmlns:a="http://schemas.openxmlformats.org/drawingml/2006/main" xmlns:r="http://schemas.openxmlformats.org/officeDocument/2006/relationships" xmlns:p="http://schemas.openxmlformats.org/presentationml/2006/main">
+  <p:cSld name="Slide 8">
+    <p:spTree>
+      <p:nvGrpSpPr>
+        <p:cNvPr id="1" name=""/>
+        <p:cNvGrpSpPr/>
+        <p:nvPr/>
+      </p:nvGrpSpPr>
+      <p:grpSpPr>
+        <a:xfrm>
+          <a:off x="0" y="0"/>
+          <a:ext cx="0" cy="0"/>
+          <a:chOff x="0" y="0"/>
+          <a:chExt cx="0" cy="0"/>
+        </a:xfrm>
+      </p:grpSpPr>
+      <p:sp>
+        <p:nvSpPr>
+          <p:cNvPr id="2" name="Shape 0"/>
+          <p:cNvSpPr/>
+          <p:nvPr/>
+        </p:nvSpPr>
+        <p:spPr>
+          <a:xfrm>
+            <a:off x="0" y="0"/>
+            <a:ext cx="9144000" cy="5143500"/>
+          </a:xfrm>
+          <a:prstGeom prst="rect">
+            <a:avLst/>
+          </a:prstGeom>
+          <a:solidFill>
+            <a:srgbClr val="1B2A4A"/>
+          </a:solidFill>
+          <a:ln/>
+        </p:spPr>
+      </p:sp>
+      <p:sp>
+        <p:nvSpPr>
+          <p:cNvPr id="3" name="Shape 1"/>
+          <p:cNvSpPr/>
+          <p:nvPr/>
+        </p:nvSpPr>
+        <p:spPr>
+          <a:xfrm>
+            <a:off x="0" y="4777740"/>
+            <a:ext cx="9144000" cy="365760"/>
+          </a:xfrm>
+          <a:prstGeom prst="rect">
+            <a:avLst/>
+          </a:prstGeom>
+          <a:solidFill>
+            <a:srgbClr val="2A9D8F"/>
+          </a:solidFill>
+          <a:ln/>
+        </p:spPr>
+      </p:sp>
+      <p:sp>
+        <p:nvSpPr>
+          <p:cNvPr id="4" name="Text 2"/>
+          <p:cNvSpPr/>
+          <p:nvPr/>
+        </p:nvSpPr>
+        <p:spPr>
+          <a:xfrm>
+            <a:off x="731520" y="1371600"/>
+            <a:ext cx="7680960" cy="914400"/>
+          </a:xfrm>
+          <a:prstGeom prst="rect">
+            <a:avLst/>
+          </a:prstGeom>
+          <a:noFill/>
+          <a:ln/>
+        </p:spPr>
+        <p:txBody>
+          <a:bodyPr wrap="square" rtlCol="0" anchor="ctr"/>
+          <a:lstStyle/>
+          <a:p>
+            <a:pPr algn="ctr" indent="0" marL="0">
+              <a:buNone/>
+            </a:pPr>
+            <a:r>
+              <a:rPr lang="en-US" sz="3600" b="1" dirty="0">
+                <a:solidFill>
+                  <a:srgbClr val="FFFFFF"/>
+                </a:solidFill>
+                <a:latin typeface="Georgia" pitchFamily="34" charset="0"/>
+                <a:ea typeface="Georgia" pitchFamily="34" charset="-122"/>
+                <a:cs typeface="Georgia" pitchFamily="34" charset="-120"/>
+              </a:rPr>
+              <a:t>Review &amp; Practise</a:t>
+            </a:r>
+            <a:endParaRPr lang="en-US" sz="3600" dirty="0"/>
+          </a:p>
+        </p:txBody>
+      </p:sp>
+      <p:sp>
+        <p:nvSpPr>
+          <p:cNvPr id="5" name="Text 3"/>
+          <p:cNvSpPr/>
+          <p:nvPr/>
+        </p:nvSpPr>
+        <p:spPr>
+          <a:xfrm>
+            <a:off x="731520" y="2560320"/>
+            <a:ext cx="7680960" cy="548640"/>
+          </a:xfrm>
+          <a:prstGeom prst="rect">
+            <a:avLst/>
+          </a:prstGeom>
+          <a:noFill/>
+          <a:ln/>
+        </p:spPr>
+        <p:txBody>
+          <a:bodyPr wrap="square" rtlCol="0" anchor="ctr"/>
+          <a:lstStyle/>
+          <a:p>
+            <a:pPr algn="ctr" indent="0" marL="0">
+              <a:buNone/>
+            </a:pPr>
+            <a:r>
+              <a:rPr lang="en-US" sz="2000" dirty="0">
+                <a:solidFill>
+                  <a:srgbClr val="2A9D8F"/>
                 </a:solidFill>
                 <a:latin typeface="Calibri" pitchFamily="34" charset="0"/>
                 <a:ea typeface="Calibri" pitchFamily="34" charset="-122"/>
@@ -2594,7 +4831,7 @@
               </a:rPr>
               <a:t>mrzocchi.com</a:t>
             </a:r>
-            <a:endParaRPr lang="en-US" sz="1100" dirty="0"/>
+            <a:endParaRPr lang="en-US" sz="2000" dirty="0"/>
           </a:p>
         </p:txBody>
       </p:sp>
